--- a/wedding-deck/build/結婚式_マルバツクイズ＆ビンゴ.pptx
+++ b/wedding-deck/build/結婚式_マルバツクイズ＆ビンゴ.pptx
@@ -32,8 +32,6 @@
     <p:sldId id="280" r:id="rId32"/>
     <p:sldId id="281" r:id="rId33"/>
     <p:sldId id="282" r:id="rId34"/>
-    <p:sldId id="283" r:id="rId35"/>
-    <p:sldId id="284" r:id="rId36"/>
   </p:sldIdLst>
   <p:sldSz cx="12192000" cy="6858000" type="screen4x3"/>
   <p:notesSz cx="6858000" cy="9144000"/>
@@ -551,7 +549,7 @@
           <a:p/>
           <a:p>
             <a:r>
-              <a:t>{{司会者名}} を実際のお名前に差し替えてください。×の問題にしたい場合は、わざと違うお名前を入れて、解説を『正解は×！本当は〇〇さんでした』に変え、赤枠の位置を×側に動かしてください。</a:t>
+              <a:t>ライト目の1問目。お名前の表記（漢字・読み）だけご確認ください。</a:t>
             </a:r>
           </a:p>
         </p:txBody>
@@ -621,7 +619,7 @@
           <a:lstStyle/>
           <a:p>
             <a:r>
-              <a:t>【第10問】正解：○</a:t>
+              <a:t>【第10問】正解：×</a:t>
             </a:r>
           </a:p>
           <a:p>
@@ -642,7 +640,7 @@
           <a:p/>
           <a:p>
             <a:r>
-              <a:t>元ネタ：入籍前にやらかしたエピソード＝新郎が社員旅行で左手薬指を負傷。</a:t>
+              <a:t>ダミー選択肢（VIVANT）を出題文に使った×問題。</a:t>
             </a:r>
           </a:p>
         </p:txBody>
@@ -733,7 +731,7 @@
           <a:p/>
           <a:p>
             <a:r>
-              <a:t>ダミー選択肢（VIVANT）を出題文に使った×問題。</a:t>
+              <a:t>ダミー選択肢（目覚まし）を出題文に使った×問題。</a:t>
             </a:r>
           </a:p>
         </p:txBody>
@@ -803,7 +801,7 @@
           <a:lstStyle/>
           <a:p>
             <a:r>
-              <a:t>【第12問】正解：○</a:t>
+              <a:t>【第12問】正解：×</a:t>
             </a:r>
           </a:p>
           <a:p>
@@ -824,7 +822,7 @@
           <a:p/>
           <a:p>
             <a:r>
-              <a:t>元ネタ：新郎が新婦にやめて欲しいこと＝酔って帰ってきたら床で寝ること。</a:t>
+              <a:t>ダミー選択肢（新しい趣味）を出題文に使った×問題。</a:t>
             </a:r>
           </a:p>
         </p:txBody>
@@ -894,7 +892,7 @@
           <a:lstStyle/>
           <a:p>
             <a:r>
-              <a:t>【第13問】正解：×</a:t>
+              <a:t>【第13問】正解：○</a:t>
             </a:r>
           </a:p>
           <a:p>
@@ -915,7 +913,7 @@
           <a:p/>
           <a:p>
             <a:r>
-              <a:t>ダミー選択肢（新しい趣味）を出題文に使った×問題。</a:t>
+              <a:t>ご指定の最終問題。</a:t>
             </a:r>
           </a:p>
         </p:txBody>
@@ -985,28 +983,7 @@
           <a:lstStyle/>
           <a:p>
             <a:r>
-              <a:t>【第14問】正解：○</a:t>
-            </a:r>
-          </a:p>
-          <a:p>
-            <a:r>
-              <a:t>① 問題を読み上げる</a:t>
-            </a:r>
-          </a:p>
-          <a:p>
-            <a:r>
-              <a:t>② クリック → 10秒カウントダウン（BGMが鳴ります）。会場の皆さまに移動していただく</a:t>
-            </a:r>
-          </a:p>
-          <a:p>
-            <a:r>
-              <a:t>③ クリック → 正解の赤枠が点滅＋効果音、解説が出ます</a:t>
-            </a:r>
-          </a:p>
-          <a:p/>
-          <a:p>
-            <a:r>
-              <a:t>ご指定の最終問題。</a:t>
+              <a:t>{{優勝者のお名前}} を当日その場で入力するか、口頭で読み上げてください。</a:t>
             </a:r>
           </a:p>
         </p:txBody>
@@ -1076,7 +1053,54 @@
           <a:lstStyle/>
           <a:p>
             <a:r>
-              <a:t>{{優勝者のお名前}} を当日その場で入力するか、口頭で読み上げてください。</a:t>
+              <a:t>スライドを表示した瞬間にBGMが自動再生されます（クリック不要）。</a:t>
+            </a:r>
+          </a:p>
+          <a:p>
+            <a:r>
+              <a:t>※ 今入っているのは無音のダミー音源です。本番までに差し替えが必要です。</a:t>
+            </a:r>
+          </a:p>
+          <a:p/>
+          <a:p>
+            <a:r>
+              <a:t>【音源の差し替え手順】</a:t>
+            </a:r>
+          </a:p>
+          <a:p>
+            <a:r>
+              <a:t>1. スライドの左外（グレー部分）にあるスピーカーアイコンを選択して削除</a:t>
+            </a:r>
+          </a:p>
+          <a:p>
+            <a:r>
+              <a:t>2. [挿入]→[オーディオ]→[このコンピューター上のオーディオ] でインスト音源を挿入</a:t>
+            </a:r>
+          </a:p>
+          <a:p>
+            <a:r>
+              <a:t>3. 挿入したスピーカーアイコンをスライドの外へドラッグして見えない位置に移動</a:t>
+            </a:r>
+          </a:p>
+          <a:p>
+            <a:r>
+              <a:t>4. 音声を選択 →[再生]タブ→[開始]を「自動」にする</a:t>
+            </a:r>
+          </a:p>
+          <a:p>
+            <a:r>
+              <a:t>   （複数スライドにまたがって流したい場合は「スライド切り替え後も再生」にチェック）</a:t>
+            </a:r>
+          </a:p>
+          <a:p/>
+          <a:p>
+            <a:r>
+              <a:t>※ 楽曲そのものはこちらではダウンロードできません（著作権のため）。</a:t>
+            </a:r>
+          </a:p>
+          <a:p>
+            <a:r>
+              <a:t>　 音源をお送りいただければ、この作業込みで組み込んだものをお渡しします。</a:t>
             </a:r>
           </a:p>
         </p:txBody>
@@ -1447,183 +1471,7 @@
           <a:p/>
           <a:p>
             <a:r>
-              <a:t>{{台風番号}} を当日の号数に差し替えてください。</a:t>
-            </a:r>
-          </a:p>
-        </p:txBody>
-      </p:sp>
-      <p:sp>
-        <p:nvSpPr>
-          <p:cNvPr id="4" name="Slide Number Placeholder 3"/>
-          <p:cNvSpPr>
-            <a:spLocks noGrp="1"/>
-          </p:cNvSpPr>
-          <p:nvPr>
-            <p:ph type="sldNum" idx="5" sz="quarter"/>
-          </p:nvPr>
-        </p:nvSpPr>
-        <p:spPr/>
-      </p:sp>
-    </p:spTree>
-  </p:cSld>
-  <p:clrMapOvr>
-    <a:masterClrMapping/>
-  </p:clrMapOvr>
-</p:notes>
-</file>
-
-<file path=ppt/notesSlides/notesSlide20.xml><?xml version="1.0" encoding="utf-8"?>
-<p:notes xmlns:a="http://schemas.openxmlformats.org/drawingml/2006/main" xmlns:p="http://schemas.openxmlformats.org/presentationml/2006/main" xmlns:r="http://schemas.openxmlformats.org/officeDocument/2006/relationships">
-  <p:cSld>
-    <p:spTree>
-      <p:nvGrpSpPr>
-        <p:cNvPr id="1" name=""/>
-        <p:cNvGrpSpPr/>
-        <p:nvPr/>
-      </p:nvGrpSpPr>
-      <p:grpSpPr>
-        <a:xfrm>
-          <a:off x="0" y="0"/>
-          <a:ext cx="0" cy="0"/>
-          <a:chOff x="0" y="0"/>
-          <a:chExt cx="0" cy="0"/>
-        </a:xfrm>
-      </p:grpSpPr>
-      <p:sp>
-        <p:nvSpPr>
-          <p:cNvPr id="2" name="Slide Image Placeholder 1"/>
-          <p:cNvSpPr>
-            <a:spLocks noGrp="1"/>
-          </p:cNvSpPr>
-          <p:nvPr>
-            <p:ph type="sldImg" idx="2"/>
-          </p:nvPr>
-        </p:nvSpPr>
-        <p:spPr/>
-      </p:sp>
-      <p:sp>
-        <p:nvSpPr>
-          <p:cNvPr id="3" name="Notes Placeholder 2"/>
-          <p:cNvSpPr>
-            <a:spLocks noGrp="1"/>
-          </p:cNvSpPr>
-          <p:nvPr>
-            <p:ph type="body" idx="3" sz="quarter"/>
-          </p:nvPr>
-        </p:nvSpPr>
-        <p:spPr/>
-        <p:txBody>
-          <a:bodyPr/>
-          <a:lstStyle/>
-          <a:p>
-            <a:r>
-              <a:t>スライドを表示すると自動で「ファンファーレ」が鳴ります。</a:t>
-            </a:r>
-          </a:p>
-        </p:txBody>
-      </p:sp>
-      <p:sp>
-        <p:nvSpPr>
-          <p:cNvPr id="4" name="Slide Number Placeholder 3"/>
-          <p:cNvSpPr>
-            <a:spLocks noGrp="1"/>
-          </p:cNvSpPr>
-          <p:nvPr>
-            <p:ph type="sldNum" idx="5" sz="quarter"/>
-          </p:nvPr>
-        </p:nvSpPr>
-        <p:spPr/>
-      </p:sp>
-    </p:spTree>
-  </p:cSld>
-  <p:clrMapOvr>
-    <a:masterClrMapping/>
-  </p:clrMapOvr>
-</p:notes>
-</file>
-
-<file path=ppt/notesSlides/notesSlide21.xml><?xml version="1.0" encoding="utf-8"?>
-<p:notes xmlns:a="http://schemas.openxmlformats.org/drawingml/2006/main" xmlns:p="http://schemas.openxmlformats.org/presentationml/2006/main" xmlns:r="http://schemas.openxmlformats.org/officeDocument/2006/relationships">
-  <p:cSld>
-    <p:spTree>
-      <p:nvGrpSpPr>
-        <p:cNvPr id="1" name=""/>
-        <p:cNvGrpSpPr/>
-        <p:nvPr/>
-      </p:nvGrpSpPr>
-      <p:grpSpPr>
-        <a:xfrm>
-          <a:off x="0" y="0"/>
-          <a:ext cx="0" cy="0"/>
-          <a:chOff x="0" y="0"/>
-          <a:chExt cx="0" cy="0"/>
-        </a:xfrm>
-      </p:grpSpPr>
-      <p:sp>
-        <p:nvSpPr>
-          <p:cNvPr id="2" name="Slide Image Placeholder 1"/>
-          <p:cNvSpPr>
-            <a:spLocks noGrp="1"/>
-          </p:cNvSpPr>
-          <p:nvPr>
-            <p:ph type="sldImg" idx="2"/>
-          </p:nvPr>
-        </p:nvSpPr>
-        <p:spPr/>
-      </p:sp>
-      <p:sp>
-        <p:nvSpPr>
-          <p:cNvPr id="3" name="Notes Placeholder 2"/>
-          <p:cNvSpPr>
-            <a:spLocks noGrp="1"/>
-          </p:cNvSpPr>
-          <p:nvPr>
-            <p:ph type="body" idx="3" sz="quarter"/>
-          </p:nvPr>
-        </p:nvSpPr>
-        <p:spPr/>
-        <p:txBody>
-          <a:bodyPr/>
-          <a:lstStyle/>
-          <a:p>
-            <a:r>
-              <a:t>【差し替え手順（ご自身でやる場合）】</a:t>
-            </a:r>
-          </a:p>
-          <a:p>
-            <a:r>
-              <a:t>1. このスライドの左外（グレー部分）にあるスピーカーアイコンを選択して削除</a:t>
-            </a:r>
-          </a:p>
-          <a:p>
-            <a:r>
-              <a:t>2. [挿入] → [オーディオ] → [このコンピューター上のオーディオ] で「家族になろうよ」のmp3を挿入</a:t>
-            </a:r>
-          </a:p>
-          <a:p>
-            <a:r>
-              <a:t>3. 挿入したスピーカーアイコンをスライドの外へドラッグして見えない位置に移動</a:t>
-            </a:r>
-          </a:p>
-          <a:p>
-            <a:r>
-              <a:t>4. 挿入した音声を選択 →[アニメーション]→[アニメーションウィンドウ]→[トリガー]→</a:t>
-            </a:r>
-          </a:p>
-          <a:p>
-            <a:r>
-              <a:t>   [クリック時] →「BGM再生ボタン」 を指定する</a:t>
-            </a:r>
-          </a:p>
-          <a:p>
-            <a:r>
-              <a:t>   （※もともと同じ設定が入っています。同じ形にすれば動きは変わりません）</a:t>
-            </a:r>
-          </a:p>
-          <a:p/>
-          <a:p>
-            <a:r>
-              <a:t>※ mp3をお送りいただければ、この作業込みで組み込んだものをお渡しできます。</a:t>
+              <a:t>{{台風番号}} を当日の号数に差し替えてください。×の問題にしたい場合は、わざと違う号数を入れて赤枠を×側へ動かしてください。</a:t>
             </a:r>
           </a:p>
         </p:txBody>
@@ -1714,7 +1562,7 @@
           <a:p/>
           <a:p>
             <a:r>
-              <a:t>答えはお二人しか分かりません。当日の空気を見て○か×かを決め、正解なら赤枠はこのまま、×にするなら赤枠を×側へ動かしてください。表現をやわらげたい場合は『新郎新婦が最後にハグしたのは1週間以内である』などに差し替えても同じ構成で使えます。</a:t>
+              <a:t>答えはお二人しか分かりません。当日の空気を見て○か×かを決め、○のままでよければ赤枠はそのまま、×にするなら赤枠を×側へ動かしてください。やわらげたい場合は『新郎新婦が最後にハグしたのは1週間以内である』でも同じ構成で使えます。</a:t>
             </a:r>
           </a:p>
         </p:txBody>
@@ -1805,7 +1653,7 @@
           <a:p/>
           <a:p>
             <a:r>
-              <a:t>元ネタ：初デートで新郎がやらかした失敗＝待ち合わせに遅刻（1時間）。</a:t>
+              <a:t>元ネタ：初デートで新郎がやらかした失敗＝待ち合わせに1時間遅刻。</a:t>
             </a:r>
           </a:p>
         </p:txBody>
@@ -2169,7 +2017,7 @@
           <a:p/>
           <a:p>
             <a:r>
-              <a:t>写真は1枚しかお預かりできていないため『これは新郎か？』の○×問題にしています。他の方の幼少期写真が用意できれば、4枚並べて『新郎はどれ？』に作り替えられます。</a:t>
+              <a:t>AI生成写真あてクイズ。○側＝本物（口が開いている幼少期／カルピス）、×側＝AI生成（口が閉じている幼少期／ワイン。背景のポスターの文字が崩れています）。左右を入れ替えたい場合は content.py の PHOTO4 の並びを入れ替えて、赤枠も反対側へ。</a:t>
             </a:r>
           </a:p>
         </p:txBody>
@@ -2260,7 +2108,7 @@
           <a:p/>
           <a:p>
             <a:r>
-              <a:t>『るい or るいぴー』のネタ。正しい方に合わせて赤枠の位置と解説を調整してください。</a:t>
+              <a:t>元ネタ：入籍前にやらかしたエピソード＝新郎が社員旅行で左手薬指を負傷。</a:t>
             </a:r>
           </a:p>
         </p:txBody>
@@ -5396,13 +5244,13 @@
               </a:lnSpc>
             </a:pPr>
             <a:r>
-              <a:rPr sz="3000" b="1" lang="ja-JP" altLang="en-US">
+              <a:rPr sz="2800" b="1" lang="ja-JP" altLang="en-US">
                 <a:solidFill>
                   <a:srgbClr val="3A2E2A"/>
                 </a:solidFill>
                 <a:latin typeface="Meiryo"/>
               </a:rPr>
-              <a:t>＆ ビンゴ大会 🎉</a:t>
+              <a:t>→ 中村になろうよ → ビンゴ大会 🎉</a:t>
             </a:r>
           </a:p>
         </p:txBody>
@@ -5618,7 +5466,92 @@
       </p:sp>
       <p:sp>
         <p:nvSpPr>
-          <p:cNvPr id="6" name="Rounded Rectangle 5"/>
+          <p:cNvPr id="6" name="Donut 5"/>
+          <p:cNvSpPr/>
+          <p:nvPr/>
+        </p:nvSpPr>
+        <p:spPr>
+          <a:xfrm>
+            <a:off x="2775000" y="3440000"/>
+            <a:ext cx="1000000" cy="1000000"/>
+          </a:xfrm>
+          <a:prstGeom prst="donut">
+            <a:avLst>
+              <a:gd name="adj" fmla="val 13000"/>
+            </a:avLst>
+          </a:prstGeom>
+          <a:solidFill>
+            <a:srgbClr val="D94F70"/>
+          </a:solidFill>
+          <a:ln>
+            <a:noFill/>
+          </a:ln>
+          <a:effectLst/>
+        </p:spPr>
+        <p:style>
+          <a:lnRef idx="1">
+            <a:schemeClr val="accent1"/>
+          </a:lnRef>
+          <a:fillRef idx="3">
+            <a:schemeClr val="accent1"/>
+          </a:fillRef>
+          <a:effectRef idx="2">
+            <a:schemeClr val="accent1"/>
+          </a:effectRef>
+          <a:fontRef idx="minor">
+            <a:schemeClr val="lt1"/>
+          </a:fontRef>
+        </p:style>
+        <p:txBody>
+          <a:bodyPr rtlCol="0" anchor="ctr"/>
+          <a:lstStyle/>
+          <a:p>
+            <a:pPr algn="ctr"/>
+          </a:p>
+        </p:txBody>
+      </p:sp>
+      <p:sp>
+        <p:nvSpPr>
+          <p:cNvPr id="7" name="TextBox 6"/>
+          <p:cNvSpPr txBox="1"/>
+          <p:nvPr/>
+        </p:nvSpPr>
+        <p:spPr>
+          <a:xfrm>
+            <a:off x="1150000" y="4590000"/>
+            <a:ext cx="4250000" cy="640000"/>
+          </a:xfrm>
+          <a:prstGeom prst="rect">
+            <a:avLst/>
+          </a:prstGeom>
+          <a:noFill/>
+        </p:spPr>
+        <p:txBody>
+          <a:bodyPr wrap="square" anchor="ctr" lIns="90000" rIns="90000" tIns="45000" bIns="45000">
+            <a:spAutoFit/>
+          </a:bodyPr>
+          <a:lstStyle/>
+          <a:p>
+            <a:pPr algn="ctr">
+              <a:lnSpc>
+                <a:spcPct val="118000"/>
+              </a:lnSpc>
+            </a:pPr>
+            <a:r>
+              <a:rPr sz="1900" b="1" lang="ja-JP" altLang="en-US">
+                <a:solidFill>
+                  <a:srgbClr val="3A2E2A"/>
+                </a:solidFill>
+                <a:latin typeface="Meiryo"/>
+              </a:rPr>
+              <a:t>画面に向かって 左 へ移動</a:t>
+            </a:r>
+          </a:p>
+        </p:txBody>
+      </p:sp>
+      <p:sp>
+        <p:nvSpPr>
+          <p:cNvPr id="8" name="Rounded Rectangle 7"/>
           <p:cNvSpPr/>
           <p:nvPr/>
         </p:nvSpPr>
@@ -5661,91 +5594,6 @@
           <a:lstStyle/>
           <a:p>
             <a:pPr algn="ctr"/>
-          </a:p>
-        </p:txBody>
-      </p:sp>
-      <p:sp>
-        <p:nvSpPr>
-          <p:cNvPr id="7" name="Donut 6"/>
-          <p:cNvSpPr/>
-          <p:nvPr/>
-        </p:nvSpPr>
-        <p:spPr>
-          <a:xfrm>
-            <a:off x="2775000" y="3440000"/>
-            <a:ext cx="1000000" cy="1000000"/>
-          </a:xfrm>
-          <a:prstGeom prst="donut">
-            <a:avLst>
-              <a:gd name="adj" fmla="val 13000"/>
-            </a:avLst>
-          </a:prstGeom>
-          <a:solidFill>
-            <a:srgbClr val="D94F70"/>
-          </a:solidFill>
-          <a:ln>
-            <a:noFill/>
-          </a:ln>
-          <a:effectLst/>
-        </p:spPr>
-        <p:style>
-          <a:lnRef idx="1">
-            <a:schemeClr val="accent1"/>
-          </a:lnRef>
-          <a:fillRef idx="3">
-            <a:schemeClr val="accent1"/>
-          </a:fillRef>
-          <a:effectRef idx="2">
-            <a:schemeClr val="accent1"/>
-          </a:effectRef>
-          <a:fontRef idx="minor">
-            <a:schemeClr val="lt1"/>
-          </a:fontRef>
-        </p:style>
-        <p:txBody>
-          <a:bodyPr rtlCol="0" anchor="ctr"/>
-          <a:lstStyle/>
-          <a:p>
-            <a:pPr algn="ctr"/>
-          </a:p>
-        </p:txBody>
-      </p:sp>
-      <p:sp>
-        <p:nvSpPr>
-          <p:cNvPr id="8" name="TextBox 7"/>
-          <p:cNvSpPr txBox="1"/>
-          <p:nvPr/>
-        </p:nvSpPr>
-        <p:spPr>
-          <a:xfrm>
-            <a:off x="1150000" y="4590000"/>
-            <a:ext cx="4250000" cy="640000"/>
-          </a:xfrm>
-          <a:prstGeom prst="rect">
-            <a:avLst/>
-          </a:prstGeom>
-          <a:noFill/>
-        </p:spPr>
-        <p:txBody>
-          <a:bodyPr wrap="square" anchor="ctr" lIns="90000" rIns="90000" tIns="45000" bIns="45000">
-            <a:spAutoFit/>
-          </a:bodyPr>
-          <a:lstStyle/>
-          <a:p>
-            <a:pPr algn="ctr">
-              <a:lnSpc>
-                <a:spcPct val="118000"/>
-              </a:lnSpc>
-            </a:pPr>
-            <a:r>
-              <a:rPr sz="1900" b="1" lang="ja-JP" altLang="en-US">
-                <a:solidFill>
-                  <a:srgbClr val="3A2E2A"/>
-                </a:solidFill>
-                <a:latin typeface="Meiryo"/>
-              </a:rPr>
-              <a:t>画面に向かって 左 へ移動</a:t>
-            </a:r>
           </a:p>
         </p:txBody>
       </p:sp>
@@ -7507,7 +7355,92 @@
       </p:sp>
       <p:sp>
         <p:nvSpPr>
-          <p:cNvPr id="6" name="Rounded Rectangle 5"/>
+          <p:cNvPr id="6" name="Donut 5"/>
+          <p:cNvSpPr/>
+          <p:nvPr/>
+        </p:nvSpPr>
+        <p:spPr>
+          <a:xfrm>
+            <a:off x="2775000" y="3440000"/>
+            <a:ext cx="1000000" cy="1000000"/>
+          </a:xfrm>
+          <a:prstGeom prst="donut">
+            <a:avLst>
+              <a:gd name="adj" fmla="val 13000"/>
+            </a:avLst>
+          </a:prstGeom>
+          <a:solidFill>
+            <a:srgbClr val="D94F70"/>
+          </a:solidFill>
+          <a:ln>
+            <a:noFill/>
+          </a:ln>
+          <a:effectLst/>
+        </p:spPr>
+        <p:style>
+          <a:lnRef idx="1">
+            <a:schemeClr val="accent1"/>
+          </a:lnRef>
+          <a:fillRef idx="3">
+            <a:schemeClr val="accent1"/>
+          </a:fillRef>
+          <a:effectRef idx="2">
+            <a:schemeClr val="accent1"/>
+          </a:effectRef>
+          <a:fontRef idx="minor">
+            <a:schemeClr val="lt1"/>
+          </a:fontRef>
+        </p:style>
+        <p:txBody>
+          <a:bodyPr rtlCol="0" anchor="ctr"/>
+          <a:lstStyle/>
+          <a:p>
+            <a:pPr algn="ctr"/>
+          </a:p>
+        </p:txBody>
+      </p:sp>
+      <p:sp>
+        <p:nvSpPr>
+          <p:cNvPr id="7" name="TextBox 6"/>
+          <p:cNvSpPr txBox="1"/>
+          <p:nvPr/>
+        </p:nvSpPr>
+        <p:spPr>
+          <a:xfrm>
+            <a:off x="1150000" y="4590000"/>
+            <a:ext cx="4250000" cy="640000"/>
+          </a:xfrm>
+          <a:prstGeom prst="rect">
+            <a:avLst/>
+          </a:prstGeom>
+          <a:noFill/>
+        </p:spPr>
+        <p:txBody>
+          <a:bodyPr wrap="square" anchor="ctr" lIns="90000" rIns="90000" tIns="45000" bIns="45000">
+            <a:spAutoFit/>
+          </a:bodyPr>
+          <a:lstStyle/>
+          <a:p>
+            <a:pPr algn="ctr">
+              <a:lnSpc>
+                <a:spcPct val="118000"/>
+              </a:lnSpc>
+            </a:pPr>
+            <a:r>
+              <a:rPr sz="1900" b="1" lang="ja-JP" altLang="en-US">
+                <a:solidFill>
+                  <a:srgbClr val="3A2E2A"/>
+                </a:solidFill>
+                <a:latin typeface="Meiryo"/>
+              </a:rPr>
+              <a:t>画面に向かって 左 へ移動</a:t>
+            </a:r>
+          </a:p>
+        </p:txBody>
+      </p:sp>
+      <p:sp>
+        <p:nvSpPr>
+          <p:cNvPr id="8" name="Rounded Rectangle 7"/>
           <p:cNvSpPr/>
           <p:nvPr/>
         </p:nvSpPr>
@@ -7550,91 +7483,6 @@
           <a:lstStyle/>
           <a:p>
             <a:pPr algn="ctr"/>
-          </a:p>
-        </p:txBody>
-      </p:sp>
-      <p:sp>
-        <p:nvSpPr>
-          <p:cNvPr id="7" name="Donut 6"/>
-          <p:cNvSpPr/>
-          <p:nvPr/>
-        </p:nvSpPr>
-        <p:spPr>
-          <a:xfrm>
-            <a:off x="2775000" y="3440000"/>
-            <a:ext cx="1000000" cy="1000000"/>
-          </a:xfrm>
-          <a:prstGeom prst="donut">
-            <a:avLst>
-              <a:gd name="adj" fmla="val 13000"/>
-            </a:avLst>
-          </a:prstGeom>
-          <a:solidFill>
-            <a:srgbClr val="D94F70"/>
-          </a:solidFill>
-          <a:ln>
-            <a:noFill/>
-          </a:ln>
-          <a:effectLst/>
-        </p:spPr>
-        <p:style>
-          <a:lnRef idx="1">
-            <a:schemeClr val="accent1"/>
-          </a:lnRef>
-          <a:fillRef idx="3">
-            <a:schemeClr val="accent1"/>
-          </a:fillRef>
-          <a:effectRef idx="2">
-            <a:schemeClr val="accent1"/>
-          </a:effectRef>
-          <a:fontRef idx="minor">
-            <a:schemeClr val="lt1"/>
-          </a:fontRef>
-        </p:style>
-        <p:txBody>
-          <a:bodyPr rtlCol="0" anchor="ctr"/>
-          <a:lstStyle/>
-          <a:p>
-            <a:pPr algn="ctr"/>
-          </a:p>
-        </p:txBody>
-      </p:sp>
-      <p:sp>
-        <p:nvSpPr>
-          <p:cNvPr id="8" name="TextBox 7"/>
-          <p:cNvSpPr txBox="1"/>
-          <p:nvPr/>
-        </p:nvSpPr>
-        <p:spPr>
-          <a:xfrm>
-            <a:off x="1150000" y="4590000"/>
-            <a:ext cx="4250000" cy="640000"/>
-          </a:xfrm>
-          <a:prstGeom prst="rect">
-            <a:avLst/>
-          </a:prstGeom>
-          <a:noFill/>
-        </p:spPr>
-        <p:txBody>
-          <a:bodyPr wrap="square" anchor="ctr" lIns="90000" rIns="90000" tIns="45000" bIns="45000">
-            <a:spAutoFit/>
-          </a:bodyPr>
-          <a:lstStyle/>
-          <a:p>
-            <a:pPr algn="ctr">
-              <a:lnSpc>
-                <a:spcPct val="118000"/>
-              </a:lnSpc>
-            </a:pPr>
-            <a:r>
-              <a:rPr sz="1900" b="1" lang="ja-JP" altLang="en-US">
-                <a:solidFill>
-                  <a:srgbClr val="3A2E2A"/>
-                </a:solidFill>
-                <a:latin typeface="Meiryo"/>
-              </a:rPr>
-              <a:t>画面に向かって 左 へ移動</a:t>
-            </a:r>
           </a:p>
         </p:txBody>
       </p:sp>
@@ -9396,7 +9244,92 @@
       </p:sp>
       <p:sp>
         <p:nvSpPr>
-          <p:cNvPr id="6" name="Rounded Rectangle 5"/>
+          <p:cNvPr id="6" name="Donut 5"/>
+          <p:cNvSpPr/>
+          <p:nvPr/>
+        </p:nvSpPr>
+        <p:spPr>
+          <a:xfrm>
+            <a:off x="2775000" y="3440000"/>
+            <a:ext cx="1000000" cy="1000000"/>
+          </a:xfrm>
+          <a:prstGeom prst="donut">
+            <a:avLst>
+              <a:gd name="adj" fmla="val 13000"/>
+            </a:avLst>
+          </a:prstGeom>
+          <a:solidFill>
+            <a:srgbClr val="D94F70"/>
+          </a:solidFill>
+          <a:ln>
+            <a:noFill/>
+          </a:ln>
+          <a:effectLst/>
+        </p:spPr>
+        <p:style>
+          <a:lnRef idx="1">
+            <a:schemeClr val="accent1"/>
+          </a:lnRef>
+          <a:fillRef idx="3">
+            <a:schemeClr val="accent1"/>
+          </a:fillRef>
+          <a:effectRef idx="2">
+            <a:schemeClr val="accent1"/>
+          </a:effectRef>
+          <a:fontRef idx="minor">
+            <a:schemeClr val="lt1"/>
+          </a:fontRef>
+        </p:style>
+        <p:txBody>
+          <a:bodyPr rtlCol="0" anchor="ctr"/>
+          <a:lstStyle/>
+          <a:p>
+            <a:pPr algn="ctr"/>
+          </a:p>
+        </p:txBody>
+      </p:sp>
+      <p:sp>
+        <p:nvSpPr>
+          <p:cNvPr id="7" name="TextBox 6"/>
+          <p:cNvSpPr txBox="1"/>
+          <p:nvPr/>
+        </p:nvSpPr>
+        <p:spPr>
+          <a:xfrm>
+            <a:off x="1150000" y="4590000"/>
+            <a:ext cx="4250000" cy="640000"/>
+          </a:xfrm>
+          <a:prstGeom prst="rect">
+            <a:avLst/>
+          </a:prstGeom>
+          <a:noFill/>
+        </p:spPr>
+        <p:txBody>
+          <a:bodyPr wrap="square" anchor="ctr" lIns="90000" rIns="90000" tIns="45000" bIns="45000">
+            <a:spAutoFit/>
+          </a:bodyPr>
+          <a:lstStyle/>
+          <a:p>
+            <a:pPr algn="ctr">
+              <a:lnSpc>
+                <a:spcPct val="118000"/>
+              </a:lnSpc>
+            </a:pPr>
+            <a:r>
+              <a:rPr sz="1900" b="1" lang="ja-JP" altLang="en-US">
+                <a:solidFill>
+                  <a:srgbClr val="3A2E2A"/>
+                </a:solidFill>
+                <a:latin typeface="Meiryo"/>
+              </a:rPr>
+              <a:t>画面に向かって 左 へ移動</a:t>
+            </a:r>
+          </a:p>
+        </p:txBody>
+      </p:sp>
+      <p:sp>
+        <p:nvSpPr>
+          <p:cNvPr id="8" name="Rounded Rectangle 7"/>
           <p:cNvSpPr/>
           <p:nvPr/>
         </p:nvSpPr>
@@ -9439,91 +9372,6 @@
           <a:lstStyle/>
           <a:p>
             <a:pPr algn="ctr"/>
-          </a:p>
-        </p:txBody>
-      </p:sp>
-      <p:sp>
-        <p:nvSpPr>
-          <p:cNvPr id="7" name="Donut 6"/>
-          <p:cNvSpPr/>
-          <p:nvPr/>
-        </p:nvSpPr>
-        <p:spPr>
-          <a:xfrm>
-            <a:off x="2775000" y="3440000"/>
-            <a:ext cx="1000000" cy="1000000"/>
-          </a:xfrm>
-          <a:prstGeom prst="donut">
-            <a:avLst>
-              <a:gd name="adj" fmla="val 13000"/>
-            </a:avLst>
-          </a:prstGeom>
-          <a:solidFill>
-            <a:srgbClr val="D94F70"/>
-          </a:solidFill>
-          <a:ln>
-            <a:noFill/>
-          </a:ln>
-          <a:effectLst/>
-        </p:spPr>
-        <p:style>
-          <a:lnRef idx="1">
-            <a:schemeClr val="accent1"/>
-          </a:lnRef>
-          <a:fillRef idx="3">
-            <a:schemeClr val="accent1"/>
-          </a:fillRef>
-          <a:effectRef idx="2">
-            <a:schemeClr val="accent1"/>
-          </a:effectRef>
-          <a:fontRef idx="minor">
-            <a:schemeClr val="lt1"/>
-          </a:fontRef>
-        </p:style>
-        <p:txBody>
-          <a:bodyPr rtlCol="0" anchor="ctr"/>
-          <a:lstStyle/>
-          <a:p>
-            <a:pPr algn="ctr"/>
-          </a:p>
-        </p:txBody>
-      </p:sp>
-      <p:sp>
-        <p:nvSpPr>
-          <p:cNvPr id="8" name="TextBox 7"/>
-          <p:cNvSpPr txBox="1"/>
-          <p:nvPr/>
-        </p:nvSpPr>
-        <p:spPr>
-          <a:xfrm>
-            <a:off x="1150000" y="4590000"/>
-            <a:ext cx="4250000" cy="640000"/>
-          </a:xfrm>
-          <a:prstGeom prst="rect">
-            <a:avLst/>
-          </a:prstGeom>
-          <a:noFill/>
-        </p:spPr>
-        <p:txBody>
-          <a:bodyPr wrap="square" anchor="ctr" lIns="90000" rIns="90000" tIns="45000" bIns="45000">
-            <a:spAutoFit/>
-          </a:bodyPr>
-          <a:lstStyle/>
-          <a:p>
-            <a:pPr algn="ctr">
-              <a:lnSpc>
-                <a:spcPct val="118000"/>
-              </a:lnSpc>
-            </a:pPr>
-            <a:r>
-              <a:rPr sz="1900" b="1" lang="ja-JP" altLang="en-US">
-                <a:solidFill>
-                  <a:srgbClr val="3A2E2A"/>
-                </a:solidFill>
-                <a:latin typeface="Meiryo"/>
-              </a:rPr>
-              <a:t>画面に向かって 左 へ移動</a:t>
-            </a:r>
           </a:p>
         </p:txBody>
       </p:sp>
@@ -11180,40 +11028,16 @@
           </a:p>
         </p:txBody>
       </p:sp>
-      <p:pic>
-        <p:nvPicPr>
-          <p:cNvPr id="4" name="Picture 3" descr="groom_child.jpg"/>
-          <p:cNvPicPr>
-            <a:picLocks noChangeAspect="1"/>
-          </p:cNvPicPr>
-          <p:nvPr/>
-        </p:nvPicPr>
-        <p:blipFill>
-          <a:blip r:embed="rId3"/>
-          <a:stretch>
-            <a:fillRect/>
-          </a:stretch>
-        </p:blipFill>
-        <p:spPr>
-          <a:xfrm>
-            <a:off x="700000" y="1250000"/>
-            <a:ext cx="3000000" cy="4497000"/>
-          </a:xfrm>
-          <a:prstGeom prst="rect">
-            <a:avLst/>
-          </a:prstGeom>
-        </p:spPr>
-      </p:pic>
-      <p:sp>
-        <p:nvSpPr>
-          <p:cNvPr id="5" name="TextBox 4"/>
+      <p:sp>
+        <p:nvSpPr>
+          <p:cNvPr id="4" name="TextBox 3"/>
           <p:cNvSpPr txBox="1"/>
           <p:nvPr/>
         </p:nvSpPr>
         <p:spPr>
           <a:xfrm>
-            <a:off x="4100000" y="520000"/>
-            <a:ext cx="5900000" cy="1300000"/>
+            <a:off x="3300000" y="820000"/>
+            <a:ext cx="6900000" cy="900000"/>
           </a:xfrm>
           <a:prstGeom prst="rect">
             <a:avLst/>
@@ -11232,13 +11056,13 @@
               </a:lnSpc>
             </a:pPr>
             <a:r>
-              <a:rPr sz="2700" b="1" lang="ja-JP" altLang="en-US">
+              <a:rPr sz="2500" b="1" lang="ja-JP" altLang="en-US">
                 <a:solidFill>
                   <a:srgbClr val="3A2E2A"/>
                 </a:solidFill>
                 <a:latin typeface="Meiryo"/>
               </a:rPr>
-              <a:t>スクリーンに映っている</a:t>
+              <a:t>4枚のうち2枚はAIが作った写真。</a:t>
             </a:r>
           </a:p>
           <a:p>
@@ -11248,27 +11072,27 @@
               </a:lnSpc>
             </a:pPr>
             <a:r>
-              <a:rPr sz="2700" b="1" lang="ja-JP" altLang="en-US">
+              <a:rPr sz="2500" b="1" lang="ja-JP" altLang="en-US">
                 <a:solidFill>
                   <a:srgbClr val="3A2E2A"/>
                 </a:solidFill>
                 <a:latin typeface="Meiryo"/>
               </a:rPr>
-              <a:t>幼少期の写真は、新郎である</a:t>
-            </a:r>
-          </a:p>
-        </p:txBody>
-      </p:sp>
-      <p:sp>
-        <p:nvSpPr>
-          <p:cNvPr id="6" name="Rounded Rectangle 5"/>
+              <a:t>本物の2枚は ○ の側である</a:t>
+            </a:r>
+          </a:p>
+        </p:txBody>
+      </p:sp>
+      <p:sp>
+        <p:nvSpPr>
+          <p:cNvPr id="5" name="Rounded Rectangle 4"/>
           <p:cNvSpPr/>
           <p:nvPr/>
         </p:nvSpPr>
         <p:spPr>
           <a:xfrm>
-            <a:off x="4100000" y="2000000"/>
-            <a:ext cx="7300000" cy="1450000"/>
+            <a:off x="1150000" y="1880000"/>
+            <a:ext cx="4650000" cy="3720000"/>
           </a:xfrm>
           <a:prstGeom prst="roundRect">
             <a:avLst>
@@ -11309,14 +11133,157 @@
       </p:sp>
       <p:sp>
         <p:nvSpPr>
-          <p:cNvPr id="7" name="Rounded Rectangle 6"/>
+          <p:cNvPr id="6" name="Donut 5"/>
           <p:cNvSpPr/>
           <p:nvPr/>
         </p:nvSpPr>
         <p:spPr>
           <a:xfrm>
-            <a:off x="4100000" y="3650000"/>
-            <a:ext cx="7300000" cy="1450000"/>
+            <a:off x="3255000" y="1910000"/>
+            <a:ext cx="440000" cy="440000"/>
+          </a:xfrm>
+          <a:prstGeom prst="donut">
+            <a:avLst>
+              <a:gd name="adj" fmla="val 13000"/>
+            </a:avLst>
+          </a:prstGeom>
+          <a:solidFill>
+            <a:srgbClr val="D94F70"/>
+          </a:solidFill>
+          <a:ln>
+            <a:noFill/>
+          </a:ln>
+          <a:effectLst/>
+        </p:spPr>
+        <p:style>
+          <a:lnRef idx="1">
+            <a:schemeClr val="accent1"/>
+          </a:lnRef>
+          <a:fillRef idx="3">
+            <a:schemeClr val="accent1"/>
+          </a:fillRef>
+          <a:effectRef idx="2">
+            <a:schemeClr val="accent1"/>
+          </a:effectRef>
+          <a:fontRef idx="minor">
+            <a:schemeClr val="lt1"/>
+          </a:fontRef>
+        </p:style>
+        <p:txBody>
+          <a:bodyPr rtlCol="0" anchor="ctr"/>
+          <a:lstStyle/>
+          <a:p>
+            <a:pPr algn="ctr"/>
+          </a:p>
+        </p:txBody>
+      </p:sp>
+      <p:pic>
+        <p:nvPicPr>
+          <p:cNvPr id="7" name="Picture 6" descr="q_child_real.jpg"/>
+          <p:cNvPicPr>
+            <a:picLocks noChangeAspect="1"/>
+          </p:cNvPicPr>
+          <p:nvPr/>
+        </p:nvPicPr>
+        <p:blipFill>
+          <a:blip r:embed="rId3"/>
+          <a:stretch>
+            <a:fillRect/>
+          </a:stretch>
+        </p:blipFill>
+        <p:spPr>
+          <a:xfrm>
+            <a:off x="1872000" y="2600000"/>
+            <a:ext cx="1533000" cy="2300000"/>
+          </a:xfrm>
+          <a:prstGeom prst="rect">
+            <a:avLst/>
+          </a:prstGeom>
+          <a:ln w="25400">
+            <a:solidFill>
+              <a:srgbClr val="D94F70"/>
+            </a:solidFill>
+          </a:ln>
+        </p:spPr>
+      </p:pic>
+      <p:pic>
+        <p:nvPicPr>
+          <p:cNvPr id="8" name="Picture 7" descr="q_now_real.jpg"/>
+          <p:cNvPicPr>
+            <a:picLocks noChangeAspect="1"/>
+          </p:cNvPicPr>
+          <p:nvPr/>
+        </p:nvPicPr>
+        <p:blipFill>
+          <a:blip r:embed="rId4"/>
+          <a:stretch>
+            <a:fillRect/>
+          </a:stretch>
+        </p:blipFill>
+        <p:spPr>
+          <a:xfrm>
+            <a:off x="3545000" y="2600000"/>
+            <a:ext cx="1533000" cy="2300000"/>
+          </a:xfrm>
+          <a:prstGeom prst="rect">
+            <a:avLst/>
+          </a:prstGeom>
+          <a:ln w="25400">
+            <a:solidFill>
+              <a:srgbClr val="D94F70"/>
+            </a:solidFill>
+          </a:ln>
+        </p:spPr>
+      </p:pic>
+      <p:sp>
+        <p:nvSpPr>
+          <p:cNvPr id="9" name="TextBox 8"/>
+          <p:cNvSpPr txBox="1"/>
+          <p:nvPr/>
+        </p:nvSpPr>
+        <p:spPr>
+          <a:xfrm>
+            <a:off x="1150000" y="4980000"/>
+            <a:ext cx="4650000" cy="480000"/>
+          </a:xfrm>
+          <a:prstGeom prst="rect">
+            <a:avLst/>
+          </a:prstGeom>
+          <a:noFill/>
+        </p:spPr>
+        <p:txBody>
+          <a:bodyPr wrap="square" anchor="ctr" lIns="90000" rIns="90000" tIns="45000" bIns="45000">
+            <a:spAutoFit/>
+          </a:bodyPr>
+          <a:lstStyle/>
+          <a:p>
+            <a:pPr algn="ctr">
+              <a:lnSpc>
+                <a:spcPct val="118000"/>
+              </a:lnSpc>
+            </a:pPr>
+            <a:r>
+              <a:rPr sz="1700" b="1" lang="ja-JP" altLang="en-US">
+                <a:solidFill>
+                  <a:srgbClr val="3A2E2A"/>
+                </a:solidFill>
+                <a:latin typeface="Meiryo"/>
+              </a:rPr>
+              <a:t>画面に向かって 左 へ移動</a:t>
+            </a:r>
+          </a:p>
+        </p:txBody>
+      </p:sp>
+      <p:sp>
+        <p:nvSpPr>
+          <p:cNvPr id="10" name="Rounded Rectangle 9"/>
+          <p:cNvSpPr/>
+          <p:nvPr/>
+        </p:nvSpPr>
+        <p:spPr>
+          <a:xfrm>
+            <a:off x="6392000" y="1880000"/>
+            <a:ext cx="4650000" cy="3720000"/>
           </a:xfrm>
           <a:prstGeom prst="roundRect">
             <a:avLst>
@@ -11357,99 +11324,14 @@
       </p:sp>
       <p:sp>
         <p:nvSpPr>
-          <p:cNvPr id="8" name="Donut 7"/>
+          <p:cNvPr id="11" name="Rounded Rectangle 10"/>
           <p:cNvSpPr/>
           <p:nvPr/>
         </p:nvSpPr>
         <p:spPr>
-          <a:xfrm>
-            <a:off x="4430000" y="2275000"/>
-            <a:ext cx="900000" cy="900000"/>
-          </a:xfrm>
-          <a:prstGeom prst="donut">
-            <a:avLst>
-              <a:gd name="adj" fmla="val 13000"/>
-            </a:avLst>
-          </a:prstGeom>
-          <a:solidFill>
-            <a:srgbClr val="D94F70"/>
-          </a:solidFill>
-          <a:ln>
-            <a:noFill/>
-          </a:ln>
-          <a:effectLst/>
-        </p:spPr>
-        <p:style>
-          <a:lnRef idx="1">
-            <a:schemeClr val="accent1"/>
-          </a:lnRef>
-          <a:fillRef idx="3">
-            <a:schemeClr val="accent1"/>
-          </a:fillRef>
-          <a:effectRef idx="2">
-            <a:schemeClr val="accent1"/>
-          </a:effectRef>
-          <a:fontRef idx="minor">
-            <a:schemeClr val="lt1"/>
-          </a:fontRef>
-        </p:style>
-        <p:txBody>
-          <a:bodyPr rtlCol="0" anchor="ctr"/>
-          <a:lstStyle/>
-          <a:p>
-            <a:pPr algn="ctr"/>
-          </a:p>
-        </p:txBody>
-      </p:sp>
-      <p:sp>
-        <p:nvSpPr>
-          <p:cNvPr id="9" name="TextBox 8"/>
-          <p:cNvSpPr txBox="1"/>
-          <p:nvPr/>
-        </p:nvSpPr>
-        <p:spPr>
-          <a:xfrm>
-            <a:off x="5550000" y="2000000"/>
-            <a:ext cx="5550000" cy="1450000"/>
-          </a:xfrm>
-          <a:prstGeom prst="rect">
-            <a:avLst/>
-          </a:prstGeom>
-          <a:noFill/>
-        </p:spPr>
-        <p:txBody>
-          <a:bodyPr wrap="square" anchor="ctr" lIns="90000" rIns="90000" tIns="45000" bIns="45000">
-            <a:spAutoFit/>
-          </a:bodyPr>
-          <a:lstStyle/>
-          <a:p>
-            <a:pPr algn="l">
-              <a:lnSpc>
-                <a:spcPct val="118000"/>
-              </a:lnSpc>
-            </a:pPr>
-            <a:r>
-              <a:rPr sz="2400" b="1" lang="ja-JP" altLang="en-US">
-                <a:solidFill>
-                  <a:srgbClr val="3A2E2A"/>
-                </a:solidFill>
-                <a:latin typeface="Meiryo"/>
-              </a:rPr>
-              <a:t>画面に向かって 左 へ移動</a:t>
-            </a:r>
-          </a:p>
-        </p:txBody>
-      </p:sp>
-      <p:sp>
-        <p:nvSpPr>
-          <p:cNvPr id="10" name="Rounded Rectangle 9"/>
-          <p:cNvSpPr/>
-          <p:nvPr/>
-        </p:nvSpPr>
-        <p:spPr>
           <a:xfrm rot="2700000">
-            <a:off x="4457000" y="4285000"/>
-            <a:ext cx="846000" cy="180000"/>
+            <a:off x="8510200" y="2086000"/>
+            <a:ext cx="413600" cy="88000"/>
           </a:xfrm>
           <a:prstGeom prst="roundRect">
             <a:avLst>
@@ -11488,14 +11370,14 @@
       </p:sp>
       <p:sp>
         <p:nvSpPr>
-          <p:cNvPr id="11" name="Rounded Rectangle 10"/>
+          <p:cNvPr id="12" name="Rounded Rectangle 11"/>
           <p:cNvSpPr/>
           <p:nvPr/>
         </p:nvSpPr>
         <p:spPr>
           <a:xfrm rot="8100000">
-            <a:off x="4457000" y="4285000"/>
-            <a:ext cx="846000" cy="180000"/>
+            <a:off x="8510200" y="2086000"/>
+            <a:ext cx="413600" cy="88000"/>
           </a:xfrm>
           <a:prstGeom prst="roundRect">
             <a:avLst>
@@ -11532,16 +11414,74 @@
           </a:p>
         </p:txBody>
       </p:sp>
-      <p:sp>
-        <p:nvSpPr>
-          <p:cNvPr id="12" name="TextBox 11"/>
+      <p:pic>
+        <p:nvPicPr>
+          <p:cNvPr id="13" name="Picture 12" descr="q_child_ai.jpg"/>
+          <p:cNvPicPr>
+            <a:picLocks noChangeAspect="1"/>
+          </p:cNvPicPr>
+          <p:nvPr/>
+        </p:nvPicPr>
+        <p:blipFill>
+          <a:blip r:embed="rId5"/>
+          <a:stretch>
+            <a:fillRect/>
+          </a:stretch>
+        </p:blipFill>
+        <p:spPr>
+          <a:xfrm>
+            <a:off x="7114000" y="2600000"/>
+            <a:ext cx="1533000" cy="2300000"/>
+          </a:xfrm>
+          <a:prstGeom prst="rect">
+            <a:avLst/>
+          </a:prstGeom>
+          <a:ln w="25400">
+            <a:solidFill>
+              <a:srgbClr val="34558B"/>
+            </a:solidFill>
+          </a:ln>
+        </p:spPr>
+      </p:pic>
+      <p:pic>
+        <p:nvPicPr>
+          <p:cNvPr id="14" name="Picture 13" descr="q_now_ai.jpg"/>
+          <p:cNvPicPr>
+            <a:picLocks noChangeAspect="1"/>
+          </p:cNvPicPr>
+          <p:nvPr/>
+        </p:nvPicPr>
+        <p:blipFill>
+          <a:blip r:embed="rId6"/>
+          <a:stretch>
+            <a:fillRect/>
+          </a:stretch>
+        </p:blipFill>
+        <p:spPr>
+          <a:xfrm>
+            <a:off x="8787000" y="2600000"/>
+            <a:ext cx="1533000" cy="2300000"/>
+          </a:xfrm>
+          <a:prstGeom prst="rect">
+            <a:avLst/>
+          </a:prstGeom>
+          <a:ln w="25400">
+            <a:solidFill>
+              <a:srgbClr val="34558B"/>
+            </a:solidFill>
+          </a:ln>
+        </p:spPr>
+      </p:pic>
+      <p:sp>
+        <p:nvSpPr>
+          <p:cNvPr id="15" name="TextBox 14"/>
           <p:cNvSpPr txBox="1"/>
           <p:nvPr/>
         </p:nvSpPr>
         <p:spPr>
           <a:xfrm>
-            <a:off x="5550000" y="3650000"/>
-            <a:ext cx="5550000" cy="1450000"/>
+            <a:off x="6392000" y="4980000"/>
+            <a:ext cx="4650000" cy="480000"/>
           </a:xfrm>
           <a:prstGeom prst="rect">
             <a:avLst/>
@@ -11554,13 +11494,13 @@
           </a:bodyPr>
           <a:lstStyle/>
           <a:p>
-            <a:pPr algn="l">
+            <a:pPr algn="ctr">
               <a:lnSpc>
                 <a:spcPct val="118000"/>
               </a:lnSpc>
             </a:pPr>
             <a:r>
-              <a:rPr sz="2400" b="1" lang="ja-JP" altLang="en-US">
+              <a:rPr sz="1700" b="1" lang="ja-JP" altLang="en-US">
                 <a:solidFill>
                   <a:srgbClr val="3A2E2A"/>
                 </a:solidFill>
@@ -11573,7 +11513,7 @@
       </p:sp>
       <p:sp>
         <p:nvSpPr>
-          <p:cNvPr id="13" name="Oval 12"/>
+          <p:cNvPr id="16" name="Oval 15"/>
           <p:cNvSpPr/>
           <p:nvPr/>
         </p:nvSpPr>
@@ -11619,7 +11559,7 @@
       </p:sp>
       <p:sp>
         <p:nvSpPr>
-          <p:cNvPr id="14" name="TextBox 13"/>
+          <p:cNvPr id="17" name="TextBox 16"/>
           <p:cNvSpPr txBox="1"/>
           <p:nvPr/>
         </p:nvSpPr>
@@ -11654,7 +11594,7 @@
       </p:sp>
       <p:sp>
         <p:nvSpPr>
-          <p:cNvPr id="15" name="TextBox 14"/>
+          <p:cNvPr id="18" name="TextBox 17"/>
           <p:cNvSpPr txBox="1"/>
           <p:nvPr/>
         </p:nvSpPr>
@@ -11689,7 +11629,7 @@
       </p:sp>
       <p:sp>
         <p:nvSpPr>
-          <p:cNvPr id="16" name="TextBox 15"/>
+          <p:cNvPr id="19" name="TextBox 18"/>
           <p:cNvSpPr txBox="1"/>
           <p:nvPr/>
         </p:nvSpPr>
@@ -11724,7 +11664,7 @@
       </p:sp>
       <p:sp>
         <p:nvSpPr>
-          <p:cNvPr id="17" name="TextBox 16"/>
+          <p:cNvPr id="20" name="TextBox 19"/>
           <p:cNvSpPr txBox="1"/>
           <p:nvPr/>
         </p:nvSpPr>
@@ -11759,7 +11699,7 @@
       </p:sp>
       <p:sp>
         <p:nvSpPr>
-          <p:cNvPr id="18" name="TextBox 17"/>
+          <p:cNvPr id="21" name="TextBox 20"/>
           <p:cNvSpPr txBox="1"/>
           <p:nvPr/>
         </p:nvSpPr>
@@ -11794,7 +11734,7 @@
       </p:sp>
       <p:sp>
         <p:nvSpPr>
-          <p:cNvPr id="19" name="TextBox 18"/>
+          <p:cNvPr id="22" name="TextBox 21"/>
           <p:cNvSpPr txBox="1"/>
           <p:nvPr/>
         </p:nvSpPr>
@@ -11829,7 +11769,7 @@
       </p:sp>
       <p:sp>
         <p:nvSpPr>
-          <p:cNvPr id="20" name="TextBox 19"/>
+          <p:cNvPr id="23" name="TextBox 22"/>
           <p:cNvSpPr txBox="1"/>
           <p:nvPr/>
         </p:nvSpPr>
@@ -11864,7 +11804,7 @@
       </p:sp>
       <p:sp>
         <p:nvSpPr>
-          <p:cNvPr id="21" name="TextBox 20"/>
+          <p:cNvPr id="24" name="TextBox 23"/>
           <p:cNvSpPr txBox="1"/>
           <p:nvPr/>
         </p:nvSpPr>
@@ -11899,7 +11839,7 @@
       </p:sp>
       <p:sp>
         <p:nvSpPr>
-          <p:cNvPr id="22" name="TextBox 21"/>
+          <p:cNvPr id="25" name="TextBox 24"/>
           <p:cNvSpPr txBox="1"/>
           <p:nvPr/>
         </p:nvSpPr>
@@ -11934,7 +11874,7 @@
       </p:sp>
       <p:sp>
         <p:nvSpPr>
-          <p:cNvPr id="23" name="TextBox 22"/>
+          <p:cNvPr id="26" name="TextBox 25"/>
           <p:cNvSpPr txBox="1"/>
           <p:nvPr/>
         </p:nvSpPr>
@@ -11969,7 +11909,7 @@
       </p:sp>
       <p:sp>
         <p:nvSpPr>
-          <p:cNvPr id="24" name="TextBox 23"/>
+          <p:cNvPr id="27" name="TextBox 26"/>
           <p:cNvSpPr txBox="1"/>
           <p:nvPr/>
         </p:nvSpPr>
@@ -12004,14 +11944,14 @@
       </p:sp>
       <p:sp>
         <p:nvSpPr>
-          <p:cNvPr id="25" name="Rounded Rectangle 24"/>
+          <p:cNvPr id="28" name="Rounded Rectangle 27"/>
           <p:cNvSpPr/>
           <p:nvPr/>
         </p:nvSpPr>
         <p:spPr>
           <a:xfrm>
-            <a:off x="3990000" y="1890000"/>
-            <a:ext cx="7520000" cy="1670000"/>
+            <a:off x="1040000" y="1770000"/>
+            <a:ext cx="4870000" cy="3940000"/>
           </a:xfrm>
           <a:prstGeom prst="roundRect">
             <a:avLst>
@@ -12050,14 +11990,14 @@
       </p:sp>
       <p:sp>
         <p:nvSpPr>
-          <p:cNvPr id="26" name="Rounded Rectangle 25"/>
+          <p:cNvPr id="29" name="Rounded Rectangle 28"/>
           <p:cNvSpPr/>
           <p:nvPr/>
         </p:nvSpPr>
         <p:spPr>
           <a:xfrm>
-            <a:off x="4100000" y="5350000"/>
-            <a:ext cx="7300000" cy="1100000"/>
+            <a:off x="1150000" y="5750000"/>
+            <a:ext cx="9892000" cy="850000"/>
           </a:xfrm>
           <a:prstGeom prst="roundRect">
             <a:avLst>
@@ -12098,53 +12038,20 @@
               </a:lnSpc>
             </a:pPr>
             <a:r>
-              <a:rPr sz="2000" b="1">
+              <a:rPr sz="2100" b="1">
                 <a:solidFill>
                   <a:srgbClr val="FFFFFF"/>
                 </a:solidFill>
                 <a:latin typeface="Meiryo"/>
               </a:rPr>
-              <a:t>正解は ○ ！ 1998年7月25日、1歳の新郎です👶</a:t>
+              <a:t>正解は ○ ！ 口が開いている方と、カルピスを持っている方が本物でした📷</a:t>
             </a:r>
           </a:p>
         </p:txBody>
       </p:sp>
       <p:pic>
         <p:nvPicPr>
-          <p:cNvPr id="27" name="カウントダウンBGM">
-            <a:hlinkClick r:id="" action="ppaction://media"/>
-          </p:cNvPr>
-          <p:cNvPicPr>
-            <a:picLocks noChangeAspect="1"/>
-          </p:cNvPicPr>
-          <p:nvPr>
-            <a:audioFile r:link="rId5"/>
-            <p:extLst>
-              <p:ext uri="{DAA4B4D4-6D71-4841-9C94-3DE7FCFB9230}">
-                <p14:media xmlns:p14="http://schemas.microsoft.com/office/powerpoint/2010/main" r:embed="rId4"/>
-              </p:ext>
-            </p:extLst>
-          </p:nvPr>
-        </p:nvPicPr>
-        <p:blipFill>
-          <a:blip r:embed="rId6"/>
-          <a:stretch>
-            <a:fillRect/>
-          </a:stretch>
-        </p:blipFill>
-        <p:spPr>
-          <a:xfrm>
-            <a:off x="-900000" y="200000"/>
-            <a:ext cx="406400" cy="406400"/>
-          </a:xfrm>
-          <a:prstGeom prst="rect">
-            <a:avLst/>
-          </a:prstGeom>
-        </p:spPr>
-      </p:pic>
-      <p:pic>
-        <p:nvPicPr>
-          <p:cNvPr id="28" name="正解発表効果音">
+          <p:cNvPr id="30" name="カウントダウンBGM">
             <a:hlinkClick r:id="" action="ppaction://media"/>
           </p:cNvPr>
           <p:cNvPicPr>
@@ -12160,7 +12067,40 @@
           </p:nvPr>
         </p:nvPicPr>
         <p:blipFill>
-          <a:blip r:embed="rId6"/>
+          <a:blip r:embed="rId9"/>
+          <a:stretch>
+            <a:fillRect/>
+          </a:stretch>
+        </p:blipFill>
+        <p:spPr>
+          <a:xfrm>
+            <a:off x="-900000" y="200000"/>
+            <a:ext cx="406400" cy="406400"/>
+          </a:xfrm>
+          <a:prstGeom prst="rect">
+            <a:avLst/>
+          </a:prstGeom>
+        </p:spPr>
+      </p:pic>
+      <p:pic>
+        <p:nvPicPr>
+          <p:cNvPr id="31" name="正解発表効果音">
+            <a:hlinkClick r:id="" action="ppaction://media"/>
+          </p:cNvPr>
+          <p:cNvPicPr>
+            <a:picLocks noChangeAspect="1"/>
+          </p:cNvPicPr>
+          <p:nvPr>
+            <a:audioFile r:link="rId11"/>
+            <p:extLst>
+              <p:ext uri="{DAA4B4D4-6D71-4841-9C94-3DE7FCFB9230}">
+                <p14:media xmlns:p14="http://schemas.microsoft.com/office/powerpoint/2010/main" r:embed="rId10"/>
+              </p:ext>
+            </p:extLst>
+          </p:nvPr>
+        </p:nvPicPr>
+        <p:blipFill>
+          <a:blip r:embed="rId9"/>
           <a:stretch>
             <a:fillRect/>
           </a:stretch>
@@ -12213,7 +12153,7 @@
                                       <p:cBhvr>
                                         <p:cTn id="6" dur="12024" fill="hold"/>
                                         <p:tgtEl>
-                                          <p:spTgt spid="27"/>
+                                          <p:spTgt spid="30"/>
                                         </p:tgtEl>
                                       </p:cBhvr>
                                     </p:cmd>
@@ -12234,7 +12174,7 @@
                                           </p:stCondLst>
                                         </p:cTn>
                                         <p:tgtEl>
-                                          <p:spTgt spid="13"/>
+                                          <p:spTgt spid="16"/>
                                         </p:tgtEl>
                                         <p:attrNameLst>
                                           <p:attrName>style.visibility</p:attrName>
@@ -12261,7 +12201,7 @@
                                           </p:stCondLst>
                                         </p:cTn>
                                         <p:tgtEl>
-                                          <p:spTgt spid="14"/>
+                                          <p:spTgt spid="17"/>
                                         </p:tgtEl>
                                         <p:attrNameLst>
                                           <p:attrName>style.visibility</p:attrName>
@@ -12288,7 +12228,7 @@
                                           </p:stCondLst>
                                         </p:cTn>
                                         <p:tgtEl>
-                                          <p:spTgt spid="14"/>
+                                          <p:spTgt spid="17"/>
                                         </p:tgtEl>
                                         <p:attrNameLst>
                                           <p:attrName>style.visibility</p:attrName>
@@ -12315,7 +12255,7 @@
                                           </p:stCondLst>
                                         </p:cTn>
                                         <p:tgtEl>
-                                          <p:spTgt spid="15"/>
+                                          <p:spTgt spid="18"/>
                                         </p:tgtEl>
                                         <p:attrNameLst>
                                           <p:attrName>style.visibility</p:attrName>
@@ -12342,7 +12282,7 @@
                                           </p:stCondLst>
                                         </p:cTn>
                                         <p:tgtEl>
-                                          <p:spTgt spid="15"/>
+                                          <p:spTgt spid="18"/>
                                         </p:tgtEl>
                                         <p:attrNameLst>
                                           <p:attrName>style.visibility</p:attrName>
@@ -12369,7 +12309,7 @@
                                           </p:stCondLst>
                                         </p:cTn>
                                         <p:tgtEl>
-                                          <p:spTgt spid="16"/>
+                                          <p:spTgt spid="19"/>
                                         </p:tgtEl>
                                         <p:attrNameLst>
                                           <p:attrName>style.visibility</p:attrName>
@@ -12396,7 +12336,7 @@
                                           </p:stCondLst>
                                         </p:cTn>
                                         <p:tgtEl>
-                                          <p:spTgt spid="16"/>
+                                          <p:spTgt spid="19"/>
                                         </p:tgtEl>
                                         <p:attrNameLst>
                                           <p:attrName>style.visibility</p:attrName>
@@ -12423,7 +12363,7 @@
                                           </p:stCondLst>
                                         </p:cTn>
                                         <p:tgtEl>
-                                          <p:spTgt spid="17"/>
+                                          <p:spTgt spid="20"/>
                                         </p:tgtEl>
                                         <p:attrNameLst>
                                           <p:attrName>style.visibility</p:attrName>
@@ -12450,7 +12390,7 @@
                                           </p:stCondLst>
                                         </p:cTn>
                                         <p:tgtEl>
-                                          <p:spTgt spid="17"/>
+                                          <p:spTgt spid="20"/>
                                         </p:tgtEl>
                                         <p:attrNameLst>
                                           <p:attrName>style.visibility</p:attrName>
@@ -12477,7 +12417,7 @@
                                           </p:stCondLst>
                                         </p:cTn>
                                         <p:tgtEl>
-                                          <p:spTgt spid="18"/>
+                                          <p:spTgt spid="21"/>
                                         </p:tgtEl>
                                         <p:attrNameLst>
                                           <p:attrName>style.visibility</p:attrName>
@@ -12504,7 +12444,7 @@
                                           </p:stCondLst>
                                         </p:cTn>
                                         <p:tgtEl>
-                                          <p:spTgt spid="18"/>
+                                          <p:spTgt spid="21"/>
                                         </p:tgtEl>
                                         <p:attrNameLst>
                                           <p:attrName>style.visibility</p:attrName>
@@ -12531,7 +12471,7 @@
                                           </p:stCondLst>
                                         </p:cTn>
                                         <p:tgtEl>
-                                          <p:spTgt spid="19"/>
+                                          <p:spTgt spid="22"/>
                                         </p:tgtEl>
                                         <p:attrNameLst>
                                           <p:attrName>style.visibility</p:attrName>
@@ -12558,7 +12498,7 @@
                                           </p:stCondLst>
                                         </p:cTn>
                                         <p:tgtEl>
-                                          <p:spTgt spid="19"/>
+                                          <p:spTgt spid="22"/>
                                         </p:tgtEl>
                                         <p:attrNameLst>
                                           <p:attrName>style.visibility</p:attrName>
@@ -12585,7 +12525,7 @@
                                           </p:stCondLst>
                                         </p:cTn>
                                         <p:tgtEl>
-                                          <p:spTgt spid="20"/>
+                                          <p:spTgt spid="23"/>
                                         </p:tgtEl>
                                         <p:attrNameLst>
                                           <p:attrName>style.visibility</p:attrName>
@@ -12612,7 +12552,7 @@
                                           </p:stCondLst>
                                         </p:cTn>
                                         <p:tgtEl>
-                                          <p:spTgt spid="20"/>
+                                          <p:spTgt spid="23"/>
                                         </p:tgtEl>
                                         <p:attrNameLst>
                                           <p:attrName>style.visibility</p:attrName>
@@ -12639,7 +12579,7 @@
                                           </p:stCondLst>
                                         </p:cTn>
                                         <p:tgtEl>
-                                          <p:spTgt spid="21"/>
+                                          <p:spTgt spid="24"/>
                                         </p:tgtEl>
                                         <p:attrNameLst>
                                           <p:attrName>style.visibility</p:attrName>
@@ -12666,7 +12606,7 @@
                                           </p:stCondLst>
                                         </p:cTn>
                                         <p:tgtEl>
-                                          <p:spTgt spid="21"/>
+                                          <p:spTgt spid="24"/>
                                         </p:tgtEl>
                                         <p:attrNameLst>
                                           <p:attrName>style.visibility</p:attrName>
@@ -12693,7 +12633,7 @@
                                           </p:stCondLst>
                                         </p:cTn>
                                         <p:tgtEl>
-                                          <p:spTgt spid="22"/>
+                                          <p:spTgt spid="25"/>
                                         </p:tgtEl>
                                         <p:attrNameLst>
                                           <p:attrName>style.visibility</p:attrName>
@@ -12720,7 +12660,7 @@
                                           </p:stCondLst>
                                         </p:cTn>
                                         <p:tgtEl>
-                                          <p:spTgt spid="22"/>
+                                          <p:spTgt spid="25"/>
                                         </p:tgtEl>
                                         <p:attrNameLst>
                                           <p:attrName>style.visibility</p:attrName>
@@ -12747,7 +12687,7 @@
                                           </p:stCondLst>
                                         </p:cTn>
                                         <p:tgtEl>
-                                          <p:spTgt spid="23"/>
+                                          <p:spTgt spid="26"/>
                                         </p:tgtEl>
                                         <p:attrNameLst>
                                           <p:attrName>style.visibility</p:attrName>
@@ -12774,7 +12714,7 @@
                                           </p:stCondLst>
                                         </p:cTn>
                                         <p:tgtEl>
-                                          <p:spTgt spid="23"/>
+                                          <p:spTgt spid="26"/>
                                         </p:tgtEl>
                                         <p:attrNameLst>
                                           <p:attrName>style.visibility</p:attrName>
@@ -12801,7 +12741,7 @@
                                           </p:stCondLst>
                                         </p:cTn>
                                         <p:tgtEl>
-                                          <p:spTgt spid="24"/>
+                                          <p:spTgt spid="27"/>
                                         </p:tgtEl>
                                         <p:attrNameLst>
                                           <p:attrName>style.visibility</p:attrName>
@@ -12842,7 +12782,7 @@
                                       <p:cBhvr>
                                         <p:cTn id="54" dur="2699" fill="hold"/>
                                         <p:tgtEl>
-                                          <p:spTgt spid="28"/>
+                                          <p:spTgt spid="31"/>
                                         </p:tgtEl>
                                       </p:cBhvr>
                                     </p:cmd>
@@ -12863,7 +12803,7 @@
                                           </p:stCondLst>
                                         </p:cTn>
                                         <p:tgtEl>
-                                          <p:spTgt spid="25"/>
+                                          <p:spTgt spid="28"/>
                                         </p:tgtEl>
                                         <p:attrNameLst>
                                           <p:attrName>style.visibility</p:attrName>
@@ -12886,7 +12826,7 @@
                                       <p:cBhvr>
                                         <p:cTn id="58" dur="500" tmFilter="0, 0; .2, .5; .8, .5; 1, 0"/>
                                         <p:tgtEl>
-                                          <p:spTgt spid="25"/>
+                                          <p:spTgt spid="28"/>
                                         </p:tgtEl>
                                       </p:cBhvr>
                                     </p:animEffect>
@@ -12894,7 +12834,7 @@
                                       <p:cBhvr>
                                         <p:cTn id="59" dur="250" autoRev="1" fill="hold"/>
                                         <p:tgtEl>
-                                          <p:spTgt spid="25"/>
+                                          <p:spTgt spid="28"/>
                                         </p:tgtEl>
                                       </p:cBhvr>
                                       <p:by x="105000" y="105000"/>
@@ -12916,7 +12856,7 @@
                                           </p:stCondLst>
                                         </p:cTn>
                                         <p:tgtEl>
-                                          <p:spTgt spid="26"/>
+                                          <p:spTgt spid="29"/>
                                         </p:tgtEl>
                                         <p:attrNameLst>
                                           <p:attrName>style.visibility</p:attrName>
@@ -12967,7 +12907,7 @@
                   </p:endCondLst>
                 </p:cTn>
                 <p:tgtEl>
-                  <p:spTgt spid="27"/>
+                  <p:spTgt spid="30"/>
                 </p:tgtEl>
               </p:cMediaNode>
             </p:audio>
@@ -12986,7 +12926,7 @@
                   </p:endCondLst>
                 </p:cTn>
                 <p:tgtEl>
-                  <p:spTgt spid="28"/>
+                  <p:spTgt spid="31"/>
                 </p:tgtEl>
               </p:cMediaNode>
             </p:audio>
@@ -13127,7 +13067,7 @@
                 </a:solidFill>
                 <a:latin typeface="Meiryo"/>
               </a:rPr>
-              <a:t>新郎の子どものころのあだ名は</a:t>
+              <a:t>入籍前、新郎は社員旅行で</a:t>
             </a:r>
           </a:p>
           <a:p>
@@ -13143,7 +13083,7 @@
                 </a:solidFill>
                 <a:latin typeface="Meiryo"/>
               </a:rPr>
-              <a:t>『るいぴー』だった</a:t>
+              <a:t>左手の薬指を負傷した</a:t>
             </a:r>
           </a:p>
         </p:txBody>
@@ -13198,7 +13138,92 @@
       </p:sp>
       <p:sp>
         <p:nvSpPr>
-          <p:cNvPr id="6" name="Rounded Rectangle 5"/>
+          <p:cNvPr id="6" name="Donut 5"/>
+          <p:cNvSpPr/>
+          <p:nvPr/>
+        </p:nvSpPr>
+        <p:spPr>
+          <a:xfrm>
+            <a:off x="2775000" y="3440000"/>
+            <a:ext cx="1000000" cy="1000000"/>
+          </a:xfrm>
+          <a:prstGeom prst="donut">
+            <a:avLst>
+              <a:gd name="adj" fmla="val 13000"/>
+            </a:avLst>
+          </a:prstGeom>
+          <a:solidFill>
+            <a:srgbClr val="D94F70"/>
+          </a:solidFill>
+          <a:ln>
+            <a:noFill/>
+          </a:ln>
+          <a:effectLst/>
+        </p:spPr>
+        <p:style>
+          <a:lnRef idx="1">
+            <a:schemeClr val="accent1"/>
+          </a:lnRef>
+          <a:fillRef idx="3">
+            <a:schemeClr val="accent1"/>
+          </a:fillRef>
+          <a:effectRef idx="2">
+            <a:schemeClr val="accent1"/>
+          </a:effectRef>
+          <a:fontRef idx="minor">
+            <a:schemeClr val="lt1"/>
+          </a:fontRef>
+        </p:style>
+        <p:txBody>
+          <a:bodyPr rtlCol="0" anchor="ctr"/>
+          <a:lstStyle/>
+          <a:p>
+            <a:pPr algn="ctr"/>
+          </a:p>
+        </p:txBody>
+      </p:sp>
+      <p:sp>
+        <p:nvSpPr>
+          <p:cNvPr id="7" name="TextBox 6"/>
+          <p:cNvSpPr txBox="1"/>
+          <p:nvPr/>
+        </p:nvSpPr>
+        <p:spPr>
+          <a:xfrm>
+            <a:off x="1150000" y="4590000"/>
+            <a:ext cx="4250000" cy="640000"/>
+          </a:xfrm>
+          <a:prstGeom prst="rect">
+            <a:avLst/>
+          </a:prstGeom>
+          <a:noFill/>
+        </p:spPr>
+        <p:txBody>
+          <a:bodyPr wrap="square" anchor="ctr" lIns="90000" rIns="90000" tIns="45000" bIns="45000">
+            <a:spAutoFit/>
+          </a:bodyPr>
+          <a:lstStyle/>
+          <a:p>
+            <a:pPr algn="ctr">
+              <a:lnSpc>
+                <a:spcPct val="118000"/>
+              </a:lnSpc>
+            </a:pPr>
+            <a:r>
+              <a:rPr sz="1900" b="1" lang="ja-JP" altLang="en-US">
+                <a:solidFill>
+                  <a:srgbClr val="3A2E2A"/>
+                </a:solidFill>
+                <a:latin typeface="Meiryo"/>
+              </a:rPr>
+              <a:t>画面に向かって 左 へ移動</a:t>
+            </a:r>
+          </a:p>
+        </p:txBody>
+      </p:sp>
+      <p:sp>
+        <p:nvSpPr>
+          <p:cNvPr id="8" name="Rounded Rectangle 7"/>
           <p:cNvSpPr/>
           <p:nvPr/>
         </p:nvSpPr>
@@ -13246,91 +13271,6 @@
       </p:sp>
       <p:sp>
         <p:nvSpPr>
-          <p:cNvPr id="7" name="Donut 6"/>
-          <p:cNvSpPr/>
-          <p:nvPr/>
-        </p:nvSpPr>
-        <p:spPr>
-          <a:xfrm>
-            <a:off x="2775000" y="3440000"/>
-            <a:ext cx="1000000" cy="1000000"/>
-          </a:xfrm>
-          <a:prstGeom prst="donut">
-            <a:avLst>
-              <a:gd name="adj" fmla="val 13000"/>
-            </a:avLst>
-          </a:prstGeom>
-          <a:solidFill>
-            <a:srgbClr val="D94F70"/>
-          </a:solidFill>
-          <a:ln>
-            <a:noFill/>
-          </a:ln>
-          <a:effectLst/>
-        </p:spPr>
-        <p:style>
-          <a:lnRef idx="1">
-            <a:schemeClr val="accent1"/>
-          </a:lnRef>
-          <a:fillRef idx="3">
-            <a:schemeClr val="accent1"/>
-          </a:fillRef>
-          <a:effectRef idx="2">
-            <a:schemeClr val="accent1"/>
-          </a:effectRef>
-          <a:fontRef idx="minor">
-            <a:schemeClr val="lt1"/>
-          </a:fontRef>
-        </p:style>
-        <p:txBody>
-          <a:bodyPr rtlCol="0" anchor="ctr"/>
-          <a:lstStyle/>
-          <a:p>
-            <a:pPr algn="ctr"/>
-          </a:p>
-        </p:txBody>
-      </p:sp>
-      <p:sp>
-        <p:nvSpPr>
-          <p:cNvPr id="8" name="TextBox 7"/>
-          <p:cNvSpPr txBox="1"/>
-          <p:nvPr/>
-        </p:nvSpPr>
-        <p:spPr>
-          <a:xfrm>
-            <a:off x="1150000" y="4590000"/>
-            <a:ext cx="4250000" cy="640000"/>
-          </a:xfrm>
-          <a:prstGeom prst="rect">
-            <a:avLst/>
-          </a:prstGeom>
-          <a:noFill/>
-        </p:spPr>
-        <p:txBody>
-          <a:bodyPr wrap="square" anchor="ctr" lIns="90000" rIns="90000" tIns="45000" bIns="45000">
-            <a:spAutoFit/>
-          </a:bodyPr>
-          <a:lstStyle/>
-          <a:p>
-            <a:pPr algn="ctr">
-              <a:lnSpc>
-                <a:spcPct val="118000"/>
-              </a:lnSpc>
-            </a:pPr>
-            <a:r>
-              <a:rPr sz="1900" b="1" lang="ja-JP" altLang="en-US">
-                <a:solidFill>
-                  <a:srgbClr val="3A2E2A"/>
-                </a:solidFill>
-                <a:latin typeface="Meiryo"/>
-              </a:rPr>
-              <a:t>画面に向かって 左 へ移動</a:t>
-            </a:r>
-          </a:p>
-        </p:txBody>
-      </p:sp>
-      <p:sp>
-        <p:nvSpPr>
           <p:cNvPr id="9" name="Rounded Rectangle 8"/>
           <p:cNvSpPr/>
           <p:nvPr/>
@@ -13993,7 +13933,7 @@
                 </a:solidFill>
                 <a:latin typeface="Meiryo"/>
               </a:rPr>
-              <a:t>正解は {{○ / ×}} ！ 『{{るい / るいぴー}}』と呼ばれていました</a:t>
+              <a:t>正解は ○ ！ よりによって結婚指輪をはめる指を負傷…😱</a:t>
             </a:r>
           </a:p>
         </p:txBody>
@@ -15016,7 +14956,7 @@
                 </a:solidFill>
                 <a:latin typeface="Meiryo"/>
               </a:rPr>
-              <a:t>入籍前、新郎は社員旅行で</a:t>
+              <a:t>ドラマが苦手な新郎が、新婦と唯一</a:t>
             </a:r>
           </a:p>
           <a:p>
@@ -15032,7 +14972,7 @@
                 </a:solidFill>
                 <a:latin typeface="Meiryo"/>
               </a:rPr>
-              <a:t>左手の薬指を負傷した</a:t>
+              <a:t>最後まで見られたドラマは『VIVANT』である</a:t>
             </a:r>
           </a:p>
         </p:txBody>
@@ -15087,7 +15027,92 @@
       </p:sp>
       <p:sp>
         <p:nvSpPr>
-          <p:cNvPr id="6" name="Rounded Rectangle 5"/>
+          <p:cNvPr id="6" name="Donut 5"/>
+          <p:cNvSpPr/>
+          <p:nvPr/>
+        </p:nvSpPr>
+        <p:spPr>
+          <a:xfrm>
+            <a:off x="2775000" y="3440000"/>
+            <a:ext cx="1000000" cy="1000000"/>
+          </a:xfrm>
+          <a:prstGeom prst="donut">
+            <a:avLst>
+              <a:gd name="adj" fmla="val 13000"/>
+            </a:avLst>
+          </a:prstGeom>
+          <a:solidFill>
+            <a:srgbClr val="D94F70"/>
+          </a:solidFill>
+          <a:ln>
+            <a:noFill/>
+          </a:ln>
+          <a:effectLst/>
+        </p:spPr>
+        <p:style>
+          <a:lnRef idx="1">
+            <a:schemeClr val="accent1"/>
+          </a:lnRef>
+          <a:fillRef idx="3">
+            <a:schemeClr val="accent1"/>
+          </a:fillRef>
+          <a:effectRef idx="2">
+            <a:schemeClr val="accent1"/>
+          </a:effectRef>
+          <a:fontRef idx="minor">
+            <a:schemeClr val="lt1"/>
+          </a:fontRef>
+        </p:style>
+        <p:txBody>
+          <a:bodyPr rtlCol="0" anchor="ctr"/>
+          <a:lstStyle/>
+          <a:p>
+            <a:pPr algn="ctr"/>
+          </a:p>
+        </p:txBody>
+      </p:sp>
+      <p:sp>
+        <p:nvSpPr>
+          <p:cNvPr id="7" name="TextBox 6"/>
+          <p:cNvSpPr txBox="1"/>
+          <p:nvPr/>
+        </p:nvSpPr>
+        <p:spPr>
+          <a:xfrm>
+            <a:off x="1150000" y="4590000"/>
+            <a:ext cx="4250000" cy="640000"/>
+          </a:xfrm>
+          <a:prstGeom prst="rect">
+            <a:avLst/>
+          </a:prstGeom>
+          <a:noFill/>
+        </p:spPr>
+        <p:txBody>
+          <a:bodyPr wrap="square" anchor="ctr" lIns="90000" rIns="90000" tIns="45000" bIns="45000">
+            <a:spAutoFit/>
+          </a:bodyPr>
+          <a:lstStyle/>
+          <a:p>
+            <a:pPr algn="ctr">
+              <a:lnSpc>
+                <a:spcPct val="118000"/>
+              </a:lnSpc>
+            </a:pPr>
+            <a:r>
+              <a:rPr sz="1900" b="1" lang="ja-JP" altLang="en-US">
+                <a:solidFill>
+                  <a:srgbClr val="3A2E2A"/>
+                </a:solidFill>
+                <a:latin typeface="Meiryo"/>
+              </a:rPr>
+              <a:t>画面に向かって 左 へ移動</a:t>
+            </a:r>
+          </a:p>
+        </p:txBody>
+      </p:sp>
+      <p:sp>
+        <p:nvSpPr>
+          <p:cNvPr id="8" name="Rounded Rectangle 7"/>
           <p:cNvSpPr/>
           <p:nvPr/>
         </p:nvSpPr>
@@ -15135,91 +15160,6 @@
       </p:sp>
       <p:sp>
         <p:nvSpPr>
-          <p:cNvPr id="7" name="Donut 6"/>
-          <p:cNvSpPr/>
-          <p:nvPr/>
-        </p:nvSpPr>
-        <p:spPr>
-          <a:xfrm>
-            <a:off x="2775000" y="3440000"/>
-            <a:ext cx="1000000" cy="1000000"/>
-          </a:xfrm>
-          <a:prstGeom prst="donut">
-            <a:avLst>
-              <a:gd name="adj" fmla="val 13000"/>
-            </a:avLst>
-          </a:prstGeom>
-          <a:solidFill>
-            <a:srgbClr val="D94F70"/>
-          </a:solidFill>
-          <a:ln>
-            <a:noFill/>
-          </a:ln>
-          <a:effectLst/>
-        </p:spPr>
-        <p:style>
-          <a:lnRef idx="1">
-            <a:schemeClr val="accent1"/>
-          </a:lnRef>
-          <a:fillRef idx="3">
-            <a:schemeClr val="accent1"/>
-          </a:fillRef>
-          <a:effectRef idx="2">
-            <a:schemeClr val="accent1"/>
-          </a:effectRef>
-          <a:fontRef idx="minor">
-            <a:schemeClr val="lt1"/>
-          </a:fontRef>
-        </p:style>
-        <p:txBody>
-          <a:bodyPr rtlCol="0" anchor="ctr"/>
-          <a:lstStyle/>
-          <a:p>
-            <a:pPr algn="ctr"/>
-          </a:p>
-        </p:txBody>
-      </p:sp>
-      <p:sp>
-        <p:nvSpPr>
-          <p:cNvPr id="8" name="TextBox 7"/>
-          <p:cNvSpPr txBox="1"/>
-          <p:nvPr/>
-        </p:nvSpPr>
-        <p:spPr>
-          <a:xfrm>
-            <a:off x="1150000" y="4590000"/>
-            <a:ext cx="4250000" cy="640000"/>
-          </a:xfrm>
-          <a:prstGeom prst="rect">
-            <a:avLst/>
-          </a:prstGeom>
-          <a:noFill/>
-        </p:spPr>
-        <p:txBody>
-          <a:bodyPr wrap="square" anchor="ctr" lIns="90000" rIns="90000" tIns="45000" bIns="45000">
-            <a:spAutoFit/>
-          </a:bodyPr>
-          <a:lstStyle/>
-          <a:p>
-            <a:pPr algn="ctr">
-              <a:lnSpc>
-                <a:spcPct val="118000"/>
-              </a:lnSpc>
-            </a:pPr>
-            <a:r>
-              <a:rPr sz="1900" b="1" lang="ja-JP" altLang="en-US">
-                <a:solidFill>
-                  <a:srgbClr val="3A2E2A"/>
-                </a:solidFill>
-                <a:latin typeface="Meiryo"/>
-              </a:rPr>
-              <a:t>画面に向かって 左 へ移動</a:t>
-            </a:r>
-          </a:p>
-        </p:txBody>
-      </p:sp>
-      <p:sp>
-        <p:nvSpPr>
           <p:cNvPr id="9" name="Rounded Rectangle 8"/>
           <p:cNvSpPr/>
           <p:nvPr/>
@@ -15788,7 +15728,7 @@
         </p:nvSpPr>
         <p:spPr>
           <a:xfrm>
-            <a:off x="1040000" y="3190000"/>
+            <a:off x="6682000" y="3190000"/>
             <a:ext cx="4470000" cy="2270000"/>
           </a:xfrm>
           <a:prstGeom prst="roundRect">
@@ -15882,7 +15822,7 @@
                 </a:solidFill>
                 <a:latin typeface="Meiryo"/>
               </a:rPr>
-              <a:t>正解は ○ ！ よりによって結婚指輪をはめる指を負傷…😱</a:t>
+              <a:t>正解は × ！ 本当は『ロイヤルファミリー』でした📺</a:t>
             </a:r>
           </a:p>
         </p:txBody>
@@ -16905,7 +16845,7 @@
                 </a:solidFill>
                 <a:latin typeface="Meiryo"/>
               </a:rPr>
-              <a:t>ドラマが苦手な新郎が、新婦と唯一</a:t>
+              <a:t>新郎が新婦にやめてほしいのは</a:t>
             </a:r>
           </a:p>
           <a:p>
@@ -16921,7 +16861,7 @@
                 </a:solidFill>
                 <a:latin typeface="Meiryo"/>
               </a:rPr>
-              <a:t>最後まで見られたドラマは『VIVANT』である</a:t>
+              <a:t>朝の目覚ましの音が大きすぎること</a:t>
             </a:r>
           </a:p>
         </p:txBody>
@@ -16976,7 +16916,92 @@
       </p:sp>
       <p:sp>
         <p:nvSpPr>
-          <p:cNvPr id="6" name="Rounded Rectangle 5"/>
+          <p:cNvPr id="6" name="Donut 5"/>
+          <p:cNvSpPr/>
+          <p:nvPr/>
+        </p:nvSpPr>
+        <p:spPr>
+          <a:xfrm>
+            <a:off x="2775000" y="3440000"/>
+            <a:ext cx="1000000" cy="1000000"/>
+          </a:xfrm>
+          <a:prstGeom prst="donut">
+            <a:avLst>
+              <a:gd name="adj" fmla="val 13000"/>
+            </a:avLst>
+          </a:prstGeom>
+          <a:solidFill>
+            <a:srgbClr val="D94F70"/>
+          </a:solidFill>
+          <a:ln>
+            <a:noFill/>
+          </a:ln>
+          <a:effectLst/>
+        </p:spPr>
+        <p:style>
+          <a:lnRef idx="1">
+            <a:schemeClr val="accent1"/>
+          </a:lnRef>
+          <a:fillRef idx="3">
+            <a:schemeClr val="accent1"/>
+          </a:fillRef>
+          <a:effectRef idx="2">
+            <a:schemeClr val="accent1"/>
+          </a:effectRef>
+          <a:fontRef idx="minor">
+            <a:schemeClr val="lt1"/>
+          </a:fontRef>
+        </p:style>
+        <p:txBody>
+          <a:bodyPr rtlCol="0" anchor="ctr"/>
+          <a:lstStyle/>
+          <a:p>
+            <a:pPr algn="ctr"/>
+          </a:p>
+        </p:txBody>
+      </p:sp>
+      <p:sp>
+        <p:nvSpPr>
+          <p:cNvPr id="7" name="TextBox 6"/>
+          <p:cNvSpPr txBox="1"/>
+          <p:nvPr/>
+        </p:nvSpPr>
+        <p:spPr>
+          <a:xfrm>
+            <a:off x="1150000" y="4590000"/>
+            <a:ext cx="4250000" cy="640000"/>
+          </a:xfrm>
+          <a:prstGeom prst="rect">
+            <a:avLst/>
+          </a:prstGeom>
+          <a:noFill/>
+        </p:spPr>
+        <p:txBody>
+          <a:bodyPr wrap="square" anchor="ctr" lIns="90000" rIns="90000" tIns="45000" bIns="45000">
+            <a:spAutoFit/>
+          </a:bodyPr>
+          <a:lstStyle/>
+          <a:p>
+            <a:pPr algn="ctr">
+              <a:lnSpc>
+                <a:spcPct val="118000"/>
+              </a:lnSpc>
+            </a:pPr>
+            <a:r>
+              <a:rPr sz="1900" b="1" lang="ja-JP" altLang="en-US">
+                <a:solidFill>
+                  <a:srgbClr val="3A2E2A"/>
+                </a:solidFill>
+                <a:latin typeface="Meiryo"/>
+              </a:rPr>
+              <a:t>画面に向かって 左 へ移動</a:t>
+            </a:r>
+          </a:p>
+        </p:txBody>
+      </p:sp>
+      <p:sp>
+        <p:nvSpPr>
+          <p:cNvPr id="8" name="Rounded Rectangle 7"/>
           <p:cNvSpPr/>
           <p:nvPr/>
         </p:nvSpPr>
@@ -17024,91 +17049,6 @@
       </p:sp>
       <p:sp>
         <p:nvSpPr>
-          <p:cNvPr id="7" name="Donut 6"/>
-          <p:cNvSpPr/>
-          <p:nvPr/>
-        </p:nvSpPr>
-        <p:spPr>
-          <a:xfrm>
-            <a:off x="2775000" y="3440000"/>
-            <a:ext cx="1000000" cy="1000000"/>
-          </a:xfrm>
-          <a:prstGeom prst="donut">
-            <a:avLst>
-              <a:gd name="adj" fmla="val 13000"/>
-            </a:avLst>
-          </a:prstGeom>
-          <a:solidFill>
-            <a:srgbClr val="D94F70"/>
-          </a:solidFill>
-          <a:ln>
-            <a:noFill/>
-          </a:ln>
-          <a:effectLst/>
-        </p:spPr>
-        <p:style>
-          <a:lnRef idx="1">
-            <a:schemeClr val="accent1"/>
-          </a:lnRef>
-          <a:fillRef idx="3">
-            <a:schemeClr val="accent1"/>
-          </a:fillRef>
-          <a:effectRef idx="2">
-            <a:schemeClr val="accent1"/>
-          </a:effectRef>
-          <a:fontRef idx="minor">
-            <a:schemeClr val="lt1"/>
-          </a:fontRef>
-        </p:style>
-        <p:txBody>
-          <a:bodyPr rtlCol="0" anchor="ctr"/>
-          <a:lstStyle/>
-          <a:p>
-            <a:pPr algn="ctr"/>
-          </a:p>
-        </p:txBody>
-      </p:sp>
-      <p:sp>
-        <p:nvSpPr>
-          <p:cNvPr id="8" name="TextBox 7"/>
-          <p:cNvSpPr txBox="1"/>
-          <p:nvPr/>
-        </p:nvSpPr>
-        <p:spPr>
-          <a:xfrm>
-            <a:off x="1150000" y="4590000"/>
-            <a:ext cx="4250000" cy="640000"/>
-          </a:xfrm>
-          <a:prstGeom prst="rect">
-            <a:avLst/>
-          </a:prstGeom>
-          <a:noFill/>
-        </p:spPr>
-        <p:txBody>
-          <a:bodyPr wrap="square" anchor="ctr" lIns="90000" rIns="90000" tIns="45000" bIns="45000">
-            <a:spAutoFit/>
-          </a:bodyPr>
-          <a:lstStyle/>
-          <a:p>
-            <a:pPr algn="ctr">
-              <a:lnSpc>
-                <a:spcPct val="118000"/>
-              </a:lnSpc>
-            </a:pPr>
-            <a:r>
-              <a:rPr sz="1900" b="1" lang="ja-JP" altLang="en-US">
-                <a:solidFill>
-                  <a:srgbClr val="3A2E2A"/>
-                </a:solidFill>
-                <a:latin typeface="Meiryo"/>
-              </a:rPr>
-              <a:t>画面に向かって 左 へ移動</a:t>
-            </a:r>
-          </a:p>
-        </p:txBody>
-      </p:sp>
-      <p:sp>
-        <p:nvSpPr>
           <p:cNvPr id="9" name="Rounded Rectangle 8"/>
           <p:cNvSpPr/>
           <p:nvPr/>
@@ -17771,7 +17711,7 @@
                 </a:solidFill>
                 <a:latin typeface="Meiryo"/>
               </a:rPr>
-              <a:t>正解は × ！ 本当は『ロイヤルファミリー』でした📺</a:t>
+              <a:t>正解は × ！ 本当は『酔って帰ってきたら、そのまま床で寝ること』でした🛏️</a:t>
             </a:r>
           </a:p>
         </p:txBody>
@@ -18794,7 +18734,7 @@
                 </a:solidFill>
                 <a:latin typeface="Meiryo"/>
               </a:rPr>
-              <a:t>新郎が新婦にやめてほしいのは、酔って</a:t>
+              <a:t>新婦が『新郎と出会ってよかった』と</a:t>
             </a:r>
           </a:p>
           <a:p>
@@ -18810,7 +18750,7 @@
                 </a:solidFill>
                 <a:latin typeface="Meiryo"/>
               </a:rPr>
-              <a:t>帰ってきたらそのまま床で寝てしまうこと</a:t>
+              <a:t>思っているのは、新しい趣味が増えたこと</a:t>
             </a:r>
           </a:p>
         </p:txBody>
@@ -18865,7 +18805,92 @@
       </p:sp>
       <p:sp>
         <p:nvSpPr>
-          <p:cNvPr id="6" name="Rounded Rectangle 5"/>
+          <p:cNvPr id="6" name="Donut 5"/>
+          <p:cNvSpPr/>
+          <p:nvPr/>
+        </p:nvSpPr>
+        <p:spPr>
+          <a:xfrm>
+            <a:off x="2775000" y="3440000"/>
+            <a:ext cx="1000000" cy="1000000"/>
+          </a:xfrm>
+          <a:prstGeom prst="donut">
+            <a:avLst>
+              <a:gd name="adj" fmla="val 13000"/>
+            </a:avLst>
+          </a:prstGeom>
+          <a:solidFill>
+            <a:srgbClr val="D94F70"/>
+          </a:solidFill>
+          <a:ln>
+            <a:noFill/>
+          </a:ln>
+          <a:effectLst/>
+        </p:spPr>
+        <p:style>
+          <a:lnRef idx="1">
+            <a:schemeClr val="accent1"/>
+          </a:lnRef>
+          <a:fillRef idx="3">
+            <a:schemeClr val="accent1"/>
+          </a:fillRef>
+          <a:effectRef idx="2">
+            <a:schemeClr val="accent1"/>
+          </a:effectRef>
+          <a:fontRef idx="minor">
+            <a:schemeClr val="lt1"/>
+          </a:fontRef>
+        </p:style>
+        <p:txBody>
+          <a:bodyPr rtlCol="0" anchor="ctr"/>
+          <a:lstStyle/>
+          <a:p>
+            <a:pPr algn="ctr"/>
+          </a:p>
+        </p:txBody>
+      </p:sp>
+      <p:sp>
+        <p:nvSpPr>
+          <p:cNvPr id="7" name="TextBox 6"/>
+          <p:cNvSpPr txBox="1"/>
+          <p:nvPr/>
+        </p:nvSpPr>
+        <p:spPr>
+          <a:xfrm>
+            <a:off x="1150000" y="4590000"/>
+            <a:ext cx="4250000" cy="640000"/>
+          </a:xfrm>
+          <a:prstGeom prst="rect">
+            <a:avLst/>
+          </a:prstGeom>
+          <a:noFill/>
+        </p:spPr>
+        <p:txBody>
+          <a:bodyPr wrap="square" anchor="ctr" lIns="90000" rIns="90000" tIns="45000" bIns="45000">
+            <a:spAutoFit/>
+          </a:bodyPr>
+          <a:lstStyle/>
+          <a:p>
+            <a:pPr algn="ctr">
+              <a:lnSpc>
+                <a:spcPct val="118000"/>
+              </a:lnSpc>
+            </a:pPr>
+            <a:r>
+              <a:rPr sz="1900" b="1" lang="ja-JP" altLang="en-US">
+                <a:solidFill>
+                  <a:srgbClr val="3A2E2A"/>
+                </a:solidFill>
+                <a:latin typeface="Meiryo"/>
+              </a:rPr>
+              <a:t>画面に向かって 左 へ移動</a:t>
+            </a:r>
+          </a:p>
+        </p:txBody>
+      </p:sp>
+      <p:sp>
+        <p:nvSpPr>
+          <p:cNvPr id="8" name="Rounded Rectangle 7"/>
           <p:cNvSpPr/>
           <p:nvPr/>
         </p:nvSpPr>
@@ -18913,91 +18938,6 @@
       </p:sp>
       <p:sp>
         <p:nvSpPr>
-          <p:cNvPr id="7" name="Donut 6"/>
-          <p:cNvSpPr/>
-          <p:nvPr/>
-        </p:nvSpPr>
-        <p:spPr>
-          <a:xfrm>
-            <a:off x="2775000" y="3440000"/>
-            <a:ext cx="1000000" cy="1000000"/>
-          </a:xfrm>
-          <a:prstGeom prst="donut">
-            <a:avLst>
-              <a:gd name="adj" fmla="val 13000"/>
-            </a:avLst>
-          </a:prstGeom>
-          <a:solidFill>
-            <a:srgbClr val="D94F70"/>
-          </a:solidFill>
-          <a:ln>
-            <a:noFill/>
-          </a:ln>
-          <a:effectLst/>
-        </p:spPr>
-        <p:style>
-          <a:lnRef idx="1">
-            <a:schemeClr val="accent1"/>
-          </a:lnRef>
-          <a:fillRef idx="3">
-            <a:schemeClr val="accent1"/>
-          </a:fillRef>
-          <a:effectRef idx="2">
-            <a:schemeClr val="accent1"/>
-          </a:effectRef>
-          <a:fontRef idx="minor">
-            <a:schemeClr val="lt1"/>
-          </a:fontRef>
-        </p:style>
-        <p:txBody>
-          <a:bodyPr rtlCol="0" anchor="ctr"/>
-          <a:lstStyle/>
-          <a:p>
-            <a:pPr algn="ctr"/>
-          </a:p>
-        </p:txBody>
-      </p:sp>
-      <p:sp>
-        <p:nvSpPr>
-          <p:cNvPr id="8" name="TextBox 7"/>
-          <p:cNvSpPr txBox="1"/>
-          <p:nvPr/>
-        </p:nvSpPr>
-        <p:spPr>
-          <a:xfrm>
-            <a:off x="1150000" y="4590000"/>
-            <a:ext cx="4250000" cy="640000"/>
-          </a:xfrm>
-          <a:prstGeom prst="rect">
-            <a:avLst/>
-          </a:prstGeom>
-          <a:noFill/>
-        </p:spPr>
-        <p:txBody>
-          <a:bodyPr wrap="square" anchor="ctr" lIns="90000" rIns="90000" tIns="45000" bIns="45000">
-            <a:spAutoFit/>
-          </a:bodyPr>
-          <a:lstStyle/>
-          <a:p>
-            <a:pPr algn="ctr">
-              <a:lnSpc>
-                <a:spcPct val="118000"/>
-              </a:lnSpc>
-            </a:pPr>
-            <a:r>
-              <a:rPr sz="1900" b="1" lang="ja-JP" altLang="en-US">
-                <a:solidFill>
-                  <a:srgbClr val="3A2E2A"/>
-                </a:solidFill>
-                <a:latin typeface="Meiryo"/>
-              </a:rPr>
-              <a:t>画面に向かって 左 へ移動</a:t>
-            </a:r>
-          </a:p>
-        </p:txBody>
-      </p:sp>
-      <p:sp>
-        <p:nvSpPr>
           <p:cNvPr id="9" name="Rounded Rectangle 8"/>
           <p:cNvSpPr/>
           <p:nvPr/>
@@ -19566,7 +19506,7 @@
         </p:nvSpPr>
         <p:spPr>
           <a:xfrm>
-            <a:off x="1040000" y="3190000"/>
+            <a:off x="6682000" y="3190000"/>
             <a:ext cx="4470000" cy="2270000"/>
           </a:xfrm>
           <a:prstGeom prst="roundRect">
@@ -19660,7 +19600,7 @@
                 </a:solidFill>
                 <a:latin typeface="Meiryo"/>
               </a:rPr>
-              <a:t>正解は ○ ！ ベッドまであと3歩…！🛏️</a:t>
+              <a:t>正解は × ！ 本当は『太らない食生活を手に入れたこと』でした🥗</a:t>
             </a:r>
           </a:p>
         </p:txBody>
@@ -20644,7 +20584,7 @@
                 </a:solidFill>
                 <a:latin typeface="Meiryo"/>
               </a:rPr>
-              <a:t>第 13 問</a:t>
+              <a:t>最終問題</a:t>
             </a:r>
           </a:p>
         </p:txBody>
@@ -20683,7 +20623,7 @@
                 </a:solidFill>
                 <a:latin typeface="Meiryo"/>
               </a:rPr>
-              <a:t>新婦が『新郎と出会ってよかった』と</a:t>
+              <a:t>新郎新婦が今いちばん欲しいものは</a:t>
             </a:r>
           </a:p>
           <a:p>
@@ -20699,7 +20639,7 @@
                 </a:solidFill>
                 <a:latin typeface="Meiryo"/>
               </a:rPr>
-              <a:t>思っているのは、新しい趣味が増えたこと</a:t>
+              <a:t>ドラム式洗濯機である</a:t>
             </a:r>
           </a:p>
         </p:txBody>
@@ -20754,7 +20694,92 @@
       </p:sp>
       <p:sp>
         <p:nvSpPr>
-          <p:cNvPr id="6" name="Rounded Rectangle 5"/>
+          <p:cNvPr id="6" name="Donut 5"/>
+          <p:cNvSpPr/>
+          <p:nvPr/>
+        </p:nvSpPr>
+        <p:spPr>
+          <a:xfrm>
+            <a:off x="2775000" y="3440000"/>
+            <a:ext cx="1000000" cy="1000000"/>
+          </a:xfrm>
+          <a:prstGeom prst="donut">
+            <a:avLst>
+              <a:gd name="adj" fmla="val 13000"/>
+            </a:avLst>
+          </a:prstGeom>
+          <a:solidFill>
+            <a:srgbClr val="D94F70"/>
+          </a:solidFill>
+          <a:ln>
+            <a:noFill/>
+          </a:ln>
+          <a:effectLst/>
+        </p:spPr>
+        <p:style>
+          <a:lnRef idx="1">
+            <a:schemeClr val="accent1"/>
+          </a:lnRef>
+          <a:fillRef idx="3">
+            <a:schemeClr val="accent1"/>
+          </a:fillRef>
+          <a:effectRef idx="2">
+            <a:schemeClr val="accent1"/>
+          </a:effectRef>
+          <a:fontRef idx="minor">
+            <a:schemeClr val="lt1"/>
+          </a:fontRef>
+        </p:style>
+        <p:txBody>
+          <a:bodyPr rtlCol="0" anchor="ctr"/>
+          <a:lstStyle/>
+          <a:p>
+            <a:pPr algn="ctr"/>
+          </a:p>
+        </p:txBody>
+      </p:sp>
+      <p:sp>
+        <p:nvSpPr>
+          <p:cNvPr id="7" name="TextBox 6"/>
+          <p:cNvSpPr txBox="1"/>
+          <p:nvPr/>
+        </p:nvSpPr>
+        <p:spPr>
+          <a:xfrm>
+            <a:off x="1150000" y="4590000"/>
+            <a:ext cx="4250000" cy="640000"/>
+          </a:xfrm>
+          <a:prstGeom prst="rect">
+            <a:avLst/>
+          </a:prstGeom>
+          <a:noFill/>
+        </p:spPr>
+        <p:txBody>
+          <a:bodyPr wrap="square" anchor="ctr" lIns="90000" rIns="90000" tIns="45000" bIns="45000">
+            <a:spAutoFit/>
+          </a:bodyPr>
+          <a:lstStyle/>
+          <a:p>
+            <a:pPr algn="ctr">
+              <a:lnSpc>
+                <a:spcPct val="118000"/>
+              </a:lnSpc>
+            </a:pPr>
+            <a:r>
+              <a:rPr sz="1900" b="1" lang="ja-JP" altLang="en-US">
+                <a:solidFill>
+                  <a:srgbClr val="3A2E2A"/>
+                </a:solidFill>
+                <a:latin typeface="Meiryo"/>
+              </a:rPr>
+              <a:t>画面に向かって 左 へ移動</a:t>
+            </a:r>
+          </a:p>
+        </p:txBody>
+      </p:sp>
+      <p:sp>
+        <p:nvSpPr>
+          <p:cNvPr id="8" name="Rounded Rectangle 7"/>
           <p:cNvSpPr/>
           <p:nvPr/>
         </p:nvSpPr>
@@ -20802,91 +20827,6 @@
       </p:sp>
       <p:sp>
         <p:nvSpPr>
-          <p:cNvPr id="7" name="Donut 6"/>
-          <p:cNvSpPr/>
-          <p:nvPr/>
-        </p:nvSpPr>
-        <p:spPr>
-          <a:xfrm>
-            <a:off x="2775000" y="3440000"/>
-            <a:ext cx="1000000" cy="1000000"/>
-          </a:xfrm>
-          <a:prstGeom prst="donut">
-            <a:avLst>
-              <a:gd name="adj" fmla="val 13000"/>
-            </a:avLst>
-          </a:prstGeom>
-          <a:solidFill>
-            <a:srgbClr val="D94F70"/>
-          </a:solidFill>
-          <a:ln>
-            <a:noFill/>
-          </a:ln>
-          <a:effectLst/>
-        </p:spPr>
-        <p:style>
-          <a:lnRef idx="1">
-            <a:schemeClr val="accent1"/>
-          </a:lnRef>
-          <a:fillRef idx="3">
-            <a:schemeClr val="accent1"/>
-          </a:fillRef>
-          <a:effectRef idx="2">
-            <a:schemeClr val="accent1"/>
-          </a:effectRef>
-          <a:fontRef idx="minor">
-            <a:schemeClr val="lt1"/>
-          </a:fontRef>
-        </p:style>
-        <p:txBody>
-          <a:bodyPr rtlCol="0" anchor="ctr"/>
-          <a:lstStyle/>
-          <a:p>
-            <a:pPr algn="ctr"/>
-          </a:p>
-        </p:txBody>
-      </p:sp>
-      <p:sp>
-        <p:nvSpPr>
-          <p:cNvPr id="8" name="TextBox 7"/>
-          <p:cNvSpPr txBox="1"/>
-          <p:nvPr/>
-        </p:nvSpPr>
-        <p:spPr>
-          <a:xfrm>
-            <a:off x="1150000" y="4590000"/>
-            <a:ext cx="4250000" cy="640000"/>
-          </a:xfrm>
-          <a:prstGeom prst="rect">
-            <a:avLst/>
-          </a:prstGeom>
-          <a:noFill/>
-        </p:spPr>
-        <p:txBody>
-          <a:bodyPr wrap="square" anchor="ctr" lIns="90000" rIns="90000" tIns="45000" bIns="45000">
-            <a:spAutoFit/>
-          </a:bodyPr>
-          <a:lstStyle/>
-          <a:p>
-            <a:pPr algn="ctr">
-              <a:lnSpc>
-                <a:spcPct val="118000"/>
-              </a:lnSpc>
-            </a:pPr>
-            <a:r>
-              <a:rPr sz="1900" b="1" lang="ja-JP" altLang="en-US">
-                <a:solidFill>
-                  <a:srgbClr val="3A2E2A"/>
-                </a:solidFill>
-                <a:latin typeface="Meiryo"/>
-              </a:rPr>
-              <a:t>画面に向かって 左 へ移動</a:t>
-            </a:r>
-          </a:p>
-        </p:txBody>
-      </p:sp>
-      <p:sp>
-        <p:nvSpPr>
           <p:cNvPr id="9" name="Rounded Rectangle 8"/>
           <p:cNvSpPr/>
           <p:nvPr/>
@@ -21455,7 +21395,7 @@
         </p:nvSpPr>
         <p:spPr>
           <a:xfrm>
-            <a:off x="6682000" y="3190000"/>
+            <a:off x="1040000" y="3190000"/>
             <a:ext cx="4470000" cy="2270000"/>
           </a:xfrm>
           <a:prstGeom prst="roundRect">
@@ -21549,7 +21489,7 @@
                 </a:solidFill>
                 <a:latin typeface="Meiryo"/>
               </a:rPr>
-              <a:t>正解は × ！ 本当は『太らない食生活を手に入れたこと』でした🥗</a:t>
+              <a:t>正解は ○ ！ ドラム式洗濯機、絶賛募集中です🧺✨</a:t>
             </a:r>
           </a:p>
         </p:txBody>
@@ -22455,2108 +22395,6 @@
       <p:grpSpPr/>
       <p:pic>
         <p:nvPicPr>
-          <p:cNvPr id="2" name="Picture 1" descr="bg_quiz.png"/>
-          <p:cNvPicPr>
-            <a:picLocks noChangeAspect="1"/>
-          </p:cNvPicPr>
-          <p:nvPr/>
-        </p:nvPicPr>
-        <p:blipFill>
-          <a:blip r:embed="rId2"/>
-          <a:stretch>
-            <a:fillRect/>
-          </a:stretch>
-        </p:blipFill>
-        <p:spPr>
-          <a:xfrm>
-            <a:off x="0" y="0"/>
-            <a:ext cx="12192000" cy="6858000"/>
-          </a:xfrm>
-          <a:prstGeom prst="rect">
-            <a:avLst/>
-          </a:prstGeom>
-        </p:spPr>
-      </p:pic>
-      <p:sp>
-        <p:nvSpPr>
-          <p:cNvPr id="3" name="Rounded Rectangle 2"/>
-          <p:cNvSpPr/>
-          <p:nvPr/>
-        </p:nvSpPr>
-        <p:spPr>
-          <a:xfrm>
-            <a:off x="620000" y="300000"/>
-            <a:ext cx="2500000" cy="820000"/>
-          </a:xfrm>
-          <a:prstGeom prst="roundRect">
-            <a:avLst>
-              <a:gd name="adj" fmla="val 50000"/>
-            </a:avLst>
-          </a:prstGeom>
-          <a:solidFill>
-            <a:srgbClr val="962C42"/>
-          </a:solidFill>
-          <a:ln w="38100">
-            <a:solidFill>
-              <a:srgbClr val="C9A227"/>
-            </a:solidFill>
-          </a:ln>
-          <a:effectLst/>
-        </p:spPr>
-        <p:style>
-          <a:lnRef idx="1">
-            <a:schemeClr val="accent1"/>
-          </a:lnRef>
-          <a:fillRef idx="3">
-            <a:schemeClr val="accent1"/>
-          </a:fillRef>
-          <a:effectRef idx="2">
-            <a:schemeClr val="accent1"/>
-          </a:effectRef>
-          <a:fontRef idx="minor">
-            <a:schemeClr val="lt1"/>
-          </a:fontRef>
-        </p:style>
-        <p:txBody>
-          <a:bodyPr rtlCol="0" anchor="ctr" wrap="square" tIns="45000" bIns="45000"/>
-          <a:lstStyle/>
-          <a:p>
-            <a:pPr algn="ctr">
-              <a:lnSpc>
-                <a:spcPct val="105000"/>
-              </a:lnSpc>
-            </a:pPr>
-            <a:r>
-              <a:rPr sz="2600" b="1">
-                <a:solidFill>
-                  <a:srgbClr val="FFFFFF"/>
-                </a:solidFill>
-                <a:latin typeface="Meiryo"/>
-              </a:rPr>
-              <a:t>最終問題</a:t>
-            </a:r>
-          </a:p>
-        </p:txBody>
-      </p:sp>
-      <p:sp>
-        <p:nvSpPr>
-          <p:cNvPr id="4" name="TextBox 3"/>
-          <p:cNvSpPr txBox="1"/>
-          <p:nvPr/>
-        </p:nvSpPr>
-        <p:spPr>
-          <a:xfrm>
-            <a:off x="900000" y="1620000"/>
-            <a:ext cx="10392000" cy="1500000"/>
-          </a:xfrm>
-          <a:prstGeom prst="rect">
-            <a:avLst/>
-          </a:prstGeom>
-          <a:noFill/>
-        </p:spPr>
-        <p:txBody>
-          <a:bodyPr wrap="square" anchor="ctr" lIns="90000" rIns="90000" tIns="45000" bIns="45000">
-            <a:spAutoFit/>
-          </a:bodyPr>
-          <a:lstStyle/>
-          <a:p>
-            <a:pPr algn="ctr">
-              <a:lnSpc>
-                <a:spcPct val="118000"/>
-              </a:lnSpc>
-            </a:pPr>
-            <a:r>
-              <a:rPr sz="3300" b="1" lang="ja-JP" altLang="en-US">
-                <a:solidFill>
-                  <a:srgbClr val="3A2E2A"/>
-                </a:solidFill>
-                <a:latin typeface="Meiryo"/>
-              </a:rPr>
-              <a:t>新郎新婦が今いちばん欲しいものは</a:t>
-            </a:r>
-          </a:p>
-          <a:p>
-            <a:pPr algn="ctr">
-              <a:lnSpc>
-                <a:spcPct val="118000"/>
-              </a:lnSpc>
-            </a:pPr>
-            <a:r>
-              <a:rPr sz="3300" b="1" lang="ja-JP" altLang="en-US">
-                <a:solidFill>
-                  <a:srgbClr val="3A2E2A"/>
-                </a:solidFill>
-                <a:latin typeface="Meiryo"/>
-              </a:rPr>
-              <a:t>ドラム式洗濯機である</a:t>
-            </a:r>
-          </a:p>
-        </p:txBody>
-      </p:sp>
-      <p:sp>
-        <p:nvSpPr>
-          <p:cNvPr id="5" name="Rounded Rectangle 4"/>
-          <p:cNvSpPr/>
-          <p:nvPr/>
-        </p:nvSpPr>
-        <p:spPr>
-          <a:xfrm>
-            <a:off x="1150000" y="3300000"/>
-            <a:ext cx="4250000" cy="2050000"/>
-          </a:xfrm>
-          <a:prstGeom prst="roundRect">
-            <a:avLst>
-              <a:gd name="adj" fmla="val 12000"/>
-            </a:avLst>
-          </a:prstGeom>
-          <a:solidFill>
-            <a:srgbClr val="FFFFFF"/>
-          </a:solidFill>
-          <a:ln w="76200">
-            <a:solidFill>
-              <a:srgbClr val="D94F70"/>
-            </a:solidFill>
-          </a:ln>
-          <a:effectLst/>
-        </p:spPr>
-        <p:style>
-          <a:lnRef idx="1">
-            <a:schemeClr val="accent1"/>
-          </a:lnRef>
-          <a:fillRef idx="3">
-            <a:schemeClr val="accent1"/>
-          </a:fillRef>
-          <a:effectRef idx="2">
-            <a:schemeClr val="accent1"/>
-          </a:effectRef>
-          <a:fontRef idx="minor">
-            <a:schemeClr val="lt1"/>
-          </a:fontRef>
-        </p:style>
-        <p:txBody>
-          <a:bodyPr rtlCol="0" anchor="ctr" wrap="square"/>
-          <a:lstStyle/>
-          <a:p>
-            <a:pPr algn="ctr"/>
-          </a:p>
-        </p:txBody>
-      </p:sp>
-      <p:sp>
-        <p:nvSpPr>
-          <p:cNvPr id="6" name="Rounded Rectangle 5"/>
-          <p:cNvSpPr/>
-          <p:nvPr/>
-        </p:nvSpPr>
-        <p:spPr>
-          <a:xfrm>
-            <a:off x="6792000" y="3300000"/>
-            <a:ext cx="4250000" cy="2050000"/>
-          </a:xfrm>
-          <a:prstGeom prst="roundRect">
-            <a:avLst>
-              <a:gd name="adj" fmla="val 12000"/>
-            </a:avLst>
-          </a:prstGeom>
-          <a:solidFill>
-            <a:srgbClr val="FFFFFF"/>
-          </a:solidFill>
-          <a:ln w="76200">
-            <a:solidFill>
-              <a:srgbClr val="34558B"/>
-            </a:solidFill>
-          </a:ln>
-          <a:effectLst/>
-        </p:spPr>
-        <p:style>
-          <a:lnRef idx="1">
-            <a:schemeClr val="accent1"/>
-          </a:lnRef>
-          <a:fillRef idx="3">
-            <a:schemeClr val="accent1"/>
-          </a:fillRef>
-          <a:effectRef idx="2">
-            <a:schemeClr val="accent1"/>
-          </a:effectRef>
-          <a:fontRef idx="minor">
-            <a:schemeClr val="lt1"/>
-          </a:fontRef>
-        </p:style>
-        <p:txBody>
-          <a:bodyPr rtlCol="0" anchor="ctr" wrap="square"/>
-          <a:lstStyle/>
-          <a:p>
-            <a:pPr algn="ctr"/>
-          </a:p>
-        </p:txBody>
-      </p:sp>
-      <p:sp>
-        <p:nvSpPr>
-          <p:cNvPr id="7" name="Donut 6"/>
-          <p:cNvSpPr/>
-          <p:nvPr/>
-        </p:nvSpPr>
-        <p:spPr>
-          <a:xfrm>
-            <a:off x="2775000" y="3440000"/>
-            <a:ext cx="1000000" cy="1000000"/>
-          </a:xfrm>
-          <a:prstGeom prst="donut">
-            <a:avLst>
-              <a:gd name="adj" fmla="val 13000"/>
-            </a:avLst>
-          </a:prstGeom>
-          <a:solidFill>
-            <a:srgbClr val="D94F70"/>
-          </a:solidFill>
-          <a:ln>
-            <a:noFill/>
-          </a:ln>
-          <a:effectLst/>
-        </p:spPr>
-        <p:style>
-          <a:lnRef idx="1">
-            <a:schemeClr val="accent1"/>
-          </a:lnRef>
-          <a:fillRef idx="3">
-            <a:schemeClr val="accent1"/>
-          </a:fillRef>
-          <a:effectRef idx="2">
-            <a:schemeClr val="accent1"/>
-          </a:effectRef>
-          <a:fontRef idx="minor">
-            <a:schemeClr val="lt1"/>
-          </a:fontRef>
-        </p:style>
-        <p:txBody>
-          <a:bodyPr rtlCol="0" anchor="ctr"/>
-          <a:lstStyle/>
-          <a:p>
-            <a:pPr algn="ctr"/>
-          </a:p>
-        </p:txBody>
-      </p:sp>
-      <p:sp>
-        <p:nvSpPr>
-          <p:cNvPr id="8" name="TextBox 7"/>
-          <p:cNvSpPr txBox="1"/>
-          <p:nvPr/>
-        </p:nvSpPr>
-        <p:spPr>
-          <a:xfrm>
-            <a:off x="1150000" y="4590000"/>
-            <a:ext cx="4250000" cy="640000"/>
-          </a:xfrm>
-          <a:prstGeom prst="rect">
-            <a:avLst/>
-          </a:prstGeom>
-          <a:noFill/>
-        </p:spPr>
-        <p:txBody>
-          <a:bodyPr wrap="square" anchor="ctr" lIns="90000" rIns="90000" tIns="45000" bIns="45000">
-            <a:spAutoFit/>
-          </a:bodyPr>
-          <a:lstStyle/>
-          <a:p>
-            <a:pPr algn="ctr">
-              <a:lnSpc>
-                <a:spcPct val="118000"/>
-              </a:lnSpc>
-            </a:pPr>
-            <a:r>
-              <a:rPr sz="1900" b="1" lang="ja-JP" altLang="en-US">
-                <a:solidFill>
-                  <a:srgbClr val="3A2E2A"/>
-                </a:solidFill>
-                <a:latin typeface="Meiryo"/>
-              </a:rPr>
-              <a:t>画面に向かって 左 へ移動</a:t>
-            </a:r>
-          </a:p>
-        </p:txBody>
-      </p:sp>
-      <p:sp>
-        <p:nvSpPr>
-          <p:cNvPr id="9" name="Rounded Rectangle 8"/>
-          <p:cNvSpPr/>
-          <p:nvPr/>
-        </p:nvSpPr>
-        <p:spPr>
-          <a:xfrm rot="2700000">
-            <a:off x="8447000" y="3840000"/>
-            <a:ext cx="940000" cy="200000"/>
-          </a:xfrm>
-          <a:prstGeom prst="roundRect">
-            <a:avLst>
-              <a:gd name="adj" fmla="val 50000"/>
-            </a:avLst>
-          </a:prstGeom>
-          <a:solidFill>
-            <a:srgbClr val="34558B"/>
-          </a:solidFill>
-          <a:ln>
-            <a:noFill/>
-          </a:ln>
-          <a:effectLst/>
-        </p:spPr>
-        <p:style>
-          <a:lnRef idx="1">
-            <a:schemeClr val="accent1"/>
-          </a:lnRef>
-          <a:fillRef idx="3">
-            <a:schemeClr val="accent1"/>
-          </a:fillRef>
-          <a:effectRef idx="2">
-            <a:schemeClr val="accent1"/>
-          </a:effectRef>
-          <a:fontRef idx="minor">
-            <a:schemeClr val="lt1"/>
-          </a:fontRef>
-        </p:style>
-        <p:txBody>
-          <a:bodyPr rtlCol="0" anchor="ctr"/>
-          <a:lstStyle/>
-          <a:p>
-            <a:pPr algn="ctr"/>
-          </a:p>
-        </p:txBody>
-      </p:sp>
-      <p:sp>
-        <p:nvSpPr>
-          <p:cNvPr id="10" name="Rounded Rectangle 9"/>
-          <p:cNvSpPr/>
-          <p:nvPr/>
-        </p:nvSpPr>
-        <p:spPr>
-          <a:xfrm rot="8100000">
-            <a:off x="8447000" y="3840000"/>
-            <a:ext cx="940000" cy="200000"/>
-          </a:xfrm>
-          <a:prstGeom prst="roundRect">
-            <a:avLst>
-              <a:gd name="adj" fmla="val 50000"/>
-            </a:avLst>
-          </a:prstGeom>
-          <a:solidFill>
-            <a:srgbClr val="34558B"/>
-          </a:solidFill>
-          <a:ln>
-            <a:noFill/>
-          </a:ln>
-          <a:effectLst/>
-        </p:spPr>
-        <p:style>
-          <a:lnRef idx="1">
-            <a:schemeClr val="accent1"/>
-          </a:lnRef>
-          <a:fillRef idx="3">
-            <a:schemeClr val="accent1"/>
-          </a:fillRef>
-          <a:effectRef idx="2">
-            <a:schemeClr val="accent1"/>
-          </a:effectRef>
-          <a:fontRef idx="minor">
-            <a:schemeClr val="lt1"/>
-          </a:fontRef>
-        </p:style>
-        <p:txBody>
-          <a:bodyPr rtlCol="0" anchor="ctr"/>
-          <a:lstStyle/>
-          <a:p>
-            <a:pPr algn="ctr"/>
-          </a:p>
-        </p:txBody>
-      </p:sp>
-      <p:sp>
-        <p:nvSpPr>
-          <p:cNvPr id="11" name="TextBox 10"/>
-          <p:cNvSpPr txBox="1"/>
-          <p:nvPr/>
-        </p:nvSpPr>
-        <p:spPr>
-          <a:xfrm>
-            <a:off x="6792000" y="4590000"/>
-            <a:ext cx="4250000" cy="640000"/>
-          </a:xfrm>
-          <a:prstGeom prst="rect">
-            <a:avLst/>
-          </a:prstGeom>
-          <a:noFill/>
-        </p:spPr>
-        <p:txBody>
-          <a:bodyPr wrap="square" anchor="ctr" lIns="90000" rIns="90000" tIns="45000" bIns="45000">
-            <a:spAutoFit/>
-          </a:bodyPr>
-          <a:lstStyle/>
-          <a:p>
-            <a:pPr algn="ctr">
-              <a:lnSpc>
-                <a:spcPct val="118000"/>
-              </a:lnSpc>
-            </a:pPr>
-            <a:r>
-              <a:rPr sz="1900" b="1" lang="ja-JP" altLang="en-US">
-                <a:solidFill>
-                  <a:srgbClr val="3A2E2A"/>
-                </a:solidFill>
-                <a:latin typeface="Meiryo"/>
-              </a:rPr>
-              <a:t>画面に向かって 右 へ移動</a:t>
-            </a:r>
-          </a:p>
-        </p:txBody>
-      </p:sp>
-      <p:sp>
-        <p:nvSpPr>
-          <p:cNvPr id="12" name="Oval 11"/>
-          <p:cNvSpPr/>
-          <p:nvPr/>
-        </p:nvSpPr>
-        <p:spPr>
-          <a:xfrm>
-            <a:off x="10400000" y="250000"/>
-            <a:ext cx="1300000" cy="1300000"/>
-          </a:xfrm>
-          <a:prstGeom prst="ellipse">
-            <a:avLst/>
-          </a:prstGeom>
-          <a:solidFill>
-            <a:srgbClr val="962C42"/>
-          </a:solidFill>
-          <a:ln w="63500">
-            <a:solidFill>
-              <a:srgbClr val="FFFFFF"/>
-            </a:solidFill>
-          </a:ln>
-          <a:effectLst/>
-        </p:spPr>
-        <p:style>
-          <a:lnRef idx="1">
-            <a:schemeClr val="accent1"/>
-          </a:lnRef>
-          <a:fillRef idx="3">
-            <a:schemeClr val="accent1"/>
-          </a:fillRef>
-          <a:effectRef idx="2">
-            <a:schemeClr val="accent1"/>
-          </a:effectRef>
-          <a:fontRef idx="minor">
-            <a:schemeClr val="lt1"/>
-          </a:fontRef>
-        </p:style>
-        <p:txBody>
-          <a:bodyPr rtlCol="0" anchor="ctr"/>
-          <a:lstStyle/>
-          <a:p>
-            <a:pPr algn="ctr"/>
-          </a:p>
-        </p:txBody>
-      </p:sp>
-      <p:sp>
-        <p:nvSpPr>
-          <p:cNvPr id="13" name="TextBox 12"/>
-          <p:cNvSpPr txBox="1"/>
-          <p:nvPr/>
-        </p:nvSpPr>
-        <p:spPr>
-          <a:xfrm>
-            <a:off x="10400000" y="440000"/>
-            <a:ext cx="1300000" cy="900000"/>
-          </a:xfrm>
-          <a:prstGeom prst="rect">
-            <a:avLst/>
-          </a:prstGeom>
-          <a:noFill/>
-        </p:spPr>
-        <p:txBody>
-          <a:bodyPr wrap="none" anchor="ctr">
-            <a:spAutoFit/>
-          </a:bodyPr>
-          <a:lstStyle/>
-          <a:p>
-            <a:pPr algn="ctr"/>
-            <a:r>
-              <a:rPr sz="5400" b="1">
-                <a:solidFill>
-                  <a:srgbClr val="FFFFFF"/>
-                </a:solidFill>
-                <a:latin typeface="Arial"/>
-              </a:rPr>
-              <a:t>10</a:t>
-            </a:r>
-          </a:p>
-        </p:txBody>
-      </p:sp>
-      <p:sp>
-        <p:nvSpPr>
-          <p:cNvPr id="14" name="TextBox 13"/>
-          <p:cNvSpPr txBox="1"/>
-          <p:nvPr/>
-        </p:nvSpPr>
-        <p:spPr>
-          <a:xfrm>
-            <a:off x="10400000" y="440000"/>
-            <a:ext cx="1300000" cy="900000"/>
-          </a:xfrm>
-          <a:prstGeom prst="rect">
-            <a:avLst/>
-          </a:prstGeom>
-          <a:noFill/>
-        </p:spPr>
-        <p:txBody>
-          <a:bodyPr wrap="none" anchor="ctr">
-            <a:spAutoFit/>
-          </a:bodyPr>
-          <a:lstStyle/>
-          <a:p>
-            <a:pPr algn="ctr"/>
-            <a:r>
-              <a:rPr sz="5400" b="1">
-                <a:solidFill>
-                  <a:srgbClr val="FFFFFF"/>
-                </a:solidFill>
-                <a:latin typeface="Arial"/>
-              </a:rPr>
-              <a:t>9</a:t>
-            </a:r>
-          </a:p>
-        </p:txBody>
-      </p:sp>
-      <p:sp>
-        <p:nvSpPr>
-          <p:cNvPr id="15" name="TextBox 14"/>
-          <p:cNvSpPr txBox="1"/>
-          <p:nvPr/>
-        </p:nvSpPr>
-        <p:spPr>
-          <a:xfrm>
-            <a:off x="10400000" y="440000"/>
-            <a:ext cx="1300000" cy="900000"/>
-          </a:xfrm>
-          <a:prstGeom prst="rect">
-            <a:avLst/>
-          </a:prstGeom>
-          <a:noFill/>
-        </p:spPr>
-        <p:txBody>
-          <a:bodyPr wrap="none" anchor="ctr">
-            <a:spAutoFit/>
-          </a:bodyPr>
-          <a:lstStyle/>
-          <a:p>
-            <a:pPr algn="ctr"/>
-            <a:r>
-              <a:rPr sz="5400" b="1">
-                <a:solidFill>
-                  <a:srgbClr val="FFFFFF"/>
-                </a:solidFill>
-                <a:latin typeface="Arial"/>
-              </a:rPr>
-              <a:t>8</a:t>
-            </a:r>
-          </a:p>
-        </p:txBody>
-      </p:sp>
-      <p:sp>
-        <p:nvSpPr>
-          <p:cNvPr id="16" name="TextBox 15"/>
-          <p:cNvSpPr txBox="1"/>
-          <p:nvPr/>
-        </p:nvSpPr>
-        <p:spPr>
-          <a:xfrm>
-            <a:off x="10400000" y="440000"/>
-            <a:ext cx="1300000" cy="900000"/>
-          </a:xfrm>
-          <a:prstGeom prst="rect">
-            <a:avLst/>
-          </a:prstGeom>
-          <a:noFill/>
-        </p:spPr>
-        <p:txBody>
-          <a:bodyPr wrap="none" anchor="ctr">
-            <a:spAutoFit/>
-          </a:bodyPr>
-          <a:lstStyle/>
-          <a:p>
-            <a:pPr algn="ctr"/>
-            <a:r>
-              <a:rPr sz="5400" b="1">
-                <a:solidFill>
-                  <a:srgbClr val="FFFFFF"/>
-                </a:solidFill>
-                <a:latin typeface="Arial"/>
-              </a:rPr>
-              <a:t>7</a:t>
-            </a:r>
-          </a:p>
-        </p:txBody>
-      </p:sp>
-      <p:sp>
-        <p:nvSpPr>
-          <p:cNvPr id="17" name="TextBox 16"/>
-          <p:cNvSpPr txBox="1"/>
-          <p:nvPr/>
-        </p:nvSpPr>
-        <p:spPr>
-          <a:xfrm>
-            <a:off x="10400000" y="440000"/>
-            <a:ext cx="1300000" cy="900000"/>
-          </a:xfrm>
-          <a:prstGeom prst="rect">
-            <a:avLst/>
-          </a:prstGeom>
-          <a:noFill/>
-        </p:spPr>
-        <p:txBody>
-          <a:bodyPr wrap="none" anchor="ctr">
-            <a:spAutoFit/>
-          </a:bodyPr>
-          <a:lstStyle/>
-          <a:p>
-            <a:pPr algn="ctr"/>
-            <a:r>
-              <a:rPr sz="5400" b="1">
-                <a:solidFill>
-                  <a:srgbClr val="FFFFFF"/>
-                </a:solidFill>
-                <a:latin typeface="Arial"/>
-              </a:rPr>
-              <a:t>6</a:t>
-            </a:r>
-          </a:p>
-        </p:txBody>
-      </p:sp>
-      <p:sp>
-        <p:nvSpPr>
-          <p:cNvPr id="18" name="TextBox 17"/>
-          <p:cNvSpPr txBox="1"/>
-          <p:nvPr/>
-        </p:nvSpPr>
-        <p:spPr>
-          <a:xfrm>
-            <a:off x="10400000" y="440000"/>
-            <a:ext cx="1300000" cy="900000"/>
-          </a:xfrm>
-          <a:prstGeom prst="rect">
-            <a:avLst/>
-          </a:prstGeom>
-          <a:noFill/>
-        </p:spPr>
-        <p:txBody>
-          <a:bodyPr wrap="none" anchor="ctr">
-            <a:spAutoFit/>
-          </a:bodyPr>
-          <a:lstStyle/>
-          <a:p>
-            <a:pPr algn="ctr"/>
-            <a:r>
-              <a:rPr sz="5400" b="1">
-                <a:solidFill>
-                  <a:srgbClr val="FFFFFF"/>
-                </a:solidFill>
-                <a:latin typeface="Arial"/>
-              </a:rPr>
-              <a:t>5</a:t>
-            </a:r>
-          </a:p>
-        </p:txBody>
-      </p:sp>
-      <p:sp>
-        <p:nvSpPr>
-          <p:cNvPr id="19" name="TextBox 18"/>
-          <p:cNvSpPr txBox="1"/>
-          <p:nvPr/>
-        </p:nvSpPr>
-        <p:spPr>
-          <a:xfrm>
-            <a:off x="10400000" y="440000"/>
-            <a:ext cx="1300000" cy="900000"/>
-          </a:xfrm>
-          <a:prstGeom prst="rect">
-            <a:avLst/>
-          </a:prstGeom>
-          <a:noFill/>
-        </p:spPr>
-        <p:txBody>
-          <a:bodyPr wrap="none" anchor="ctr">
-            <a:spAutoFit/>
-          </a:bodyPr>
-          <a:lstStyle/>
-          <a:p>
-            <a:pPr algn="ctr"/>
-            <a:r>
-              <a:rPr sz="5400" b="1">
-                <a:solidFill>
-                  <a:srgbClr val="FFFFFF"/>
-                </a:solidFill>
-                <a:latin typeface="Arial"/>
-              </a:rPr>
-              <a:t>4</a:t>
-            </a:r>
-          </a:p>
-        </p:txBody>
-      </p:sp>
-      <p:sp>
-        <p:nvSpPr>
-          <p:cNvPr id="20" name="TextBox 19"/>
-          <p:cNvSpPr txBox="1"/>
-          <p:nvPr/>
-        </p:nvSpPr>
-        <p:spPr>
-          <a:xfrm>
-            <a:off x="10400000" y="440000"/>
-            <a:ext cx="1300000" cy="900000"/>
-          </a:xfrm>
-          <a:prstGeom prst="rect">
-            <a:avLst/>
-          </a:prstGeom>
-          <a:noFill/>
-        </p:spPr>
-        <p:txBody>
-          <a:bodyPr wrap="none" anchor="ctr">
-            <a:spAutoFit/>
-          </a:bodyPr>
-          <a:lstStyle/>
-          <a:p>
-            <a:pPr algn="ctr"/>
-            <a:r>
-              <a:rPr sz="5400" b="1">
-                <a:solidFill>
-                  <a:srgbClr val="FFFFFF"/>
-                </a:solidFill>
-                <a:latin typeface="Arial"/>
-              </a:rPr>
-              <a:t>3</a:t>
-            </a:r>
-          </a:p>
-        </p:txBody>
-      </p:sp>
-      <p:sp>
-        <p:nvSpPr>
-          <p:cNvPr id="21" name="TextBox 20"/>
-          <p:cNvSpPr txBox="1"/>
-          <p:nvPr/>
-        </p:nvSpPr>
-        <p:spPr>
-          <a:xfrm>
-            <a:off x="10400000" y="440000"/>
-            <a:ext cx="1300000" cy="900000"/>
-          </a:xfrm>
-          <a:prstGeom prst="rect">
-            <a:avLst/>
-          </a:prstGeom>
-          <a:noFill/>
-        </p:spPr>
-        <p:txBody>
-          <a:bodyPr wrap="none" anchor="ctr">
-            <a:spAutoFit/>
-          </a:bodyPr>
-          <a:lstStyle/>
-          <a:p>
-            <a:pPr algn="ctr"/>
-            <a:r>
-              <a:rPr sz="5400" b="1">
-                <a:solidFill>
-                  <a:srgbClr val="FFFFFF"/>
-                </a:solidFill>
-                <a:latin typeface="Arial"/>
-              </a:rPr>
-              <a:t>2</a:t>
-            </a:r>
-          </a:p>
-        </p:txBody>
-      </p:sp>
-      <p:sp>
-        <p:nvSpPr>
-          <p:cNvPr id="22" name="TextBox 21"/>
-          <p:cNvSpPr txBox="1"/>
-          <p:nvPr/>
-        </p:nvSpPr>
-        <p:spPr>
-          <a:xfrm>
-            <a:off x="10400000" y="440000"/>
-            <a:ext cx="1300000" cy="900000"/>
-          </a:xfrm>
-          <a:prstGeom prst="rect">
-            <a:avLst/>
-          </a:prstGeom>
-          <a:noFill/>
-        </p:spPr>
-        <p:txBody>
-          <a:bodyPr wrap="none" anchor="ctr">
-            <a:spAutoFit/>
-          </a:bodyPr>
-          <a:lstStyle/>
-          <a:p>
-            <a:pPr algn="ctr"/>
-            <a:r>
-              <a:rPr sz="5400" b="1">
-                <a:solidFill>
-                  <a:srgbClr val="FFFFFF"/>
-                </a:solidFill>
-                <a:latin typeface="Arial"/>
-              </a:rPr>
-              <a:t>1</a:t>
-            </a:r>
-          </a:p>
-        </p:txBody>
-      </p:sp>
-      <p:sp>
-        <p:nvSpPr>
-          <p:cNvPr id="23" name="TextBox 22"/>
-          <p:cNvSpPr txBox="1"/>
-          <p:nvPr/>
-        </p:nvSpPr>
-        <p:spPr>
-          <a:xfrm>
-            <a:off x="10400000" y="440000"/>
-            <a:ext cx="1300000" cy="900000"/>
-          </a:xfrm>
-          <a:prstGeom prst="rect">
-            <a:avLst/>
-          </a:prstGeom>
-          <a:noFill/>
-        </p:spPr>
-        <p:txBody>
-          <a:bodyPr wrap="none" anchor="ctr">
-            <a:spAutoFit/>
-          </a:bodyPr>
-          <a:lstStyle/>
-          <a:p>
-            <a:pPr algn="ctr"/>
-            <a:r>
-              <a:rPr sz="5400" b="1">
-                <a:solidFill>
-                  <a:srgbClr val="FFFFFF"/>
-                </a:solidFill>
-                <a:latin typeface="Arial"/>
-              </a:rPr>
-              <a:t>0</a:t>
-            </a:r>
-          </a:p>
-        </p:txBody>
-      </p:sp>
-      <p:sp>
-        <p:nvSpPr>
-          <p:cNvPr id="24" name="Rounded Rectangle 23"/>
-          <p:cNvSpPr/>
-          <p:nvPr/>
-        </p:nvSpPr>
-        <p:spPr>
-          <a:xfrm>
-            <a:off x="1040000" y="3190000"/>
-            <a:ext cx="4470000" cy="2270000"/>
-          </a:xfrm>
-          <a:prstGeom prst="roundRect">
-            <a:avLst>
-              <a:gd name="adj" fmla="val 12000"/>
-            </a:avLst>
-          </a:prstGeom>
-          <a:noFill/>
-          <a:ln w="95250">
-            <a:solidFill>
-              <a:srgbClr val="FF0000"/>
-            </a:solidFill>
-          </a:ln>
-          <a:effectLst/>
-        </p:spPr>
-        <p:style>
-          <a:lnRef idx="1">
-            <a:schemeClr val="accent1"/>
-          </a:lnRef>
-          <a:fillRef idx="3">
-            <a:schemeClr val="accent1"/>
-          </a:fillRef>
-          <a:effectRef idx="2">
-            <a:schemeClr val="accent1"/>
-          </a:effectRef>
-          <a:fontRef idx="minor">
-            <a:schemeClr val="lt1"/>
-          </a:fontRef>
-        </p:style>
-        <p:txBody>
-          <a:bodyPr rtlCol="0" anchor="ctr" wrap="square"/>
-          <a:lstStyle/>
-          <a:p>
-            <a:pPr algn="ctr"/>
-          </a:p>
-        </p:txBody>
-      </p:sp>
-      <p:sp>
-        <p:nvSpPr>
-          <p:cNvPr id="25" name="Rounded Rectangle 24"/>
-          <p:cNvSpPr/>
-          <p:nvPr/>
-        </p:nvSpPr>
-        <p:spPr>
-          <a:xfrm>
-            <a:off x="1150000" y="5550000"/>
-            <a:ext cx="9892000" cy="900000"/>
-          </a:xfrm>
-          <a:prstGeom prst="roundRect">
-            <a:avLst>
-              <a:gd name="adj" fmla="val 25000"/>
-            </a:avLst>
-          </a:prstGeom>
-          <a:solidFill>
-            <a:srgbClr val="962C42"/>
-          </a:solidFill>
-          <a:ln w="38100">
-            <a:solidFill>
-              <a:srgbClr val="C9A227"/>
-            </a:solidFill>
-          </a:ln>
-          <a:effectLst/>
-        </p:spPr>
-        <p:style>
-          <a:lnRef idx="1">
-            <a:schemeClr val="accent1"/>
-          </a:lnRef>
-          <a:fillRef idx="3">
-            <a:schemeClr val="accent1"/>
-          </a:fillRef>
-          <a:effectRef idx="2">
-            <a:schemeClr val="accent1"/>
-          </a:effectRef>
-          <a:fontRef idx="minor">
-            <a:schemeClr val="lt1"/>
-          </a:fontRef>
-        </p:style>
-        <p:txBody>
-          <a:bodyPr rtlCol="0" anchor="ctr" wrap="square" tIns="45000" bIns="45000"/>
-          <a:lstStyle/>
-          <a:p>
-            <a:pPr algn="ctr">
-              <a:lnSpc>
-                <a:spcPct val="105000"/>
-              </a:lnSpc>
-            </a:pPr>
-            <a:r>
-              <a:rPr sz="2300" b="1">
-                <a:solidFill>
-                  <a:srgbClr val="FFFFFF"/>
-                </a:solidFill>
-                <a:latin typeface="Meiryo"/>
-              </a:rPr>
-              <a:t>正解は ○ ！ ドラム式洗濯機、絶賛募集中です🧺✨</a:t>
-            </a:r>
-          </a:p>
-        </p:txBody>
-      </p:sp>
-      <p:pic>
-        <p:nvPicPr>
-          <p:cNvPr id="26" name="カウントダウンBGM">
-            <a:hlinkClick r:id="" action="ppaction://media"/>
-          </p:cNvPr>
-          <p:cNvPicPr>
-            <a:picLocks noChangeAspect="1"/>
-          </p:cNvPicPr>
-          <p:nvPr>
-            <a:audioFile r:link="rId4"/>
-            <p:extLst>
-              <p:ext uri="{DAA4B4D4-6D71-4841-9C94-3DE7FCFB9230}">
-                <p14:media xmlns:p14="http://schemas.microsoft.com/office/powerpoint/2010/main" r:embed="rId3"/>
-              </p:ext>
-            </p:extLst>
-          </p:nvPr>
-        </p:nvPicPr>
-        <p:blipFill>
-          <a:blip r:embed="rId5"/>
-          <a:stretch>
-            <a:fillRect/>
-          </a:stretch>
-        </p:blipFill>
-        <p:spPr>
-          <a:xfrm>
-            <a:off x="-900000" y="200000"/>
-            <a:ext cx="406400" cy="406400"/>
-          </a:xfrm>
-          <a:prstGeom prst="rect">
-            <a:avLst/>
-          </a:prstGeom>
-        </p:spPr>
-      </p:pic>
-      <p:pic>
-        <p:nvPicPr>
-          <p:cNvPr id="27" name="正解発表効果音">
-            <a:hlinkClick r:id="" action="ppaction://media"/>
-          </p:cNvPr>
-          <p:cNvPicPr>
-            <a:picLocks noChangeAspect="1"/>
-          </p:cNvPicPr>
-          <p:nvPr>
-            <a:audioFile r:link="rId7"/>
-            <p:extLst>
-              <p:ext uri="{DAA4B4D4-6D71-4841-9C94-3DE7FCFB9230}">
-                <p14:media xmlns:p14="http://schemas.microsoft.com/office/powerpoint/2010/main" r:embed="rId6"/>
-              </p:ext>
-            </p:extLst>
-          </p:nvPr>
-        </p:nvPicPr>
-        <p:blipFill>
-          <a:blip r:embed="rId5"/>
-          <a:stretch>
-            <a:fillRect/>
-          </a:stretch>
-        </p:blipFill>
-        <p:spPr>
-          <a:xfrm>
-            <a:off x="-1400000" y="200000"/>
-            <a:ext cx="406400" cy="406400"/>
-          </a:xfrm>
-          <a:prstGeom prst="rect">
-            <a:avLst/>
-          </a:prstGeom>
-        </p:spPr>
-      </p:pic>
-    </p:spTree>
-  </p:cSld>
-  <p:clrMapOvr>
-    <a:masterClrMapping/>
-  </p:clrMapOvr>
-  <p:transition spd="med">
-    <p:fade/>
-  </p:transition>
-  <p:timing>
-    <p:tnLst>
-      <p:par>
-        <p:cTn id="1" dur="indefinite" restart="never" nodeType="tmRoot">
-          <p:childTnLst>
-            <p:seq concurrent="1" nextAc="seek">
-              <p:cTn id="2" dur="indefinite" nodeType="mainSeq">
-                <p:childTnLst>
-                  <p:par>
-                    <p:cTn id="3" fill="hold">
-                      <p:stCondLst>
-                        <p:cond delay="indefinite"/>
-                      </p:stCondLst>
-                      <p:childTnLst>
-                        <p:par>
-                          <p:cTn id="4" fill="hold">
-                            <p:stCondLst>
-                              <p:cond delay="0"/>
-                            </p:stCondLst>
-                            <p:childTnLst>
-                              <p:par>
-                                <p:cTn id="5" presetID="1" presetClass="mediacall" presetSubtype="0" fill="hold" nodeType="clickEffect">
-                                  <p:stCondLst>
-                                    <p:cond delay="0"/>
-                                  </p:stCondLst>
-                                  <p:childTnLst>
-                                    <p:cmd type="call" cmd="playFrom(0.0)">
-                                      <p:cBhvr>
-                                        <p:cTn id="6" dur="12024" fill="hold"/>
-                                        <p:tgtEl>
-                                          <p:spTgt spid="26"/>
-                                        </p:tgtEl>
-                                      </p:cBhvr>
-                                    </p:cmd>
-                                  </p:childTnLst>
-                                </p:cTn>
-                              </p:par>
-                              <p:par>
-                                <p:cTn id="7" presetID="1" presetClass="entr" presetSubtype="0" fill="hold" grpId="0" nodeType="withEffect">
-                                  <p:stCondLst>
-                                    <p:cond delay="0"/>
-                                  </p:stCondLst>
-                                  <p:childTnLst>
-                                    <p:set>
-                                      <p:cBhvr>
-                                        <p:cTn id="8" dur="1" fill="hold">
-                                          <p:stCondLst>
-                                            <p:cond delay="0"/>
-                                          </p:stCondLst>
-                                        </p:cTn>
-                                        <p:tgtEl>
-                                          <p:spTgt spid="12"/>
-                                        </p:tgtEl>
-                                        <p:attrNameLst>
-                                          <p:attrName>style.visibility</p:attrName>
-                                        </p:attrNameLst>
-                                      </p:cBhvr>
-                                      <p:to>
-                                        <p:strVal val="visible"/>
-                                      </p:to>
-                                    </p:set>
-                                  </p:childTnLst>
-                                </p:cTn>
-                              </p:par>
-                              <p:par>
-                                <p:cTn id="9" presetID="1" presetClass="entr" presetSubtype="0" fill="hold" grpId="0" nodeType="withEffect">
-                                  <p:stCondLst>
-                                    <p:cond delay="0"/>
-                                  </p:stCondLst>
-                                  <p:childTnLst>
-                                    <p:set>
-                                      <p:cBhvr>
-                                        <p:cTn id="10" dur="1" fill="hold">
-                                          <p:stCondLst>
-                                            <p:cond delay="0"/>
-                                          </p:stCondLst>
-                                        </p:cTn>
-                                        <p:tgtEl>
-                                          <p:spTgt spid="13"/>
-                                        </p:tgtEl>
-                                        <p:attrNameLst>
-                                          <p:attrName>style.visibility</p:attrName>
-                                        </p:attrNameLst>
-                                      </p:cBhvr>
-                                      <p:to>
-                                        <p:strVal val="visible"/>
-                                      </p:to>
-                                    </p:set>
-                                  </p:childTnLst>
-                                </p:cTn>
-                              </p:par>
-                              <p:par>
-                                <p:cTn id="11" presetID="1" presetClass="exit" presetSubtype="0" fill="hold" grpId="0" nodeType="withEffect">
-                                  <p:stCondLst>
-                                    <p:cond delay="1000"/>
-                                  </p:stCondLst>
-                                  <p:childTnLst>
-                                    <p:set>
-                                      <p:cBhvr>
-                                        <p:cTn id="12" dur="1" fill="hold">
-                                          <p:stCondLst>
-                                            <p:cond delay="0"/>
-                                          </p:stCondLst>
-                                        </p:cTn>
-                                        <p:tgtEl>
-                                          <p:spTgt spid="13"/>
-                                        </p:tgtEl>
-                                        <p:attrNameLst>
-                                          <p:attrName>style.visibility</p:attrName>
-                                        </p:attrNameLst>
-                                      </p:cBhvr>
-                                      <p:to>
-                                        <p:strVal val="hidden"/>
-                                      </p:to>
-                                    </p:set>
-                                  </p:childTnLst>
-                                </p:cTn>
-                              </p:par>
-                              <p:par>
-                                <p:cTn id="13" presetID="1" presetClass="entr" presetSubtype="0" fill="hold" grpId="0" nodeType="withEffect">
-                                  <p:stCondLst>
-                                    <p:cond delay="1000"/>
-                                  </p:stCondLst>
-                                  <p:childTnLst>
-                                    <p:set>
-                                      <p:cBhvr>
-                                        <p:cTn id="14" dur="1" fill="hold">
-                                          <p:stCondLst>
-                                            <p:cond delay="0"/>
-                                          </p:stCondLst>
-                                        </p:cTn>
-                                        <p:tgtEl>
-                                          <p:spTgt spid="14"/>
-                                        </p:tgtEl>
-                                        <p:attrNameLst>
-                                          <p:attrName>style.visibility</p:attrName>
-                                        </p:attrNameLst>
-                                      </p:cBhvr>
-                                      <p:to>
-                                        <p:strVal val="visible"/>
-                                      </p:to>
-                                    </p:set>
-                                  </p:childTnLst>
-                                </p:cTn>
-                              </p:par>
-                              <p:par>
-                                <p:cTn id="15" presetID="1" presetClass="exit" presetSubtype="0" fill="hold" grpId="0" nodeType="withEffect">
-                                  <p:stCondLst>
-                                    <p:cond delay="2000"/>
-                                  </p:stCondLst>
-                                  <p:childTnLst>
-                                    <p:set>
-                                      <p:cBhvr>
-                                        <p:cTn id="16" dur="1" fill="hold">
-                                          <p:stCondLst>
-                                            <p:cond delay="0"/>
-                                          </p:stCondLst>
-                                        </p:cTn>
-                                        <p:tgtEl>
-                                          <p:spTgt spid="14"/>
-                                        </p:tgtEl>
-                                        <p:attrNameLst>
-                                          <p:attrName>style.visibility</p:attrName>
-                                        </p:attrNameLst>
-                                      </p:cBhvr>
-                                      <p:to>
-                                        <p:strVal val="hidden"/>
-                                      </p:to>
-                                    </p:set>
-                                  </p:childTnLst>
-                                </p:cTn>
-                              </p:par>
-                              <p:par>
-                                <p:cTn id="17" presetID="1" presetClass="entr" presetSubtype="0" fill="hold" grpId="0" nodeType="withEffect">
-                                  <p:stCondLst>
-                                    <p:cond delay="2000"/>
-                                  </p:stCondLst>
-                                  <p:childTnLst>
-                                    <p:set>
-                                      <p:cBhvr>
-                                        <p:cTn id="18" dur="1" fill="hold">
-                                          <p:stCondLst>
-                                            <p:cond delay="0"/>
-                                          </p:stCondLst>
-                                        </p:cTn>
-                                        <p:tgtEl>
-                                          <p:spTgt spid="15"/>
-                                        </p:tgtEl>
-                                        <p:attrNameLst>
-                                          <p:attrName>style.visibility</p:attrName>
-                                        </p:attrNameLst>
-                                      </p:cBhvr>
-                                      <p:to>
-                                        <p:strVal val="visible"/>
-                                      </p:to>
-                                    </p:set>
-                                  </p:childTnLst>
-                                </p:cTn>
-                              </p:par>
-                              <p:par>
-                                <p:cTn id="19" presetID="1" presetClass="exit" presetSubtype="0" fill="hold" grpId="0" nodeType="withEffect">
-                                  <p:stCondLst>
-                                    <p:cond delay="3000"/>
-                                  </p:stCondLst>
-                                  <p:childTnLst>
-                                    <p:set>
-                                      <p:cBhvr>
-                                        <p:cTn id="20" dur="1" fill="hold">
-                                          <p:stCondLst>
-                                            <p:cond delay="0"/>
-                                          </p:stCondLst>
-                                        </p:cTn>
-                                        <p:tgtEl>
-                                          <p:spTgt spid="15"/>
-                                        </p:tgtEl>
-                                        <p:attrNameLst>
-                                          <p:attrName>style.visibility</p:attrName>
-                                        </p:attrNameLst>
-                                      </p:cBhvr>
-                                      <p:to>
-                                        <p:strVal val="hidden"/>
-                                      </p:to>
-                                    </p:set>
-                                  </p:childTnLst>
-                                </p:cTn>
-                              </p:par>
-                              <p:par>
-                                <p:cTn id="21" presetID="1" presetClass="entr" presetSubtype="0" fill="hold" grpId="0" nodeType="withEffect">
-                                  <p:stCondLst>
-                                    <p:cond delay="3000"/>
-                                  </p:stCondLst>
-                                  <p:childTnLst>
-                                    <p:set>
-                                      <p:cBhvr>
-                                        <p:cTn id="22" dur="1" fill="hold">
-                                          <p:stCondLst>
-                                            <p:cond delay="0"/>
-                                          </p:stCondLst>
-                                        </p:cTn>
-                                        <p:tgtEl>
-                                          <p:spTgt spid="16"/>
-                                        </p:tgtEl>
-                                        <p:attrNameLst>
-                                          <p:attrName>style.visibility</p:attrName>
-                                        </p:attrNameLst>
-                                      </p:cBhvr>
-                                      <p:to>
-                                        <p:strVal val="visible"/>
-                                      </p:to>
-                                    </p:set>
-                                  </p:childTnLst>
-                                </p:cTn>
-                              </p:par>
-                              <p:par>
-                                <p:cTn id="23" presetID="1" presetClass="exit" presetSubtype="0" fill="hold" grpId="0" nodeType="withEffect">
-                                  <p:stCondLst>
-                                    <p:cond delay="4000"/>
-                                  </p:stCondLst>
-                                  <p:childTnLst>
-                                    <p:set>
-                                      <p:cBhvr>
-                                        <p:cTn id="24" dur="1" fill="hold">
-                                          <p:stCondLst>
-                                            <p:cond delay="0"/>
-                                          </p:stCondLst>
-                                        </p:cTn>
-                                        <p:tgtEl>
-                                          <p:spTgt spid="16"/>
-                                        </p:tgtEl>
-                                        <p:attrNameLst>
-                                          <p:attrName>style.visibility</p:attrName>
-                                        </p:attrNameLst>
-                                      </p:cBhvr>
-                                      <p:to>
-                                        <p:strVal val="hidden"/>
-                                      </p:to>
-                                    </p:set>
-                                  </p:childTnLst>
-                                </p:cTn>
-                              </p:par>
-                              <p:par>
-                                <p:cTn id="25" presetID="1" presetClass="entr" presetSubtype="0" fill="hold" grpId="0" nodeType="withEffect">
-                                  <p:stCondLst>
-                                    <p:cond delay="4000"/>
-                                  </p:stCondLst>
-                                  <p:childTnLst>
-                                    <p:set>
-                                      <p:cBhvr>
-                                        <p:cTn id="26" dur="1" fill="hold">
-                                          <p:stCondLst>
-                                            <p:cond delay="0"/>
-                                          </p:stCondLst>
-                                        </p:cTn>
-                                        <p:tgtEl>
-                                          <p:spTgt spid="17"/>
-                                        </p:tgtEl>
-                                        <p:attrNameLst>
-                                          <p:attrName>style.visibility</p:attrName>
-                                        </p:attrNameLst>
-                                      </p:cBhvr>
-                                      <p:to>
-                                        <p:strVal val="visible"/>
-                                      </p:to>
-                                    </p:set>
-                                  </p:childTnLst>
-                                </p:cTn>
-                              </p:par>
-                              <p:par>
-                                <p:cTn id="27" presetID="1" presetClass="exit" presetSubtype="0" fill="hold" grpId="0" nodeType="withEffect">
-                                  <p:stCondLst>
-                                    <p:cond delay="5000"/>
-                                  </p:stCondLst>
-                                  <p:childTnLst>
-                                    <p:set>
-                                      <p:cBhvr>
-                                        <p:cTn id="28" dur="1" fill="hold">
-                                          <p:stCondLst>
-                                            <p:cond delay="0"/>
-                                          </p:stCondLst>
-                                        </p:cTn>
-                                        <p:tgtEl>
-                                          <p:spTgt spid="17"/>
-                                        </p:tgtEl>
-                                        <p:attrNameLst>
-                                          <p:attrName>style.visibility</p:attrName>
-                                        </p:attrNameLst>
-                                      </p:cBhvr>
-                                      <p:to>
-                                        <p:strVal val="hidden"/>
-                                      </p:to>
-                                    </p:set>
-                                  </p:childTnLst>
-                                </p:cTn>
-                              </p:par>
-                              <p:par>
-                                <p:cTn id="29" presetID="1" presetClass="entr" presetSubtype="0" fill="hold" grpId="0" nodeType="withEffect">
-                                  <p:stCondLst>
-                                    <p:cond delay="5000"/>
-                                  </p:stCondLst>
-                                  <p:childTnLst>
-                                    <p:set>
-                                      <p:cBhvr>
-                                        <p:cTn id="30" dur="1" fill="hold">
-                                          <p:stCondLst>
-                                            <p:cond delay="0"/>
-                                          </p:stCondLst>
-                                        </p:cTn>
-                                        <p:tgtEl>
-                                          <p:spTgt spid="18"/>
-                                        </p:tgtEl>
-                                        <p:attrNameLst>
-                                          <p:attrName>style.visibility</p:attrName>
-                                        </p:attrNameLst>
-                                      </p:cBhvr>
-                                      <p:to>
-                                        <p:strVal val="visible"/>
-                                      </p:to>
-                                    </p:set>
-                                  </p:childTnLst>
-                                </p:cTn>
-                              </p:par>
-                              <p:par>
-                                <p:cTn id="31" presetID="1" presetClass="exit" presetSubtype="0" fill="hold" grpId="0" nodeType="withEffect">
-                                  <p:stCondLst>
-                                    <p:cond delay="6000"/>
-                                  </p:stCondLst>
-                                  <p:childTnLst>
-                                    <p:set>
-                                      <p:cBhvr>
-                                        <p:cTn id="32" dur="1" fill="hold">
-                                          <p:stCondLst>
-                                            <p:cond delay="0"/>
-                                          </p:stCondLst>
-                                        </p:cTn>
-                                        <p:tgtEl>
-                                          <p:spTgt spid="18"/>
-                                        </p:tgtEl>
-                                        <p:attrNameLst>
-                                          <p:attrName>style.visibility</p:attrName>
-                                        </p:attrNameLst>
-                                      </p:cBhvr>
-                                      <p:to>
-                                        <p:strVal val="hidden"/>
-                                      </p:to>
-                                    </p:set>
-                                  </p:childTnLst>
-                                </p:cTn>
-                              </p:par>
-                              <p:par>
-                                <p:cTn id="33" presetID="1" presetClass="entr" presetSubtype="0" fill="hold" grpId="0" nodeType="withEffect">
-                                  <p:stCondLst>
-                                    <p:cond delay="6000"/>
-                                  </p:stCondLst>
-                                  <p:childTnLst>
-                                    <p:set>
-                                      <p:cBhvr>
-                                        <p:cTn id="34" dur="1" fill="hold">
-                                          <p:stCondLst>
-                                            <p:cond delay="0"/>
-                                          </p:stCondLst>
-                                        </p:cTn>
-                                        <p:tgtEl>
-                                          <p:spTgt spid="19"/>
-                                        </p:tgtEl>
-                                        <p:attrNameLst>
-                                          <p:attrName>style.visibility</p:attrName>
-                                        </p:attrNameLst>
-                                      </p:cBhvr>
-                                      <p:to>
-                                        <p:strVal val="visible"/>
-                                      </p:to>
-                                    </p:set>
-                                  </p:childTnLst>
-                                </p:cTn>
-                              </p:par>
-                              <p:par>
-                                <p:cTn id="35" presetID="1" presetClass="exit" presetSubtype="0" fill="hold" grpId="0" nodeType="withEffect">
-                                  <p:stCondLst>
-                                    <p:cond delay="7000"/>
-                                  </p:stCondLst>
-                                  <p:childTnLst>
-                                    <p:set>
-                                      <p:cBhvr>
-                                        <p:cTn id="36" dur="1" fill="hold">
-                                          <p:stCondLst>
-                                            <p:cond delay="0"/>
-                                          </p:stCondLst>
-                                        </p:cTn>
-                                        <p:tgtEl>
-                                          <p:spTgt spid="19"/>
-                                        </p:tgtEl>
-                                        <p:attrNameLst>
-                                          <p:attrName>style.visibility</p:attrName>
-                                        </p:attrNameLst>
-                                      </p:cBhvr>
-                                      <p:to>
-                                        <p:strVal val="hidden"/>
-                                      </p:to>
-                                    </p:set>
-                                  </p:childTnLst>
-                                </p:cTn>
-                              </p:par>
-                              <p:par>
-                                <p:cTn id="37" presetID="1" presetClass="entr" presetSubtype="0" fill="hold" grpId="0" nodeType="withEffect">
-                                  <p:stCondLst>
-                                    <p:cond delay="7000"/>
-                                  </p:stCondLst>
-                                  <p:childTnLst>
-                                    <p:set>
-                                      <p:cBhvr>
-                                        <p:cTn id="38" dur="1" fill="hold">
-                                          <p:stCondLst>
-                                            <p:cond delay="0"/>
-                                          </p:stCondLst>
-                                        </p:cTn>
-                                        <p:tgtEl>
-                                          <p:spTgt spid="20"/>
-                                        </p:tgtEl>
-                                        <p:attrNameLst>
-                                          <p:attrName>style.visibility</p:attrName>
-                                        </p:attrNameLst>
-                                      </p:cBhvr>
-                                      <p:to>
-                                        <p:strVal val="visible"/>
-                                      </p:to>
-                                    </p:set>
-                                  </p:childTnLst>
-                                </p:cTn>
-                              </p:par>
-                              <p:par>
-                                <p:cTn id="39" presetID="1" presetClass="exit" presetSubtype="0" fill="hold" grpId="0" nodeType="withEffect">
-                                  <p:stCondLst>
-                                    <p:cond delay="8000"/>
-                                  </p:stCondLst>
-                                  <p:childTnLst>
-                                    <p:set>
-                                      <p:cBhvr>
-                                        <p:cTn id="40" dur="1" fill="hold">
-                                          <p:stCondLst>
-                                            <p:cond delay="0"/>
-                                          </p:stCondLst>
-                                        </p:cTn>
-                                        <p:tgtEl>
-                                          <p:spTgt spid="20"/>
-                                        </p:tgtEl>
-                                        <p:attrNameLst>
-                                          <p:attrName>style.visibility</p:attrName>
-                                        </p:attrNameLst>
-                                      </p:cBhvr>
-                                      <p:to>
-                                        <p:strVal val="hidden"/>
-                                      </p:to>
-                                    </p:set>
-                                  </p:childTnLst>
-                                </p:cTn>
-                              </p:par>
-                              <p:par>
-                                <p:cTn id="41" presetID="1" presetClass="entr" presetSubtype="0" fill="hold" grpId="0" nodeType="withEffect">
-                                  <p:stCondLst>
-                                    <p:cond delay="8000"/>
-                                  </p:stCondLst>
-                                  <p:childTnLst>
-                                    <p:set>
-                                      <p:cBhvr>
-                                        <p:cTn id="42" dur="1" fill="hold">
-                                          <p:stCondLst>
-                                            <p:cond delay="0"/>
-                                          </p:stCondLst>
-                                        </p:cTn>
-                                        <p:tgtEl>
-                                          <p:spTgt spid="21"/>
-                                        </p:tgtEl>
-                                        <p:attrNameLst>
-                                          <p:attrName>style.visibility</p:attrName>
-                                        </p:attrNameLst>
-                                      </p:cBhvr>
-                                      <p:to>
-                                        <p:strVal val="visible"/>
-                                      </p:to>
-                                    </p:set>
-                                  </p:childTnLst>
-                                </p:cTn>
-                              </p:par>
-                              <p:par>
-                                <p:cTn id="43" presetID="1" presetClass="exit" presetSubtype="0" fill="hold" grpId="0" nodeType="withEffect">
-                                  <p:stCondLst>
-                                    <p:cond delay="9000"/>
-                                  </p:stCondLst>
-                                  <p:childTnLst>
-                                    <p:set>
-                                      <p:cBhvr>
-                                        <p:cTn id="44" dur="1" fill="hold">
-                                          <p:stCondLst>
-                                            <p:cond delay="0"/>
-                                          </p:stCondLst>
-                                        </p:cTn>
-                                        <p:tgtEl>
-                                          <p:spTgt spid="21"/>
-                                        </p:tgtEl>
-                                        <p:attrNameLst>
-                                          <p:attrName>style.visibility</p:attrName>
-                                        </p:attrNameLst>
-                                      </p:cBhvr>
-                                      <p:to>
-                                        <p:strVal val="hidden"/>
-                                      </p:to>
-                                    </p:set>
-                                  </p:childTnLst>
-                                </p:cTn>
-                              </p:par>
-                              <p:par>
-                                <p:cTn id="45" presetID="1" presetClass="entr" presetSubtype="0" fill="hold" grpId="0" nodeType="withEffect">
-                                  <p:stCondLst>
-                                    <p:cond delay="9000"/>
-                                  </p:stCondLst>
-                                  <p:childTnLst>
-                                    <p:set>
-                                      <p:cBhvr>
-                                        <p:cTn id="46" dur="1" fill="hold">
-                                          <p:stCondLst>
-                                            <p:cond delay="0"/>
-                                          </p:stCondLst>
-                                        </p:cTn>
-                                        <p:tgtEl>
-                                          <p:spTgt spid="22"/>
-                                        </p:tgtEl>
-                                        <p:attrNameLst>
-                                          <p:attrName>style.visibility</p:attrName>
-                                        </p:attrNameLst>
-                                      </p:cBhvr>
-                                      <p:to>
-                                        <p:strVal val="visible"/>
-                                      </p:to>
-                                    </p:set>
-                                  </p:childTnLst>
-                                </p:cTn>
-                              </p:par>
-                              <p:par>
-                                <p:cTn id="47" presetID="1" presetClass="exit" presetSubtype="0" fill="hold" grpId="0" nodeType="withEffect">
-                                  <p:stCondLst>
-                                    <p:cond delay="10000"/>
-                                  </p:stCondLst>
-                                  <p:childTnLst>
-                                    <p:set>
-                                      <p:cBhvr>
-                                        <p:cTn id="48" dur="1" fill="hold">
-                                          <p:stCondLst>
-                                            <p:cond delay="0"/>
-                                          </p:stCondLst>
-                                        </p:cTn>
-                                        <p:tgtEl>
-                                          <p:spTgt spid="22"/>
-                                        </p:tgtEl>
-                                        <p:attrNameLst>
-                                          <p:attrName>style.visibility</p:attrName>
-                                        </p:attrNameLst>
-                                      </p:cBhvr>
-                                      <p:to>
-                                        <p:strVal val="hidden"/>
-                                      </p:to>
-                                    </p:set>
-                                  </p:childTnLst>
-                                </p:cTn>
-                              </p:par>
-                              <p:par>
-                                <p:cTn id="49" presetID="1" presetClass="entr" presetSubtype="0" fill="hold" grpId="0" nodeType="withEffect">
-                                  <p:stCondLst>
-                                    <p:cond delay="10000"/>
-                                  </p:stCondLst>
-                                  <p:childTnLst>
-                                    <p:set>
-                                      <p:cBhvr>
-                                        <p:cTn id="50" dur="1" fill="hold">
-                                          <p:stCondLst>
-                                            <p:cond delay="0"/>
-                                          </p:stCondLst>
-                                        </p:cTn>
-                                        <p:tgtEl>
-                                          <p:spTgt spid="23"/>
-                                        </p:tgtEl>
-                                        <p:attrNameLst>
-                                          <p:attrName>style.visibility</p:attrName>
-                                        </p:attrNameLst>
-                                      </p:cBhvr>
-                                      <p:to>
-                                        <p:strVal val="visible"/>
-                                      </p:to>
-                                    </p:set>
-                                  </p:childTnLst>
-                                </p:cTn>
-                              </p:par>
-                            </p:childTnLst>
-                          </p:cTn>
-                        </p:par>
-                      </p:childTnLst>
-                    </p:cTn>
-                  </p:par>
-                  <p:par>
-                    <p:cTn id="51" fill="hold">
-                      <p:stCondLst>
-                        <p:cond delay="indefinite"/>
-                      </p:stCondLst>
-                      <p:childTnLst>
-                        <p:par>
-                          <p:cTn id="52" fill="hold">
-                            <p:stCondLst>
-                              <p:cond delay="0"/>
-                            </p:stCondLst>
-                            <p:childTnLst>
-                              <p:par>
-                                <p:cTn id="53" presetID="1" presetClass="mediacall" presetSubtype="0" fill="hold" nodeType="clickEffect">
-                                  <p:stCondLst>
-                                    <p:cond delay="0"/>
-                                  </p:stCondLst>
-                                  <p:childTnLst>
-                                    <p:cmd type="call" cmd="playFrom(0.0)">
-                                      <p:cBhvr>
-                                        <p:cTn id="54" dur="2699" fill="hold"/>
-                                        <p:tgtEl>
-                                          <p:spTgt spid="27"/>
-                                        </p:tgtEl>
-                                      </p:cBhvr>
-                                    </p:cmd>
-                                  </p:childTnLst>
-                                </p:cTn>
-                              </p:par>
-                              <p:par>
-                                <p:cTn id="55" presetID="1" presetClass="entr" presetSubtype="0" fill="hold" grpId="0" nodeType="withEffect">
-                                  <p:stCondLst>
-                                    <p:cond delay="0"/>
-                                  </p:stCondLst>
-                                  <p:childTnLst>
-                                    <p:set>
-                                      <p:cBhvr>
-                                        <p:cTn id="56" dur="1" fill="hold">
-                                          <p:stCondLst>
-                                            <p:cond delay="0"/>
-                                          </p:stCondLst>
-                                        </p:cTn>
-                                        <p:tgtEl>
-                                          <p:spTgt spid="24"/>
-                                        </p:tgtEl>
-                                        <p:attrNameLst>
-                                          <p:attrName>style.visibility</p:attrName>
-                                        </p:attrNameLst>
-                                      </p:cBhvr>
-                                      <p:to>
-                                        <p:strVal val="visible"/>
-                                      </p:to>
-                                    </p:set>
-                                  </p:childTnLst>
-                                </p:cTn>
-                              </p:par>
-                              <p:par>
-                                <p:cTn id="57" presetID="26" presetClass="emph" presetSubtype="0" repeatCount="5000" fill="hold" grpId="1" nodeType="withEffect">
-                                  <p:stCondLst>
-                                    <p:cond delay="0"/>
-                                  </p:stCondLst>
-                                  <p:childTnLst>
-                                    <p:animEffect transition="out" filter="fade">
-                                      <p:cBhvr>
-                                        <p:cTn id="58" dur="500" tmFilter="0, 0; .2, .5; .8, .5; 1, 0"/>
-                                        <p:tgtEl>
-                                          <p:spTgt spid="24"/>
-                                        </p:tgtEl>
-                                      </p:cBhvr>
-                                    </p:animEffect>
-                                    <p:animScale>
-                                      <p:cBhvr>
-                                        <p:cTn id="59" dur="250" autoRev="1" fill="hold"/>
-                                        <p:tgtEl>
-                                          <p:spTgt spid="24"/>
-                                        </p:tgtEl>
-                                      </p:cBhvr>
-                                      <p:by x="105000" y="105000"/>
-                                    </p:animScale>
-                                  </p:childTnLst>
-                                </p:cTn>
-                              </p:par>
-                              <p:par>
-                                <p:cTn id="60" presetID="1" presetClass="entr" presetSubtype="0" fill="hold" grpId="0" nodeType="withEffect">
-                                  <p:stCondLst>
-                                    <p:cond delay="0"/>
-                                  </p:stCondLst>
-                                  <p:childTnLst>
-                                    <p:set>
-                                      <p:cBhvr>
-                                        <p:cTn id="61" dur="1" fill="hold">
-                                          <p:stCondLst>
-                                            <p:cond delay="0"/>
-                                          </p:stCondLst>
-                                        </p:cTn>
-                                        <p:tgtEl>
-                                          <p:spTgt spid="25"/>
-                                        </p:tgtEl>
-                                        <p:attrNameLst>
-                                          <p:attrName>style.visibility</p:attrName>
-                                        </p:attrNameLst>
-                                      </p:cBhvr>
-                                      <p:to>
-                                        <p:strVal val="visible"/>
-                                      </p:to>
-                                    </p:set>
-                                  </p:childTnLst>
-                                </p:cTn>
-                              </p:par>
-                            </p:childTnLst>
-                          </p:cTn>
-                        </p:par>
-                      </p:childTnLst>
-                    </p:cTn>
-                  </p:par>
-                </p:childTnLst>
-              </p:cTn>
-              <p:prevCondLst>
-                <p:cond evt="onPrev" delay="0">
-                  <p:tgtEl>
-                    <p:sldTgt/>
-                  </p:tgtEl>
-                </p:cond>
-              </p:prevCondLst>
-              <p:nextCondLst>
-                <p:cond evt="onNext" delay="0">
-                  <p:tgtEl>
-                    <p:sldTgt/>
-                  </p:tgtEl>
-                </p:cond>
-              </p:nextCondLst>
-            </p:seq>
-            <p:audio>
-              <p:cMediaNode vol="80000">
-                <p:cTn id="62" fill="hold" display="0">
-                  <p:stCondLst>
-                    <p:cond delay="indefinite"/>
-                  </p:stCondLst>
-                  <p:endCondLst>
-                    <p:cond evt="onStopAudio" delay="0">
-                      <p:tgtEl>
-                        <p:sldTgt/>
-                      </p:tgtEl>
-                    </p:cond>
-                  </p:endCondLst>
-                </p:cTn>
-                <p:tgtEl>
-                  <p:spTgt spid="26"/>
-                </p:tgtEl>
-              </p:cMediaNode>
-            </p:audio>
-            <p:audio>
-              <p:cMediaNode vol="80000">
-                <p:cTn id="63" fill="hold" display="0">
-                  <p:stCondLst>
-                    <p:cond delay="indefinite"/>
-                  </p:stCondLst>
-                  <p:endCondLst>
-                    <p:cond evt="onStopAudio" delay="0">
-                      <p:tgtEl>
-                        <p:sldTgt/>
-                      </p:tgtEl>
-                    </p:cond>
-                  </p:endCondLst>
-                </p:cTn>
-                <p:tgtEl>
-                  <p:spTgt spid="27"/>
-                </p:tgtEl>
-              </p:cMediaNode>
-            </p:audio>
-          </p:childTnLst>
-        </p:cTn>
-      </p:par>
-    </p:tnLst>
-  </p:timing>
-</p:sld>
-</file>
-
-<file path=ppt/slides/slide2.xml><?xml version="1.0" encoding="utf-8"?>
-<p:sld xmlns:a="http://schemas.openxmlformats.org/drawingml/2006/main" xmlns:p="http://schemas.openxmlformats.org/presentationml/2006/main" xmlns:r="http://schemas.openxmlformats.org/officeDocument/2006/relationships">
-  <p:cSld>
-    <p:spTree>
-      <p:nvGrpSpPr>
-        <p:cNvPr id="1" name=""/>
-        <p:cNvGrpSpPr/>
-        <p:nvPr/>
-      </p:nvGrpSpPr>
-      <p:grpSpPr/>
-      <p:pic>
-        <p:nvPicPr>
-          <p:cNvPr id="2" name="Picture 1" descr="bg_quiz.png"/>
-          <p:cNvPicPr>
-            <a:picLocks noChangeAspect="1"/>
-          </p:cNvPicPr>
-          <p:nvPr/>
-        </p:nvPicPr>
-        <p:blipFill>
-          <a:blip r:embed="rId2"/>
-          <a:stretch>
-            <a:fillRect/>
-          </a:stretch>
-        </p:blipFill>
-        <p:spPr>
-          <a:xfrm>
-            <a:off x="0" y="0"/>
-            <a:ext cx="12192000" cy="6858000"/>
-          </a:xfrm>
-          <a:prstGeom prst="rect">
-            <a:avLst/>
-          </a:prstGeom>
-        </p:spPr>
-      </p:pic>
-      <p:sp>
-        <p:nvSpPr>
-          <p:cNvPr id="3" name="Rounded Rectangle 2"/>
-          <p:cNvSpPr/>
-          <p:nvPr/>
-        </p:nvSpPr>
-        <p:spPr>
-          <a:xfrm>
-            <a:off x="620000" y="300000"/>
-            <a:ext cx="2500000" cy="820000"/>
-          </a:xfrm>
-          <a:prstGeom prst="roundRect">
-            <a:avLst>
-              <a:gd name="adj" fmla="val 50000"/>
-            </a:avLst>
-          </a:prstGeom>
-          <a:solidFill>
-            <a:srgbClr val="962C42"/>
-          </a:solidFill>
-          <a:ln w="38100">
-            <a:solidFill>
-              <a:srgbClr val="C9A227"/>
-            </a:solidFill>
-          </a:ln>
-          <a:effectLst/>
-        </p:spPr>
-        <p:style>
-          <a:lnRef idx="1">
-            <a:schemeClr val="accent1"/>
-          </a:lnRef>
-          <a:fillRef idx="3">
-            <a:schemeClr val="accent1"/>
-          </a:fillRef>
-          <a:effectRef idx="2">
-            <a:schemeClr val="accent1"/>
-          </a:effectRef>
-          <a:fontRef idx="minor">
-            <a:schemeClr val="lt1"/>
-          </a:fontRef>
-        </p:style>
-        <p:txBody>
-          <a:bodyPr rtlCol="0" anchor="ctr" wrap="square" tIns="45000" bIns="45000"/>
-          <a:lstStyle/>
-          <a:p>
-            <a:pPr algn="ctr">
-              <a:lnSpc>
-                <a:spcPct val="105000"/>
-              </a:lnSpc>
-            </a:pPr>
-            <a:r>
-              <a:rPr sz="2400" b="1">
-                <a:solidFill>
-                  <a:srgbClr val="FFFFFF"/>
-                </a:solidFill>
-                <a:latin typeface="Meiryo"/>
-              </a:rPr>
-              <a:t>ルール説明</a:t>
-            </a:r>
-          </a:p>
-        </p:txBody>
-      </p:sp>
-      <p:sp>
-        <p:nvSpPr>
-          <p:cNvPr id="4" name="TextBox 3"/>
-          <p:cNvSpPr txBox="1"/>
-          <p:nvPr/>
-        </p:nvSpPr>
-        <p:spPr>
-          <a:xfrm>
-            <a:off x="900000" y="1250000"/>
-            <a:ext cx="10392000" cy="1000000"/>
-          </a:xfrm>
-          <a:prstGeom prst="rect">
-            <a:avLst/>
-          </a:prstGeom>
-          <a:noFill/>
-        </p:spPr>
-        <p:txBody>
-          <a:bodyPr wrap="square" anchor="ctr" lIns="90000" rIns="90000" tIns="45000" bIns="45000">
-            <a:spAutoFit/>
-          </a:bodyPr>
-          <a:lstStyle/>
-          <a:p>
-            <a:pPr algn="ctr">
-              <a:lnSpc>
-                <a:spcPct val="118000"/>
-              </a:lnSpc>
-            </a:pPr>
-            <a:r>
-              <a:rPr sz="4000" b="1" lang="ja-JP" altLang="en-US">
-                <a:solidFill>
-                  <a:srgbClr val="962C42"/>
-                </a:solidFill>
-                <a:latin typeface="Meiryo"/>
-              </a:rPr>
-              <a:t>今日のクイズは ○×クイズ！</a:t>
-            </a:r>
-          </a:p>
-        </p:txBody>
-      </p:sp>
-      <p:sp>
-        <p:nvSpPr>
-          <p:cNvPr id="5" name="TextBox 4"/>
-          <p:cNvSpPr txBox="1"/>
-          <p:nvPr/>
-        </p:nvSpPr>
-        <p:spPr>
-          <a:xfrm>
-            <a:off x="1300000" y="2350000"/>
-            <a:ext cx="9600000" cy="3400000"/>
-          </a:xfrm>
-          <a:prstGeom prst="rect">
-            <a:avLst/>
-          </a:prstGeom>
-          <a:noFill/>
-        </p:spPr>
-        <p:txBody>
-          <a:bodyPr wrap="square" anchor="ctr" lIns="90000" rIns="90000" tIns="45000" bIns="45000">
-            <a:spAutoFit/>
-          </a:bodyPr>
-          <a:lstStyle/>
-          <a:p>
-            <a:pPr algn="l">
-              <a:lnSpc>
-                <a:spcPct val="118000"/>
-              </a:lnSpc>
-            </a:pPr>
-            <a:r>
-              <a:rPr sz="2500" b="0" lang="ja-JP" altLang="en-US">
-                <a:solidFill>
-                  <a:srgbClr val="3A2E2A"/>
-                </a:solidFill>
-                <a:latin typeface="Meiryo"/>
-              </a:rPr>
-              <a:t>・司会が読み上げる問題に、○か×かでお答えください</a:t>
-            </a:r>
-          </a:p>
-          <a:p>
-            <a:pPr algn="l">
-              <a:lnSpc>
-                <a:spcPct val="118000"/>
-              </a:lnSpc>
-            </a:pPr>
-            <a:r>
-              <a:rPr sz="2500" b="0" lang="ja-JP" altLang="en-US">
-                <a:solidFill>
-                  <a:srgbClr val="3A2E2A"/>
-                </a:solidFill>
-                <a:latin typeface="Meiryo"/>
-              </a:rPr>
-              <a:t>・正解だと思う方へ、会場を移動していただきます</a:t>
-            </a:r>
-          </a:p>
-          <a:p>
-            <a:pPr algn="l">
-              <a:lnSpc>
-                <a:spcPct val="118000"/>
-              </a:lnSpc>
-            </a:pPr>
-            <a:r>
-              <a:rPr sz="2500" b="0" lang="ja-JP" altLang="en-US">
-                <a:solidFill>
-                  <a:srgbClr val="3A2E2A"/>
-                </a:solidFill>
-                <a:latin typeface="Meiryo"/>
-              </a:rPr>
-              <a:t>・全14問！　最後まで勝ち残った方には…お楽しみが🎁</a:t>
-            </a:r>
-          </a:p>
-        </p:txBody>
-      </p:sp>
-    </p:spTree>
-  </p:cSld>
-  <p:clrMapOvr>
-    <a:masterClrMapping/>
-  </p:clrMapOvr>
-</p:sld>
-</file>
-
-<file path=ppt/slides/slide20.xml><?xml version="1.0" encoding="utf-8"?>
-<p:sld xmlns:a="http://schemas.openxmlformats.org/drawingml/2006/main" xmlns:p="http://schemas.openxmlformats.org/presentationml/2006/main" xmlns:r="http://schemas.openxmlformats.org/officeDocument/2006/relationships">
-  <p:cSld>
-    <p:spTree>
-      <p:nvGrpSpPr>
-        <p:cNvPr id="1" name=""/>
-        <p:cNvGrpSpPr/>
-        <p:nvPr/>
-      </p:nvGrpSpPr>
-      <p:grpSpPr/>
-      <p:pic>
-        <p:nvPicPr>
           <p:cNvPr id="2" name="Picture 1" descr="bg_section.png"/>
           <p:cNvPicPr>
             <a:picLocks noChangeAspect="1"/>
@@ -24785,7 +22623,7 @@
 </p:sld>
 </file>
 
-<file path=ppt/slides/slide21.xml><?xml version="1.0" encoding="utf-8"?>
+<file path=ppt/slides/slide2.xml><?xml version="1.0" encoding="utf-8"?>
 <p:sld xmlns:a="http://schemas.openxmlformats.org/drawingml/2006/main" xmlns:p="http://schemas.openxmlformats.org/presentationml/2006/main" xmlns:r="http://schemas.openxmlformats.org/officeDocument/2006/relationships">
   <p:cSld>
     <p:spTree>
@@ -24875,6 +22713,219 @@
                 </a:solidFill>
                 <a:latin typeface="Meiryo"/>
               </a:rPr>
+              <a:t>ルール説明</a:t>
+            </a:r>
+          </a:p>
+        </p:txBody>
+      </p:sp>
+      <p:sp>
+        <p:nvSpPr>
+          <p:cNvPr id="4" name="TextBox 3"/>
+          <p:cNvSpPr txBox="1"/>
+          <p:nvPr/>
+        </p:nvSpPr>
+        <p:spPr>
+          <a:xfrm>
+            <a:off x="900000" y="1250000"/>
+            <a:ext cx="10392000" cy="1000000"/>
+          </a:xfrm>
+          <a:prstGeom prst="rect">
+            <a:avLst/>
+          </a:prstGeom>
+          <a:noFill/>
+        </p:spPr>
+        <p:txBody>
+          <a:bodyPr wrap="square" anchor="ctr" lIns="90000" rIns="90000" tIns="45000" bIns="45000">
+            <a:spAutoFit/>
+          </a:bodyPr>
+          <a:lstStyle/>
+          <a:p>
+            <a:pPr algn="ctr">
+              <a:lnSpc>
+                <a:spcPct val="118000"/>
+              </a:lnSpc>
+            </a:pPr>
+            <a:r>
+              <a:rPr sz="4000" b="1" lang="ja-JP" altLang="en-US">
+                <a:solidFill>
+                  <a:srgbClr val="962C42"/>
+                </a:solidFill>
+                <a:latin typeface="Meiryo"/>
+              </a:rPr>
+              <a:t>今日のクイズは ○×クイズ！</a:t>
+            </a:r>
+          </a:p>
+        </p:txBody>
+      </p:sp>
+      <p:sp>
+        <p:nvSpPr>
+          <p:cNvPr id="5" name="TextBox 4"/>
+          <p:cNvSpPr txBox="1"/>
+          <p:nvPr/>
+        </p:nvSpPr>
+        <p:spPr>
+          <a:xfrm>
+            <a:off x="1300000" y="2350000"/>
+            <a:ext cx="9600000" cy="3400000"/>
+          </a:xfrm>
+          <a:prstGeom prst="rect">
+            <a:avLst/>
+          </a:prstGeom>
+          <a:noFill/>
+        </p:spPr>
+        <p:txBody>
+          <a:bodyPr wrap="square" anchor="ctr" lIns="90000" rIns="90000" tIns="45000" bIns="45000">
+            <a:spAutoFit/>
+          </a:bodyPr>
+          <a:lstStyle/>
+          <a:p>
+            <a:pPr algn="l">
+              <a:lnSpc>
+                <a:spcPct val="118000"/>
+              </a:lnSpc>
+            </a:pPr>
+            <a:r>
+              <a:rPr sz="2500" b="0" lang="ja-JP" altLang="en-US">
+                <a:solidFill>
+                  <a:srgbClr val="3A2E2A"/>
+                </a:solidFill>
+                <a:latin typeface="Meiryo"/>
+              </a:rPr>
+              <a:t>・司会が読み上げる問題に、○か×かでお答えください</a:t>
+            </a:r>
+          </a:p>
+          <a:p>
+            <a:pPr algn="l">
+              <a:lnSpc>
+                <a:spcPct val="118000"/>
+              </a:lnSpc>
+            </a:pPr>
+            <a:r>
+              <a:rPr sz="2500" b="0" lang="ja-JP" altLang="en-US">
+                <a:solidFill>
+                  <a:srgbClr val="3A2E2A"/>
+                </a:solidFill>
+                <a:latin typeface="Meiryo"/>
+              </a:rPr>
+              <a:t>・正解だと思う方へ、会場を移動していただきます</a:t>
+            </a:r>
+          </a:p>
+          <a:p>
+            <a:pPr algn="l">
+              <a:lnSpc>
+                <a:spcPct val="118000"/>
+              </a:lnSpc>
+            </a:pPr>
+            <a:r>
+              <a:rPr sz="2500" b="0" lang="ja-JP" altLang="en-US">
+                <a:solidFill>
+                  <a:srgbClr val="3A2E2A"/>
+                </a:solidFill>
+                <a:latin typeface="Meiryo"/>
+              </a:rPr>
+              <a:t>・全13問！　最後まで勝ち残った方は…？</a:t>
+            </a:r>
+          </a:p>
+        </p:txBody>
+      </p:sp>
+    </p:spTree>
+  </p:cSld>
+  <p:clrMapOvr>
+    <a:masterClrMapping/>
+  </p:clrMapOvr>
+</p:sld>
+</file>
+
+<file path=ppt/slides/slide20.xml><?xml version="1.0" encoding="utf-8"?>
+<p:sld xmlns:a="http://schemas.openxmlformats.org/drawingml/2006/main" xmlns:p="http://schemas.openxmlformats.org/presentationml/2006/main" xmlns:r="http://schemas.openxmlformats.org/officeDocument/2006/relationships">
+  <p:cSld>
+    <p:spTree>
+      <p:nvGrpSpPr>
+        <p:cNvPr id="1" name=""/>
+        <p:cNvGrpSpPr/>
+        <p:nvPr/>
+      </p:nvGrpSpPr>
+      <p:grpSpPr/>
+      <p:pic>
+        <p:nvPicPr>
+          <p:cNvPr id="2" name="Picture 1" descr="bg_quiz.png"/>
+          <p:cNvPicPr>
+            <a:picLocks noChangeAspect="1"/>
+          </p:cNvPicPr>
+          <p:nvPr/>
+        </p:nvPicPr>
+        <p:blipFill>
+          <a:blip r:embed="rId2"/>
+          <a:stretch>
+            <a:fillRect/>
+          </a:stretch>
+        </p:blipFill>
+        <p:spPr>
+          <a:xfrm>
+            <a:off x="0" y="0"/>
+            <a:ext cx="12192000" cy="6858000"/>
+          </a:xfrm>
+          <a:prstGeom prst="rect">
+            <a:avLst/>
+          </a:prstGeom>
+        </p:spPr>
+      </p:pic>
+      <p:sp>
+        <p:nvSpPr>
+          <p:cNvPr id="3" name="Rounded Rectangle 2"/>
+          <p:cNvSpPr/>
+          <p:nvPr/>
+        </p:nvSpPr>
+        <p:spPr>
+          <a:xfrm>
+            <a:off x="620000" y="300000"/>
+            <a:ext cx="2500000" cy="820000"/>
+          </a:xfrm>
+          <a:prstGeom prst="roundRect">
+            <a:avLst>
+              <a:gd name="adj" fmla="val 50000"/>
+            </a:avLst>
+          </a:prstGeom>
+          <a:solidFill>
+            <a:srgbClr val="962C42"/>
+          </a:solidFill>
+          <a:ln w="38100">
+            <a:solidFill>
+              <a:srgbClr val="C9A227"/>
+            </a:solidFill>
+          </a:ln>
+          <a:effectLst/>
+        </p:spPr>
+        <p:style>
+          <a:lnRef idx="1">
+            <a:schemeClr val="accent1"/>
+          </a:lnRef>
+          <a:fillRef idx="3">
+            <a:schemeClr val="accent1"/>
+          </a:fillRef>
+          <a:effectRef idx="2">
+            <a:schemeClr val="accent1"/>
+          </a:effectRef>
+          <a:fontRef idx="minor">
+            <a:schemeClr val="lt1"/>
+          </a:fontRef>
+        </p:style>
+        <p:txBody>
+          <a:bodyPr rtlCol="0" anchor="ctr" wrap="square" tIns="45000" bIns="45000"/>
+          <a:lstStyle/>
+          <a:p>
+            <a:pPr algn="ctr">
+              <a:lnSpc>
+                <a:spcPct val="105000"/>
+              </a:lnSpc>
+            </a:pPr>
+            <a:r>
+              <a:rPr sz="2400" b="1">
+                <a:solidFill>
+                  <a:srgbClr val="FFFFFF"/>
+                </a:solidFill>
+                <a:latin typeface="Meiryo"/>
+              </a:rPr>
               <a:t>結果発表</a:t>
             </a:r>
           </a:p>
@@ -24966,6 +23017,285 @@
   <p:transition spd="med">
     <p:fade/>
   </p:transition>
+</p:sld>
+</file>
+
+<file path=ppt/slides/slide21.xml><?xml version="1.0" encoding="utf-8"?>
+<p:sld xmlns:a="http://schemas.openxmlformats.org/drawingml/2006/main" xmlns:p="http://schemas.openxmlformats.org/presentationml/2006/main" xmlns:r="http://schemas.openxmlformats.org/officeDocument/2006/relationships">
+  <p:cSld>
+    <p:spTree>
+      <p:nvGrpSpPr>
+        <p:cNvPr id="1" name=""/>
+        <p:cNvGrpSpPr/>
+        <p:nvPr/>
+      </p:nvGrpSpPr>
+      <p:grpSpPr/>
+      <p:pic>
+        <p:nvPicPr>
+          <p:cNvPr id="2" name="Picture 1" descr="bg_title.png"/>
+          <p:cNvPicPr>
+            <a:picLocks noChangeAspect="1"/>
+          </p:cNvPicPr>
+          <p:nvPr/>
+        </p:nvPicPr>
+        <p:blipFill>
+          <a:blip r:embed="rId2"/>
+          <a:stretch>
+            <a:fillRect/>
+          </a:stretch>
+        </p:blipFill>
+        <p:spPr>
+          <a:xfrm>
+            <a:off x="0" y="0"/>
+            <a:ext cx="12192000" cy="6858000"/>
+          </a:xfrm>
+          <a:prstGeom prst="rect">
+            <a:avLst/>
+          </a:prstGeom>
+        </p:spPr>
+      </p:pic>
+      <p:sp>
+        <p:nvSpPr>
+          <p:cNvPr id="3" name="TextBox 2"/>
+          <p:cNvSpPr txBox="1"/>
+          <p:nvPr/>
+        </p:nvSpPr>
+        <p:spPr>
+          <a:xfrm>
+            <a:off x="900000" y="1250000"/>
+            <a:ext cx="10392000" cy="800000"/>
+          </a:xfrm>
+          <a:prstGeom prst="rect">
+            <a:avLst/>
+          </a:prstGeom>
+          <a:noFill/>
+        </p:spPr>
+        <p:txBody>
+          <a:bodyPr wrap="square" anchor="ctr" lIns="90000" rIns="90000" tIns="45000" bIns="45000">
+            <a:spAutoFit/>
+          </a:bodyPr>
+          <a:lstStyle/>
+          <a:p>
+            <a:pPr algn="ctr">
+              <a:lnSpc>
+                <a:spcPct val="118000"/>
+              </a:lnSpc>
+            </a:pPr>
+            <a:r>
+              <a:rPr sz="2400" b="1" lang="ja-JP" altLang="en-US">
+                <a:solidFill>
+                  <a:srgbClr val="C9A227"/>
+                </a:solidFill>
+                <a:latin typeface="Meiryo"/>
+              </a:rPr>
+              <a:t>CEREMONY</a:t>
+            </a:r>
+          </a:p>
+        </p:txBody>
+      </p:sp>
+      <p:sp>
+        <p:nvSpPr>
+          <p:cNvPr id="4" name="TextBox 3"/>
+          <p:cNvSpPr txBox="1"/>
+          <p:nvPr/>
+        </p:nvSpPr>
+        <p:spPr>
+          <a:xfrm>
+            <a:off x="900000" y="2050000"/>
+            <a:ext cx="10392000" cy="1500000"/>
+          </a:xfrm>
+          <a:prstGeom prst="rect">
+            <a:avLst/>
+          </a:prstGeom>
+          <a:noFill/>
+        </p:spPr>
+        <p:txBody>
+          <a:bodyPr wrap="square" anchor="ctr" lIns="90000" rIns="90000" tIns="45000" bIns="45000">
+            <a:spAutoFit/>
+          </a:bodyPr>
+          <a:lstStyle/>
+          <a:p>
+            <a:pPr algn="ctr">
+              <a:lnSpc>
+                <a:spcPct val="118000"/>
+              </a:lnSpc>
+            </a:pPr>
+            <a:r>
+              <a:rPr sz="6600" b="1" lang="ja-JP" altLang="en-US">
+                <a:solidFill>
+                  <a:srgbClr val="962C42"/>
+                </a:solidFill>
+                <a:latin typeface="Meiryo"/>
+              </a:rPr>
+              <a:t>中村になろうよ</a:t>
+            </a:r>
+          </a:p>
+        </p:txBody>
+      </p:sp>
+      <p:sp>
+        <p:nvSpPr>
+          <p:cNvPr id="5" name="TextBox 4"/>
+          <p:cNvSpPr txBox="1"/>
+          <p:nvPr/>
+        </p:nvSpPr>
+        <p:spPr>
+          <a:xfrm>
+            <a:off x="900000" y="4050000"/>
+            <a:ext cx="10392000" cy="1100000"/>
+          </a:xfrm>
+          <a:prstGeom prst="rect">
+            <a:avLst/>
+          </a:prstGeom>
+          <a:noFill/>
+        </p:spPr>
+        <p:txBody>
+          <a:bodyPr wrap="square" anchor="ctr" lIns="90000" rIns="90000" tIns="45000" bIns="45000">
+            <a:spAutoFit/>
+          </a:bodyPr>
+          <a:lstStyle/>
+          <a:p>
+            <a:pPr algn="ctr">
+              <a:lnSpc>
+                <a:spcPct val="118000"/>
+              </a:lnSpc>
+            </a:pPr>
+            <a:r>
+              <a:rPr sz="2600" b="1" lang="ja-JP" altLang="en-US">
+                <a:solidFill>
+                  <a:srgbClr val="3A2E2A"/>
+                </a:solidFill>
+                <a:latin typeface="Meiryo"/>
+              </a:rPr>
+              <a:t>{{この時間の演出・ひとこと}}</a:t>
+            </a:r>
+          </a:p>
+        </p:txBody>
+      </p:sp>
+      <p:pic>
+        <p:nvPicPr>
+          <p:cNvPr id="6" name="中村になろうよ BGM">
+            <a:hlinkClick r:id="" action="ppaction://media"/>
+          </p:cNvPr>
+          <p:cNvPicPr>
+            <a:picLocks noChangeAspect="1"/>
+          </p:cNvPicPr>
+          <p:nvPr>
+            <a:audioFile r:link="rId4"/>
+            <p:extLst>
+              <p:ext uri="{DAA4B4D4-6D71-4841-9C94-3DE7FCFB9230}">
+                <p14:media xmlns:p14="http://schemas.microsoft.com/office/powerpoint/2010/main" r:embed="rId3"/>
+              </p:ext>
+            </p:extLst>
+          </p:nvPr>
+        </p:nvPicPr>
+        <p:blipFill>
+          <a:blip r:embed="rId5"/>
+          <a:stretch>
+            <a:fillRect/>
+          </a:stretch>
+        </p:blipFill>
+        <p:spPr>
+          <a:xfrm>
+            <a:off x="-900000" y="200000"/>
+            <a:ext cx="406400" cy="406400"/>
+          </a:xfrm>
+          <a:prstGeom prst="rect">
+            <a:avLst/>
+          </a:prstGeom>
+        </p:spPr>
+      </p:pic>
+    </p:spTree>
+  </p:cSld>
+  <p:clrMapOvr>
+    <a:masterClrMapping/>
+  </p:clrMapOvr>
+  <p:transition spd="med">
+    <p:fade/>
+  </p:transition>
+  <p:timing>
+    <p:tnLst>
+      <p:par>
+        <p:cTn id="1" dur="indefinite" restart="never" nodeType="tmRoot">
+          <p:childTnLst>
+            <p:seq concurrent="1" nextAc="seek">
+              <p:cTn id="2" dur="indefinite" nodeType="mainSeq">
+                <p:childTnLst>
+                  <p:par>
+                    <p:cTn id="3" fill="hold">
+                      <p:stCondLst>
+                        <p:cond delay="0"/>
+                      </p:stCondLst>
+                      <p:childTnLst>
+                        <p:par>
+                          <p:cTn id="4" fill="hold">
+                            <p:stCondLst>
+                              <p:cond delay="0"/>
+                            </p:stCondLst>
+                            <p:childTnLst>
+                              <p:par>
+                                <p:cTn id="5" presetID="1" presetClass="mediacall" presetSubtype="0" fill="hold" nodeType="clickEffect">
+                                  <p:stCondLst>
+                                    <p:cond delay="0"/>
+                                  </p:stCondLst>
+                                  <p:childTnLst>
+                                    <p:cmd type="call" cmd="playFrom(0.0)">
+                                      <p:cBhvr>
+                                        <p:cTn id="6" dur="7975" fill="hold"/>
+                                        <p:tgtEl>
+                                          <p:spTgt spid="6"/>
+                                        </p:tgtEl>
+                                      </p:cBhvr>
+                                    </p:cmd>
+                                  </p:childTnLst>
+                                </p:cTn>
+                              </p:par>
+                            </p:childTnLst>
+                          </p:cTn>
+                        </p:par>
+                      </p:childTnLst>
+                    </p:cTn>
+                  </p:par>
+                </p:childTnLst>
+              </p:cTn>
+              <p:prevCondLst>
+                <p:cond evt="onPrev" delay="0">
+                  <p:tgtEl>
+                    <p:sldTgt/>
+                  </p:tgtEl>
+                </p:cond>
+              </p:prevCondLst>
+              <p:nextCondLst>
+                <p:cond evt="onNext" delay="0">
+                  <p:tgtEl>
+                    <p:sldTgt/>
+                  </p:tgtEl>
+                </p:cond>
+              </p:nextCondLst>
+            </p:seq>
+            <p:audio>
+              <p:cMediaNode vol="80000">
+                <p:cTn id="7" fill="hold" display="0">
+                  <p:stCondLst>
+                    <p:cond delay="indefinite"/>
+                  </p:stCondLst>
+                  <p:endCondLst>
+                    <p:cond evt="onStopAudio" delay="0">
+                      <p:tgtEl>
+                        <p:sldTgt/>
+                      </p:tgtEl>
+                    </p:cond>
+                  </p:endCondLst>
+                </p:cTn>
+                <p:tgtEl>
+                  <p:spTgt spid="6"/>
+                </p:tgtEl>
+              </p:cMediaNode>
+            </p:audio>
+          </p:childTnLst>
+        </p:cTn>
+      </p:par>
+    </p:tnLst>
+  </p:timing>
 </p:sld>
 </file>
 
@@ -25428,22 +23758,6 @@
               <a:t>・そろったら「ビンゴ！」と大きな声でお知らせください🎉</a:t>
             </a:r>
           </a:p>
-          <a:p>
-            <a:pPr algn="l">
-              <a:lnSpc>
-                <a:spcPct val="118000"/>
-              </a:lnSpc>
-            </a:pPr>
-            <a:r>
-              <a:rPr sz="2500" b="0" lang="ja-JP" altLang="en-US">
-                <a:solidFill>
-                  <a:srgbClr val="3A2E2A"/>
-                </a:solidFill>
-                <a:latin typeface="Meiryo"/>
-              </a:rPr>
-              <a:t>・係の者がお席まで景品をお持ちします</a:t>
-            </a:r>
-          </a:p>
         </p:txBody>
       </p:sp>
       <p:pic>
@@ -26521,721 +24835,6 @@
       <p:grpSpPr/>
       <p:pic>
         <p:nvPicPr>
-          <p:cNvPr id="2" name="Picture 1" descr="bg_bingo.png"/>
-          <p:cNvPicPr>
-            <a:picLocks noChangeAspect="1"/>
-          </p:cNvPicPr>
-          <p:nvPr/>
-        </p:nvPicPr>
-        <p:blipFill>
-          <a:blip r:embed="rId2"/>
-          <a:stretch>
-            <a:fillRect/>
-          </a:stretch>
-        </p:blipFill>
-        <p:spPr>
-          <a:xfrm>
-            <a:off x="0" y="0"/>
-            <a:ext cx="12192000" cy="6858000"/>
-          </a:xfrm>
-          <a:prstGeom prst="rect">
-            <a:avLst/>
-          </a:prstGeom>
-        </p:spPr>
-      </p:pic>
-      <p:sp>
-        <p:nvSpPr>
-          <p:cNvPr id="3" name="Rounded Rectangle 2"/>
-          <p:cNvSpPr/>
-          <p:nvPr/>
-        </p:nvSpPr>
-        <p:spPr>
-          <a:xfrm>
-            <a:off x="620000" y="300000"/>
-            <a:ext cx="2500000" cy="820000"/>
-          </a:xfrm>
-          <a:prstGeom prst="roundRect">
-            <a:avLst>
-              <a:gd name="adj" fmla="val 50000"/>
-            </a:avLst>
-          </a:prstGeom>
-          <a:solidFill>
-            <a:srgbClr val="962C42"/>
-          </a:solidFill>
-          <a:ln w="38100">
-            <a:solidFill>
-              <a:srgbClr val="C9A227"/>
-            </a:solidFill>
-          </a:ln>
-          <a:effectLst/>
-        </p:spPr>
-        <p:style>
-          <a:lnRef idx="1">
-            <a:schemeClr val="accent1"/>
-          </a:lnRef>
-          <a:fillRef idx="3">
-            <a:schemeClr val="accent1"/>
-          </a:fillRef>
-          <a:effectRef idx="2">
-            <a:schemeClr val="accent1"/>
-          </a:effectRef>
-          <a:fontRef idx="minor">
-            <a:schemeClr val="lt1"/>
-          </a:fontRef>
-        </p:style>
-        <p:txBody>
-          <a:bodyPr rtlCol="0" anchor="ctr" wrap="square" tIns="45000" bIns="45000"/>
-          <a:lstStyle/>
-          <a:p>
-            <a:pPr algn="ctr">
-              <a:lnSpc>
-                <a:spcPct val="105000"/>
-              </a:lnSpc>
-            </a:pPr>
-            <a:r>
-              <a:rPr sz="2400" b="1">
-                <a:solidFill>
-                  <a:srgbClr val="FFFFFF"/>
-                </a:solidFill>
-                <a:latin typeface="Meiryo"/>
-              </a:rPr>
-              <a:t>ビンゴ大会</a:t>
-            </a:r>
-          </a:p>
-        </p:txBody>
-      </p:sp>
-      <p:sp>
-        <p:nvSpPr>
-          <p:cNvPr id="4" name="TextBox 3"/>
-          <p:cNvSpPr txBox="1"/>
-          <p:nvPr/>
-        </p:nvSpPr>
-        <p:spPr>
-          <a:xfrm>
-            <a:off x="900000" y="1250000"/>
-            <a:ext cx="10392000" cy="1000000"/>
-          </a:xfrm>
-          <a:prstGeom prst="rect">
-            <a:avLst/>
-          </a:prstGeom>
-          <a:noFill/>
-        </p:spPr>
-        <p:txBody>
-          <a:bodyPr wrap="square" anchor="ctr" lIns="90000" rIns="90000" tIns="45000" bIns="45000">
-            <a:spAutoFit/>
-          </a:bodyPr>
-          <a:lstStyle/>
-          <a:p>
-            <a:pPr algn="ctr">
-              <a:lnSpc>
-                <a:spcPct val="118000"/>
-              </a:lnSpc>
-            </a:pPr>
-            <a:r>
-              <a:rPr sz="4000" b="1" lang="ja-JP" altLang="en-US">
-                <a:solidFill>
-                  <a:srgbClr val="962C42"/>
-                </a:solidFill>
-                <a:latin typeface="Meiryo"/>
-              </a:rPr>
-              <a:t>景品発表</a:t>
-            </a:r>
-          </a:p>
-        </p:txBody>
-      </p:sp>
-      <p:sp>
-        <p:nvSpPr>
-          <p:cNvPr id="5" name="TextBox 4"/>
-          <p:cNvSpPr txBox="1"/>
-          <p:nvPr/>
-        </p:nvSpPr>
-        <p:spPr>
-          <a:xfrm>
-            <a:off x="1300000" y="2350000"/>
-            <a:ext cx="9600000" cy="3400000"/>
-          </a:xfrm>
-          <a:prstGeom prst="rect">
-            <a:avLst/>
-          </a:prstGeom>
-          <a:noFill/>
-        </p:spPr>
-        <p:txBody>
-          <a:bodyPr wrap="square" anchor="ctr" lIns="90000" rIns="90000" tIns="45000" bIns="45000">
-            <a:spAutoFit/>
-          </a:bodyPr>
-          <a:lstStyle/>
-          <a:p>
-            <a:pPr algn="l">
-              <a:lnSpc>
-                <a:spcPct val="118000"/>
-              </a:lnSpc>
-            </a:pPr>
-            <a:r>
-              <a:rPr sz="2500" b="0" lang="ja-JP" altLang="en-US">
-                <a:solidFill>
-                  <a:srgbClr val="3A2E2A"/>
-                </a:solidFill>
-                <a:latin typeface="Meiryo"/>
-              </a:rPr>
-              <a:t>・1等　{{景品1}}</a:t>
-            </a:r>
-          </a:p>
-          <a:p>
-            <a:pPr algn="l">
-              <a:lnSpc>
-                <a:spcPct val="118000"/>
-              </a:lnSpc>
-            </a:pPr>
-            <a:r>
-              <a:rPr sz="2500" b="0" lang="ja-JP" altLang="en-US">
-                <a:solidFill>
-                  <a:srgbClr val="3A2E2A"/>
-                </a:solidFill>
-                <a:latin typeface="Meiryo"/>
-              </a:rPr>
-              <a:t>・2等　{{景品2}}</a:t>
-            </a:r>
-          </a:p>
-          <a:p>
-            <a:pPr algn="l">
-              <a:lnSpc>
-                <a:spcPct val="118000"/>
-              </a:lnSpc>
-            </a:pPr>
-            <a:r>
-              <a:rPr sz="2500" b="0" lang="ja-JP" altLang="en-US">
-                <a:solidFill>
-                  <a:srgbClr val="3A2E2A"/>
-                </a:solidFill>
-                <a:latin typeface="Meiryo"/>
-              </a:rPr>
-              <a:t>・3等　{{景品3}}</a:t>
-            </a:r>
-          </a:p>
-          <a:p>
-            <a:pPr algn="l">
-              <a:lnSpc>
-                <a:spcPct val="118000"/>
-              </a:lnSpc>
-            </a:pPr>
-            <a:r>
-              <a:rPr sz="2500" b="0" lang="ja-JP" altLang="en-US">
-                <a:solidFill>
-                  <a:srgbClr val="3A2E2A"/>
-                </a:solidFill>
-                <a:latin typeface="Meiryo"/>
-              </a:rPr>
-              <a:t>・参加賞　{{参加賞}}</a:t>
-            </a:r>
-          </a:p>
-        </p:txBody>
-      </p:sp>
-      <p:pic>
-        <p:nvPicPr>
-          <p:cNvPr id="6" name="ファンファーレ">
-            <a:hlinkClick r:id="" action="ppaction://media"/>
-          </p:cNvPr>
-          <p:cNvPicPr>
-            <a:picLocks noChangeAspect="1"/>
-          </p:cNvPicPr>
-          <p:nvPr>
-            <a:audioFile r:link="rId4"/>
-            <p:extLst>
-              <p:ext uri="{DAA4B4D4-6D71-4841-9C94-3DE7FCFB9230}">
-                <p14:media xmlns:p14="http://schemas.microsoft.com/office/powerpoint/2010/main" r:embed="rId3"/>
-              </p:ext>
-            </p:extLst>
-          </p:nvPr>
-        </p:nvPicPr>
-        <p:blipFill>
-          <a:blip r:embed="rId5"/>
-          <a:stretch>
-            <a:fillRect/>
-          </a:stretch>
-        </p:blipFill>
-        <p:spPr>
-          <a:xfrm>
-            <a:off x="-900000" y="200000"/>
-            <a:ext cx="406400" cy="406400"/>
-          </a:xfrm>
-          <a:prstGeom prst="rect">
-            <a:avLst/>
-          </a:prstGeom>
-        </p:spPr>
-      </p:pic>
-    </p:spTree>
-  </p:cSld>
-  <p:clrMapOvr>
-    <a:masterClrMapping/>
-  </p:clrMapOvr>
-  <p:transition spd="med">
-    <p:push dir="u"/>
-  </p:transition>
-  <p:timing>
-    <p:tnLst>
-      <p:par>
-        <p:cTn id="1" dur="indefinite" restart="never" nodeType="tmRoot">
-          <p:childTnLst>
-            <p:seq concurrent="1" nextAc="seek">
-              <p:cTn id="2" dur="indefinite" nodeType="mainSeq">
-                <p:childTnLst>
-                  <p:par>
-                    <p:cTn id="3" fill="hold">
-                      <p:stCondLst>
-                        <p:cond delay="0"/>
-                      </p:stCondLst>
-                      <p:childTnLst>
-                        <p:par>
-                          <p:cTn id="4" fill="hold">
-                            <p:stCondLst>
-                              <p:cond delay="0"/>
-                            </p:stCondLst>
-                            <p:childTnLst>
-                              <p:par>
-                                <p:cTn id="5" presetID="1" presetClass="mediacall" presetSubtype="0" fill="hold" nodeType="clickEffect">
-                                  <p:stCondLst>
-                                    <p:cond delay="0"/>
-                                  </p:stCondLst>
-                                  <p:childTnLst>
-                                    <p:cmd type="call" cmd="playFrom(0.0)">
-                                      <p:cBhvr>
-                                        <p:cTn id="6" dur="2699" fill="hold"/>
-                                        <p:tgtEl>
-                                          <p:spTgt spid="6"/>
-                                        </p:tgtEl>
-                                      </p:cBhvr>
-                                    </p:cmd>
-                                  </p:childTnLst>
-                                </p:cTn>
-                              </p:par>
-                            </p:childTnLst>
-                          </p:cTn>
-                        </p:par>
-                      </p:childTnLst>
-                    </p:cTn>
-                  </p:par>
-                </p:childTnLst>
-              </p:cTn>
-              <p:prevCondLst>
-                <p:cond evt="onPrev" delay="0">
-                  <p:tgtEl>
-                    <p:sldTgt/>
-                  </p:tgtEl>
-                </p:cond>
-              </p:prevCondLst>
-              <p:nextCondLst>
-                <p:cond evt="onNext" delay="0">
-                  <p:tgtEl>
-                    <p:sldTgt/>
-                  </p:tgtEl>
-                </p:cond>
-              </p:nextCondLst>
-            </p:seq>
-            <p:audio>
-              <p:cMediaNode vol="80000">
-                <p:cTn id="7" fill="hold" display="0">
-                  <p:stCondLst>
-                    <p:cond delay="indefinite"/>
-                  </p:stCondLst>
-                  <p:endCondLst>
-                    <p:cond evt="onStopAudio" delay="0">
-                      <p:tgtEl>
-                        <p:sldTgt/>
-                      </p:tgtEl>
-                    </p:cond>
-                  </p:endCondLst>
-                </p:cTn>
-                <p:tgtEl>
-                  <p:spTgt spid="6"/>
-                </p:tgtEl>
-              </p:cMediaNode>
-            </p:audio>
-          </p:childTnLst>
-        </p:cTn>
-      </p:par>
-    </p:tnLst>
-  </p:timing>
-</p:sld>
-</file>
-
-<file path=ppt/slides/slide28.xml><?xml version="1.0" encoding="utf-8"?>
-<p:sld xmlns:a="http://schemas.openxmlformats.org/drawingml/2006/main" xmlns:p="http://schemas.openxmlformats.org/presentationml/2006/main" xmlns:r="http://schemas.openxmlformats.org/officeDocument/2006/relationships">
-  <p:cSld>
-    <p:spTree>
-      <p:nvGrpSpPr>
-        <p:cNvPr id="1" name=""/>
-        <p:cNvGrpSpPr/>
-        <p:nvPr/>
-      </p:nvGrpSpPr>
-      <p:grpSpPr/>
-      <p:pic>
-        <p:nvPicPr>
-          <p:cNvPr id="2" name="Picture 1" descr="bg_title.png"/>
-          <p:cNvPicPr>
-            <a:picLocks noChangeAspect="1"/>
-          </p:cNvPicPr>
-          <p:nvPr/>
-        </p:nvPicPr>
-        <p:blipFill>
-          <a:blip r:embed="rId2"/>
-          <a:stretch>
-            <a:fillRect/>
-          </a:stretch>
-        </p:blipFill>
-        <p:spPr>
-          <a:xfrm>
-            <a:off x="0" y="0"/>
-            <a:ext cx="12192000" cy="6858000"/>
-          </a:xfrm>
-          <a:prstGeom prst="rect">
-            <a:avLst/>
-          </a:prstGeom>
-        </p:spPr>
-      </p:pic>
-      <p:sp>
-        <p:nvSpPr>
-          <p:cNvPr id="3" name="TextBox 2"/>
-          <p:cNvSpPr txBox="1"/>
-          <p:nvPr/>
-        </p:nvSpPr>
-        <p:spPr>
-          <a:xfrm>
-            <a:off x="900000" y="900000"/>
-            <a:ext cx="10392000" cy="1100000"/>
-          </a:xfrm>
-          <a:prstGeom prst="rect">
-            <a:avLst/>
-          </a:prstGeom>
-          <a:noFill/>
-        </p:spPr>
-        <p:txBody>
-          <a:bodyPr wrap="square" anchor="ctr" lIns="90000" rIns="90000" tIns="45000" bIns="45000">
-            <a:spAutoFit/>
-          </a:bodyPr>
-          <a:lstStyle/>
-          <a:p>
-            <a:pPr algn="ctr">
-              <a:lnSpc>
-                <a:spcPct val="118000"/>
-              </a:lnSpc>
-            </a:pPr>
-            <a:r>
-              <a:rPr sz="2800" b="1" lang="ja-JP" altLang="en-US">
-                <a:solidFill>
-                  <a:srgbClr val="C9A227"/>
-                </a:solidFill>
-                <a:latin typeface="Meiryo"/>
-              </a:rPr>
-              <a:t>BGM</a:t>
-            </a:r>
-          </a:p>
-        </p:txBody>
-      </p:sp>
-      <p:sp>
-        <p:nvSpPr>
-          <p:cNvPr id="4" name="TextBox 3"/>
-          <p:cNvSpPr txBox="1"/>
-          <p:nvPr/>
-        </p:nvSpPr>
-        <p:spPr>
-          <a:xfrm>
-            <a:off x="900000" y="1850000"/>
-            <a:ext cx="10392000" cy="1300000"/>
-          </a:xfrm>
-          <a:prstGeom prst="rect">
-            <a:avLst/>
-          </a:prstGeom>
-          <a:noFill/>
-        </p:spPr>
-        <p:txBody>
-          <a:bodyPr wrap="square" anchor="ctr" lIns="90000" rIns="90000" tIns="45000" bIns="45000">
-            <a:spAutoFit/>
-          </a:bodyPr>
-          <a:lstStyle/>
-          <a:p>
-            <a:pPr algn="ctr">
-              <a:lnSpc>
-                <a:spcPct val="118000"/>
-              </a:lnSpc>
-            </a:pPr>
-            <a:r>
-              <a:rPr sz="5400" b="1" lang="ja-JP" altLang="en-US">
-                <a:solidFill>
-                  <a:srgbClr val="962C42"/>
-                </a:solidFill>
-                <a:latin typeface="Meiryo"/>
-              </a:rPr>
-              <a:t>家族になろうよ</a:t>
-            </a:r>
-          </a:p>
-        </p:txBody>
-      </p:sp>
-      <p:pic>
-        <p:nvPicPr>
-          <p:cNvPr id="5" name="家族になろうよ">
-            <a:hlinkClick r:id="" action="ppaction://media"/>
-          </p:cNvPr>
-          <p:cNvPicPr>
-            <a:picLocks noChangeAspect="1"/>
-          </p:cNvPicPr>
-          <p:nvPr>
-            <a:audioFile r:link="rId4"/>
-            <p:extLst>
-              <p:ext uri="{DAA4B4D4-6D71-4841-9C94-3DE7FCFB9230}">
-                <p14:media xmlns:p14="http://schemas.microsoft.com/office/powerpoint/2010/main" r:embed="rId3"/>
-              </p:ext>
-            </p:extLst>
-          </p:nvPr>
-        </p:nvPicPr>
-        <p:blipFill>
-          <a:blip r:embed="rId5"/>
-          <a:stretch>
-            <a:fillRect/>
-          </a:stretch>
-        </p:blipFill>
-        <p:spPr>
-          <a:xfrm>
-            <a:off x="-900000" y="200000"/>
-            <a:ext cx="406400" cy="406400"/>
-          </a:xfrm>
-          <a:prstGeom prst="rect">
-            <a:avLst/>
-          </a:prstGeom>
-        </p:spPr>
-      </p:pic>
-      <p:sp>
-        <p:nvSpPr>
-          <p:cNvPr id="6" name="BGM再生ボタン"/>
-          <p:cNvSpPr/>
-          <p:nvPr/>
-        </p:nvSpPr>
-        <p:spPr>
-          <a:xfrm>
-            <a:off x="4096000" y="3350000"/>
-            <a:ext cx="4000000" cy="1300000"/>
-          </a:xfrm>
-          <a:prstGeom prst="roundRect">
-            <a:avLst>
-              <a:gd name="adj" fmla="val 30000"/>
-            </a:avLst>
-          </a:prstGeom>
-          <a:solidFill>
-            <a:srgbClr val="962C42"/>
-          </a:solidFill>
-          <a:ln w="50800">
-            <a:solidFill>
-              <a:srgbClr val="C9A227"/>
-            </a:solidFill>
-          </a:ln>
-          <a:effectLst/>
-        </p:spPr>
-        <p:style>
-          <a:lnRef idx="1">
-            <a:schemeClr val="accent1"/>
-          </a:lnRef>
-          <a:fillRef idx="3">
-            <a:schemeClr val="accent1"/>
-          </a:fillRef>
-          <a:effectRef idx="2">
-            <a:schemeClr val="accent1"/>
-          </a:effectRef>
-          <a:fontRef idx="minor">
-            <a:schemeClr val="lt1"/>
-          </a:fontRef>
-        </p:style>
-        <p:txBody>
-          <a:bodyPr rtlCol="0" anchor="ctr" wrap="square" tIns="45000" bIns="45000"/>
-          <a:lstStyle/>
-          <a:p>
-            <a:pPr algn="ctr">
-              <a:lnSpc>
-                <a:spcPct val="105000"/>
-              </a:lnSpc>
-            </a:pPr>
-            <a:r>
-              <a:rPr sz="3200" b="1">
-                <a:solidFill>
-                  <a:srgbClr val="FFFFFF"/>
-                </a:solidFill>
-                <a:latin typeface="Meiryo"/>
-              </a:rPr>
-              <a:t>▶　BGMを再生</a:t>
-            </a:r>
-          </a:p>
-        </p:txBody>
-      </p:sp>
-      <p:sp>
-        <p:nvSpPr>
-          <p:cNvPr id="7" name="TextBox 6"/>
-          <p:cNvSpPr txBox="1"/>
-          <p:nvPr/>
-        </p:nvSpPr>
-        <p:spPr>
-          <a:xfrm>
-            <a:off x="900000" y="4950000"/>
-            <a:ext cx="10392000" cy="1200000"/>
-          </a:xfrm>
-          <a:prstGeom prst="rect">
-            <a:avLst/>
-          </a:prstGeom>
-          <a:noFill/>
-        </p:spPr>
-        <p:txBody>
-          <a:bodyPr wrap="square" anchor="ctr" lIns="90000" rIns="90000" tIns="45000" bIns="45000">
-            <a:spAutoFit/>
-          </a:bodyPr>
-          <a:lstStyle/>
-          <a:p>
-            <a:pPr algn="ctr">
-              <a:lnSpc>
-                <a:spcPct val="118000"/>
-              </a:lnSpc>
-            </a:pPr>
-            <a:r>
-              <a:rPr sz="1800" b="1" lang="ja-JP" altLang="en-US">
-                <a:solidFill>
-                  <a:srgbClr val="3A2E2A"/>
-                </a:solidFill>
-                <a:latin typeface="Meiryo"/>
-              </a:rPr>
-              <a:t>↑ このボタン自体をクリックすると再生されます（スライド送りでは鳴りません）</a:t>
-            </a:r>
-          </a:p>
-          <a:p>
-            <a:pPr algn="ctr">
-              <a:lnSpc>
-                <a:spcPct val="118000"/>
-              </a:lnSpc>
-            </a:pPr>
-            <a:r>
-              <a:rPr sz="1600" b="0" lang="ja-JP" altLang="en-US">
-                <a:solidFill>
-                  <a:srgbClr val="3A2E2A"/>
-                </a:solidFill>
-                <a:latin typeface="Meiryo"/>
-              </a:rPr>
-              <a:t>（今は無音のダミー音源が入っています。mp3をいただければ差し替えます）</a:t>
-            </a:r>
-          </a:p>
-        </p:txBody>
-      </p:sp>
-    </p:spTree>
-  </p:cSld>
-  <p:clrMapOvr>
-    <a:masterClrMapping/>
-  </p:clrMapOvr>
-  <p:transition spd="med">
-    <p:fade/>
-  </p:transition>
-  <p:timing>
-    <p:tnLst>
-      <p:par>
-        <p:cTn id="1" dur="indefinite" restart="never" nodeType="tmRoot">
-          <p:childTnLst>
-            <p:seq concurrent="1" nextAc="seek">
-              <p:cTn id="3" restart="whenNotActive" fill="hold" evt="onClick" nodeType="interactiveSeq">
-                <p:stCondLst>
-                  <p:cond evt="onClick" delay="0">
-                    <p:tgtEl>
-                      <p:spTgt spid="6"/>
-                    </p:tgtEl>
-                  </p:cond>
-                </p:stCondLst>
-                <p:endSync evt="end" delay="0">
-                  <p:rtn val="all"/>
-                </p:endSync>
-                <p:childTnLst>
-                  <p:par>
-                    <p:cTn id="4" fill="hold">
-                      <p:stCondLst>
-                        <p:cond delay="0"/>
-                      </p:stCondLst>
-                      <p:childTnLst>
-                        <p:par>
-                          <p:cTn id="5" fill="hold">
-                            <p:stCondLst>
-                              <p:cond delay="0"/>
-                            </p:stCondLst>
-                            <p:childTnLst>
-                              <p:par>
-                                <p:cTn id="6" presetID="1" presetClass="mediacall" presetSubtype="0" fill="hold" nodeType="clickEffect">
-                                  <p:stCondLst>
-                                    <p:cond delay="0"/>
-                                  </p:stCondLst>
-                                  <p:childTnLst>
-                                    <p:cmd type="call" cmd="playFrom(0.0)">
-                                      <p:cBhvr>
-                                        <p:cTn id="7" dur="7975" fill="hold"/>
-                                        <p:tgtEl>
-                                          <p:spTgt spid="5"/>
-                                        </p:tgtEl>
-                                      </p:cBhvr>
-                                    </p:cmd>
-                                  </p:childTnLst>
-                                </p:cTn>
-                              </p:par>
-                            </p:childTnLst>
-                          </p:cTn>
-                        </p:par>
-                      </p:childTnLst>
-                    </p:cTn>
-                  </p:par>
-                </p:childTnLst>
-              </p:cTn>
-              <p:prevCondLst>
-                <p:cond evt="onPrev" delay="0">
-                  <p:tgtEl>
-                    <p:sldTgt/>
-                  </p:tgtEl>
-                </p:cond>
-              </p:prevCondLst>
-              <p:nextCondLst>
-                <p:cond evt="onNext" delay="0">
-                  <p:tgtEl>
-                    <p:sldTgt/>
-                  </p:tgtEl>
-                </p:cond>
-              </p:nextCondLst>
-            </p:seq>
-            <p:audio>
-              <p:cMediaNode vol="80000">
-                <p:cTn id="8" fill="hold" display="0">
-                  <p:stCondLst>
-                    <p:cond delay="indefinite"/>
-                  </p:stCondLst>
-                  <p:endCondLst>
-                    <p:cond evt="onStopAudio" delay="0">
-                      <p:tgtEl>
-                        <p:sldTgt/>
-                      </p:tgtEl>
-                    </p:cond>
-                  </p:endCondLst>
-                </p:cTn>
-                <p:tgtEl>
-                  <p:spTgt spid="5"/>
-                </p:tgtEl>
-              </p:cMediaNode>
-            </p:audio>
-          </p:childTnLst>
-        </p:cTn>
-      </p:par>
-    </p:tnLst>
-  </p:timing>
-</p:sld>
-</file>
-
-<file path=ppt/slides/slide29.xml><?xml version="1.0" encoding="utf-8"?>
-<p:sld xmlns:a="http://schemas.openxmlformats.org/drawingml/2006/main" xmlns:p="http://schemas.openxmlformats.org/presentationml/2006/main" xmlns:r="http://schemas.openxmlformats.org/officeDocument/2006/relationships">
-  <p:cSld>
-    <p:spTree>
-      <p:nvGrpSpPr>
-        <p:cNvPr id="1" name=""/>
-        <p:cNvGrpSpPr/>
-        <p:nvPr/>
-      </p:nvGrpSpPr>
-      <p:grpSpPr/>
-      <p:pic>
-        <p:nvPicPr>
           <p:cNvPr id="2" name="Picture 1" descr="bg_title.png"/>
           <p:cNvPicPr>
             <a:picLocks noChangeAspect="1"/>
@@ -28470,7 +26069,7 @@
                 </a:solidFill>
                 <a:latin typeface="Meiryo"/>
               </a:rPr>
-              <a:t>『{{司会者名}}』さんである</a:t>
+              <a:t>『森月子』さんである</a:t>
             </a:r>
           </a:p>
         </p:txBody>
@@ -28525,7 +26124,92 @@
       </p:sp>
       <p:sp>
         <p:nvSpPr>
-          <p:cNvPr id="6" name="Rounded Rectangle 5"/>
+          <p:cNvPr id="6" name="Donut 5"/>
+          <p:cNvSpPr/>
+          <p:nvPr/>
+        </p:nvSpPr>
+        <p:spPr>
+          <a:xfrm>
+            <a:off x="2775000" y="3440000"/>
+            <a:ext cx="1000000" cy="1000000"/>
+          </a:xfrm>
+          <a:prstGeom prst="donut">
+            <a:avLst>
+              <a:gd name="adj" fmla="val 13000"/>
+            </a:avLst>
+          </a:prstGeom>
+          <a:solidFill>
+            <a:srgbClr val="D94F70"/>
+          </a:solidFill>
+          <a:ln>
+            <a:noFill/>
+          </a:ln>
+          <a:effectLst/>
+        </p:spPr>
+        <p:style>
+          <a:lnRef idx="1">
+            <a:schemeClr val="accent1"/>
+          </a:lnRef>
+          <a:fillRef idx="3">
+            <a:schemeClr val="accent1"/>
+          </a:fillRef>
+          <a:effectRef idx="2">
+            <a:schemeClr val="accent1"/>
+          </a:effectRef>
+          <a:fontRef idx="minor">
+            <a:schemeClr val="lt1"/>
+          </a:fontRef>
+        </p:style>
+        <p:txBody>
+          <a:bodyPr rtlCol="0" anchor="ctr"/>
+          <a:lstStyle/>
+          <a:p>
+            <a:pPr algn="ctr"/>
+          </a:p>
+        </p:txBody>
+      </p:sp>
+      <p:sp>
+        <p:nvSpPr>
+          <p:cNvPr id="7" name="TextBox 6"/>
+          <p:cNvSpPr txBox="1"/>
+          <p:nvPr/>
+        </p:nvSpPr>
+        <p:spPr>
+          <a:xfrm>
+            <a:off x="1150000" y="4590000"/>
+            <a:ext cx="4250000" cy="640000"/>
+          </a:xfrm>
+          <a:prstGeom prst="rect">
+            <a:avLst/>
+          </a:prstGeom>
+          <a:noFill/>
+        </p:spPr>
+        <p:txBody>
+          <a:bodyPr wrap="square" anchor="ctr" lIns="90000" rIns="90000" tIns="45000" bIns="45000">
+            <a:spAutoFit/>
+          </a:bodyPr>
+          <a:lstStyle/>
+          <a:p>
+            <a:pPr algn="ctr">
+              <a:lnSpc>
+                <a:spcPct val="118000"/>
+              </a:lnSpc>
+            </a:pPr>
+            <a:r>
+              <a:rPr sz="1900" b="1" lang="ja-JP" altLang="en-US">
+                <a:solidFill>
+                  <a:srgbClr val="3A2E2A"/>
+                </a:solidFill>
+                <a:latin typeface="Meiryo"/>
+              </a:rPr>
+              <a:t>画面に向かって 左 へ移動</a:t>
+            </a:r>
+          </a:p>
+        </p:txBody>
+      </p:sp>
+      <p:sp>
+        <p:nvSpPr>
+          <p:cNvPr id="8" name="Rounded Rectangle 7"/>
           <p:cNvSpPr/>
           <p:nvPr/>
         </p:nvSpPr>
@@ -28573,91 +26257,6 @@
       </p:sp>
       <p:sp>
         <p:nvSpPr>
-          <p:cNvPr id="7" name="Donut 6"/>
-          <p:cNvSpPr/>
-          <p:nvPr/>
-        </p:nvSpPr>
-        <p:spPr>
-          <a:xfrm>
-            <a:off x="2775000" y="3440000"/>
-            <a:ext cx="1000000" cy="1000000"/>
-          </a:xfrm>
-          <a:prstGeom prst="donut">
-            <a:avLst>
-              <a:gd name="adj" fmla="val 13000"/>
-            </a:avLst>
-          </a:prstGeom>
-          <a:solidFill>
-            <a:srgbClr val="D94F70"/>
-          </a:solidFill>
-          <a:ln>
-            <a:noFill/>
-          </a:ln>
-          <a:effectLst/>
-        </p:spPr>
-        <p:style>
-          <a:lnRef idx="1">
-            <a:schemeClr val="accent1"/>
-          </a:lnRef>
-          <a:fillRef idx="3">
-            <a:schemeClr val="accent1"/>
-          </a:fillRef>
-          <a:effectRef idx="2">
-            <a:schemeClr val="accent1"/>
-          </a:effectRef>
-          <a:fontRef idx="minor">
-            <a:schemeClr val="lt1"/>
-          </a:fontRef>
-        </p:style>
-        <p:txBody>
-          <a:bodyPr rtlCol="0" anchor="ctr"/>
-          <a:lstStyle/>
-          <a:p>
-            <a:pPr algn="ctr"/>
-          </a:p>
-        </p:txBody>
-      </p:sp>
-      <p:sp>
-        <p:nvSpPr>
-          <p:cNvPr id="8" name="TextBox 7"/>
-          <p:cNvSpPr txBox="1"/>
-          <p:nvPr/>
-        </p:nvSpPr>
-        <p:spPr>
-          <a:xfrm>
-            <a:off x="1150000" y="4590000"/>
-            <a:ext cx="4250000" cy="640000"/>
-          </a:xfrm>
-          <a:prstGeom prst="rect">
-            <a:avLst/>
-          </a:prstGeom>
-          <a:noFill/>
-        </p:spPr>
-        <p:txBody>
-          <a:bodyPr wrap="square" anchor="ctr" lIns="90000" rIns="90000" tIns="45000" bIns="45000">
-            <a:spAutoFit/>
-          </a:bodyPr>
-          <a:lstStyle/>
-          <a:p>
-            <a:pPr algn="ctr">
-              <a:lnSpc>
-                <a:spcPct val="118000"/>
-              </a:lnSpc>
-            </a:pPr>
-            <a:r>
-              <a:rPr sz="1900" b="1" lang="ja-JP" altLang="en-US">
-                <a:solidFill>
-                  <a:srgbClr val="3A2E2A"/>
-                </a:solidFill>
-                <a:latin typeface="Meiryo"/>
-              </a:rPr>
-              <a:t>画面に向かって 左 へ移動</a:t>
-            </a:r>
-          </a:p>
-        </p:txBody>
-      </p:sp>
-      <p:sp>
-        <p:nvSpPr>
           <p:cNvPr id="9" name="Rounded Rectangle 8"/>
           <p:cNvSpPr/>
           <p:nvPr/>
@@ -29320,7 +26919,7 @@
                 </a:solidFill>
                 <a:latin typeface="Meiryo"/>
               </a:rPr>
-              <a:t>正解は ○ ！ 司会は {{司会者名}} さんでした🎤</a:t>
+              <a:t>正解は ○ ！ 司会は森月子さんです🎤 今日はよろしくお願いします！</a:t>
             </a:r>
           </a:p>
         </p:txBody>
@@ -30414,7 +28013,92 @@
       </p:sp>
       <p:sp>
         <p:nvSpPr>
-          <p:cNvPr id="6" name="Rounded Rectangle 5"/>
+          <p:cNvPr id="6" name="Donut 5"/>
+          <p:cNvSpPr/>
+          <p:nvPr/>
+        </p:nvSpPr>
+        <p:spPr>
+          <a:xfrm>
+            <a:off x="2775000" y="3440000"/>
+            <a:ext cx="1000000" cy="1000000"/>
+          </a:xfrm>
+          <a:prstGeom prst="donut">
+            <a:avLst>
+              <a:gd name="adj" fmla="val 13000"/>
+            </a:avLst>
+          </a:prstGeom>
+          <a:solidFill>
+            <a:srgbClr val="D94F70"/>
+          </a:solidFill>
+          <a:ln>
+            <a:noFill/>
+          </a:ln>
+          <a:effectLst/>
+        </p:spPr>
+        <p:style>
+          <a:lnRef idx="1">
+            <a:schemeClr val="accent1"/>
+          </a:lnRef>
+          <a:fillRef idx="3">
+            <a:schemeClr val="accent1"/>
+          </a:fillRef>
+          <a:effectRef idx="2">
+            <a:schemeClr val="accent1"/>
+          </a:effectRef>
+          <a:fontRef idx="minor">
+            <a:schemeClr val="lt1"/>
+          </a:fontRef>
+        </p:style>
+        <p:txBody>
+          <a:bodyPr rtlCol="0" anchor="ctr"/>
+          <a:lstStyle/>
+          <a:p>
+            <a:pPr algn="ctr"/>
+          </a:p>
+        </p:txBody>
+      </p:sp>
+      <p:sp>
+        <p:nvSpPr>
+          <p:cNvPr id="7" name="TextBox 6"/>
+          <p:cNvSpPr txBox="1"/>
+          <p:nvPr/>
+        </p:nvSpPr>
+        <p:spPr>
+          <a:xfrm>
+            <a:off x="1150000" y="4590000"/>
+            <a:ext cx="4250000" cy="640000"/>
+          </a:xfrm>
+          <a:prstGeom prst="rect">
+            <a:avLst/>
+          </a:prstGeom>
+          <a:noFill/>
+        </p:spPr>
+        <p:txBody>
+          <a:bodyPr wrap="square" anchor="ctr" lIns="90000" rIns="90000" tIns="45000" bIns="45000">
+            <a:spAutoFit/>
+          </a:bodyPr>
+          <a:lstStyle/>
+          <a:p>
+            <a:pPr algn="ctr">
+              <a:lnSpc>
+                <a:spcPct val="118000"/>
+              </a:lnSpc>
+            </a:pPr>
+            <a:r>
+              <a:rPr sz="1900" b="1" lang="ja-JP" altLang="en-US">
+                <a:solidFill>
+                  <a:srgbClr val="3A2E2A"/>
+                </a:solidFill>
+                <a:latin typeface="Meiryo"/>
+              </a:rPr>
+              <a:t>画面に向かって 左 へ移動</a:t>
+            </a:r>
+          </a:p>
+        </p:txBody>
+      </p:sp>
+      <p:sp>
+        <p:nvSpPr>
+          <p:cNvPr id="8" name="Rounded Rectangle 7"/>
           <p:cNvSpPr/>
           <p:nvPr/>
         </p:nvSpPr>
@@ -30462,91 +28146,6 @@
       </p:sp>
       <p:sp>
         <p:nvSpPr>
-          <p:cNvPr id="7" name="Donut 6"/>
-          <p:cNvSpPr/>
-          <p:nvPr/>
-        </p:nvSpPr>
-        <p:spPr>
-          <a:xfrm>
-            <a:off x="2775000" y="3440000"/>
-            <a:ext cx="1000000" cy="1000000"/>
-          </a:xfrm>
-          <a:prstGeom prst="donut">
-            <a:avLst>
-              <a:gd name="adj" fmla="val 13000"/>
-            </a:avLst>
-          </a:prstGeom>
-          <a:solidFill>
-            <a:srgbClr val="D94F70"/>
-          </a:solidFill>
-          <a:ln>
-            <a:noFill/>
-          </a:ln>
-          <a:effectLst/>
-        </p:spPr>
-        <p:style>
-          <a:lnRef idx="1">
-            <a:schemeClr val="accent1"/>
-          </a:lnRef>
-          <a:fillRef idx="3">
-            <a:schemeClr val="accent1"/>
-          </a:fillRef>
-          <a:effectRef idx="2">
-            <a:schemeClr val="accent1"/>
-          </a:effectRef>
-          <a:fontRef idx="minor">
-            <a:schemeClr val="lt1"/>
-          </a:fontRef>
-        </p:style>
-        <p:txBody>
-          <a:bodyPr rtlCol="0" anchor="ctr"/>
-          <a:lstStyle/>
-          <a:p>
-            <a:pPr algn="ctr"/>
-          </a:p>
-        </p:txBody>
-      </p:sp>
-      <p:sp>
-        <p:nvSpPr>
-          <p:cNvPr id="8" name="TextBox 7"/>
-          <p:cNvSpPr txBox="1"/>
-          <p:nvPr/>
-        </p:nvSpPr>
-        <p:spPr>
-          <a:xfrm>
-            <a:off x="1150000" y="4590000"/>
-            <a:ext cx="4250000" cy="640000"/>
-          </a:xfrm>
-          <a:prstGeom prst="rect">
-            <a:avLst/>
-          </a:prstGeom>
-          <a:noFill/>
-        </p:spPr>
-        <p:txBody>
-          <a:bodyPr wrap="square" anchor="ctr" lIns="90000" rIns="90000" tIns="45000" bIns="45000">
-            <a:spAutoFit/>
-          </a:bodyPr>
-          <a:lstStyle/>
-          <a:p>
-            <a:pPr algn="ctr">
-              <a:lnSpc>
-                <a:spcPct val="118000"/>
-              </a:lnSpc>
-            </a:pPr>
-            <a:r>
-              <a:rPr sz="1900" b="1" lang="ja-JP" altLang="en-US">
-                <a:solidFill>
-                  <a:srgbClr val="3A2E2A"/>
-                </a:solidFill>
-                <a:latin typeface="Meiryo"/>
-              </a:rPr>
-              <a:t>画面に向かって 左 へ移動</a:t>
-            </a:r>
-          </a:p>
-        </p:txBody>
-      </p:sp>
-      <p:sp>
-        <p:nvSpPr>
           <p:cNvPr id="9" name="Rounded Rectangle 8"/>
           <p:cNvSpPr/>
           <p:nvPr/>
@@ -31209,7 +28808,7 @@
                 </a:solidFill>
                 <a:latin typeface="Meiryo"/>
               </a:rPr>
-              <a:t>正解は ○ ！ 台風{{台風番号}}号です。こんな日にお越しいただき本当にありがとうございます☔</a:t>
+              <a:t>正解は ○ ！ 台風{{台風番号}}号です。こんな日にお越しいただきありがとうございます☔</a:t>
             </a:r>
           </a:p>
         </p:txBody>
@@ -32303,7 +29902,92 @@
       </p:sp>
       <p:sp>
         <p:nvSpPr>
-          <p:cNvPr id="6" name="Rounded Rectangle 5"/>
+          <p:cNvPr id="6" name="Donut 5"/>
+          <p:cNvSpPr/>
+          <p:nvPr/>
+        </p:nvSpPr>
+        <p:spPr>
+          <a:xfrm>
+            <a:off x="2775000" y="3440000"/>
+            <a:ext cx="1000000" cy="1000000"/>
+          </a:xfrm>
+          <a:prstGeom prst="donut">
+            <a:avLst>
+              <a:gd name="adj" fmla="val 13000"/>
+            </a:avLst>
+          </a:prstGeom>
+          <a:solidFill>
+            <a:srgbClr val="D94F70"/>
+          </a:solidFill>
+          <a:ln>
+            <a:noFill/>
+          </a:ln>
+          <a:effectLst/>
+        </p:spPr>
+        <p:style>
+          <a:lnRef idx="1">
+            <a:schemeClr val="accent1"/>
+          </a:lnRef>
+          <a:fillRef idx="3">
+            <a:schemeClr val="accent1"/>
+          </a:fillRef>
+          <a:effectRef idx="2">
+            <a:schemeClr val="accent1"/>
+          </a:effectRef>
+          <a:fontRef idx="minor">
+            <a:schemeClr val="lt1"/>
+          </a:fontRef>
+        </p:style>
+        <p:txBody>
+          <a:bodyPr rtlCol="0" anchor="ctr"/>
+          <a:lstStyle/>
+          <a:p>
+            <a:pPr algn="ctr"/>
+          </a:p>
+        </p:txBody>
+      </p:sp>
+      <p:sp>
+        <p:nvSpPr>
+          <p:cNvPr id="7" name="TextBox 6"/>
+          <p:cNvSpPr txBox="1"/>
+          <p:nvPr/>
+        </p:nvSpPr>
+        <p:spPr>
+          <a:xfrm>
+            <a:off x="1150000" y="4590000"/>
+            <a:ext cx="4250000" cy="640000"/>
+          </a:xfrm>
+          <a:prstGeom prst="rect">
+            <a:avLst/>
+          </a:prstGeom>
+          <a:noFill/>
+        </p:spPr>
+        <p:txBody>
+          <a:bodyPr wrap="square" anchor="ctr" lIns="90000" rIns="90000" tIns="45000" bIns="45000">
+            <a:spAutoFit/>
+          </a:bodyPr>
+          <a:lstStyle/>
+          <a:p>
+            <a:pPr algn="ctr">
+              <a:lnSpc>
+                <a:spcPct val="118000"/>
+              </a:lnSpc>
+            </a:pPr>
+            <a:r>
+              <a:rPr sz="1900" b="1" lang="ja-JP" altLang="en-US">
+                <a:solidFill>
+                  <a:srgbClr val="3A2E2A"/>
+                </a:solidFill>
+                <a:latin typeface="Meiryo"/>
+              </a:rPr>
+              <a:t>画面に向かって 左 へ移動</a:t>
+            </a:r>
+          </a:p>
+        </p:txBody>
+      </p:sp>
+      <p:sp>
+        <p:nvSpPr>
+          <p:cNvPr id="8" name="Rounded Rectangle 7"/>
           <p:cNvSpPr/>
           <p:nvPr/>
         </p:nvSpPr>
@@ -32346,91 +30030,6 @@
           <a:lstStyle/>
           <a:p>
             <a:pPr algn="ctr"/>
-          </a:p>
-        </p:txBody>
-      </p:sp>
-      <p:sp>
-        <p:nvSpPr>
-          <p:cNvPr id="7" name="Donut 6"/>
-          <p:cNvSpPr/>
-          <p:nvPr/>
-        </p:nvSpPr>
-        <p:spPr>
-          <a:xfrm>
-            <a:off x="2775000" y="3440000"/>
-            <a:ext cx="1000000" cy="1000000"/>
-          </a:xfrm>
-          <a:prstGeom prst="donut">
-            <a:avLst>
-              <a:gd name="adj" fmla="val 13000"/>
-            </a:avLst>
-          </a:prstGeom>
-          <a:solidFill>
-            <a:srgbClr val="D94F70"/>
-          </a:solidFill>
-          <a:ln>
-            <a:noFill/>
-          </a:ln>
-          <a:effectLst/>
-        </p:spPr>
-        <p:style>
-          <a:lnRef idx="1">
-            <a:schemeClr val="accent1"/>
-          </a:lnRef>
-          <a:fillRef idx="3">
-            <a:schemeClr val="accent1"/>
-          </a:fillRef>
-          <a:effectRef idx="2">
-            <a:schemeClr val="accent1"/>
-          </a:effectRef>
-          <a:fontRef idx="minor">
-            <a:schemeClr val="lt1"/>
-          </a:fontRef>
-        </p:style>
-        <p:txBody>
-          <a:bodyPr rtlCol="0" anchor="ctr"/>
-          <a:lstStyle/>
-          <a:p>
-            <a:pPr algn="ctr"/>
-          </a:p>
-        </p:txBody>
-      </p:sp>
-      <p:sp>
-        <p:nvSpPr>
-          <p:cNvPr id="8" name="TextBox 7"/>
-          <p:cNvSpPr txBox="1"/>
-          <p:nvPr/>
-        </p:nvSpPr>
-        <p:spPr>
-          <a:xfrm>
-            <a:off x="1150000" y="4590000"/>
-            <a:ext cx="4250000" cy="640000"/>
-          </a:xfrm>
-          <a:prstGeom prst="rect">
-            <a:avLst/>
-          </a:prstGeom>
-          <a:noFill/>
-        </p:spPr>
-        <p:txBody>
-          <a:bodyPr wrap="square" anchor="ctr" lIns="90000" rIns="90000" tIns="45000" bIns="45000">
-            <a:spAutoFit/>
-          </a:bodyPr>
-          <a:lstStyle/>
-          <a:p>
-            <a:pPr algn="ctr">
-              <a:lnSpc>
-                <a:spcPct val="118000"/>
-              </a:lnSpc>
-            </a:pPr>
-            <a:r>
-              <a:rPr sz="1900" b="1" lang="ja-JP" altLang="en-US">
-                <a:solidFill>
-                  <a:srgbClr val="3A2E2A"/>
-                </a:solidFill>
-                <a:latin typeface="Meiryo"/>
-              </a:rPr>
-              <a:t>画面に向かって 左 へ移動</a:t>
-            </a:r>
           </a:p>
         </p:txBody>
       </p:sp>
@@ -34192,7 +31791,92 @@
       </p:sp>
       <p:sp>
         <p:nvSpPr>
-          <p:cNvPr id="6" name="Rounded Rectangle 5"/>
+          <p:cNvPr id="6" name="Donut 5"/>
+          <p:cNvSpPr/>
+          <p:nvPr/>
+        </p:nvSpPr>
+        <p:spPr>
+          <a:xfrm>
+            <a:off x="2775000" y="3440000"/>
+            <a:ext cx="1000000" cy="1000000"/>
+          </a:xfrm>
+          <a:prstGeom prst="donut">
+            <a:avLst>
+              <a:gd name="adj" fmla="val 13000"/>
+            </a:avLst>
+          </a:prstGeom>
+          <a:solidFill>
+            <a:srgbClr val="D94F70"/>
+          </a:solidFill>
+          <a:ln>
+            <a:noFill/>
+          </a:ln>
+          <a:effectLst/>
+        </p:spPr>
+        <p:style>
+          <a:lnRef idx="1">
+            <a:schemeClr val="accent1"/>
+          </a:lnRef>
+          <a:fillRef idx="3">
+            <a:schemeClr val="accent1"/>
+          </a:fillRef>
+          <a:effectRef idx="2">
+            <a:schemeClr val="accent1"/>
+          </a:effectRef>
+          <a:fontRef idx="minor">
+            <a:schemeClr val="lt1"/>
+          </a:fontRef>
+        </p:style>
+        <p:txBody>
+          <a:bodyPr rtlCol="0" anchor="ctr"/>
+          <a:lstStyle/>
+          <a:p>
+            <a:pPr algn="ctr"/>
+          </a:p>
+        </p:txBody>
+      </p:sp>
+      <p:sp>
+        <p:nvSpPr>
+          <p:cNvPr id="7" name="TextBox 6"/>
+          <p:cNvSpPr txBox="1"/>
+          <p:nvPr/>
+        </p:nvSpPr>
+        <p:spPr>
+          <a:xfrm>
+            <a:off x="1150000" y="4590000"/>
+            <a:ext cx="4250000" cy="640000"/>
+          </a:xfrm>
+          <a:prstGeom prst="rect">
+            <a:avLst/>
+          </a:prstGeom>
+          <a:noFill/>
+        </p:spPr>
+        <p:txBody>
+          <a:bodyPr wrap="square" anchor="ctr" lIns="90000" rIns="90000" tIns="45000" bIns="45000">
+            <a:spAutoFit/>
+          </a:bodyPr>
+          <a:lstStyle/>
+          <a:p>
+            <a:pPr algn="ctr">
+              <a:lnSpc>
+                <a:spcPct val="118000"/>
+              </a:lnSpc>
+            </a:pPr>
+            <a:r>
+              <a:rPr sz="1900" b="1" lang="ja-JP" altLang="en-US">
+                <a:solidFill>
+                  <a:srgbClr val="3A2E2A"/>
+                </a:solidFill>
+                <a:latin typeface="Meiryo"/>
+              </a:rPr>
+              <a:t>画面に向かって 左 へ移動</a:t>
+            </a:r>
+          </a:p>
+        </p:txBody>
+      </p:sp>
+      <p:sp>
+        <p:nvSpPr>
+          <p:cNvPr id="8" name="Rounded Rectangle 7"/>
           <p:cNvSpPr/>
           <p:nvPr/>
         </p:nvSpPr>
@@ -34235,91 +31919,6 @@
           <a:lstStyle/>
           <a:p>
             <a:pPr algn="ctr"/>
-          </a:p>
-        </p:txBody>
-      </p:sp>
-      <p:sp>
-        <p:nvSpPr>
-          <p:cNvPr id="7" name="Donut 6"/>
-          <p:cNvSpPr/>
-          <p:nvPr/>
-        </p:nvSpPr>
-        <p:spPr>
-          <a:xfrm>
-            <a:off x="2775000" y="3440000"/>
-            <a:ext cx="1000000" cy="1000000"/>
-          </a:xfrm>
-          <a:prstGeom prst="donut">
-            <a:avLst>
-              <a:gd name="adj" fmla="val 13000"/>
-            </a:avLst>
-          </a:prstGeom>
-          <a:solidFill>
-            <a:srgbClr val="D94F70"/>
-          </a:solidFill>
-          <a:ln>
-            <a:noFill/>
-          </a:ln>
-          <a:effectLst/>
-        </p:spPr>
-        <p:style>
-          <a:lnRef idx="1">
-            <a:schemeClr val="accent1"/>
-          </a:lnRef>
-          <a:fillRef idx="3">
-            <a:schemeClr val="accent1"/>
-          </a:fillRef>
-          <a:effectRef idx="2">
-            <a:schemeClr val="accent1"/>
-          </a:effectRef>
-          <a:fontRef idx="minor">
-            <a:schemeClr val="lt1"/>
-          </a:fontRef>
-        </p:style>
-        <p:txBody>
-          <a:bodyPr rtlCol="0" anchor="ctr"/>
-          <a:lstStyle/>
-          <a:p>
-            <a:pPr algn="ctr"/>
-          </a:p>
-        </p:txBody>
-      </p:sp>
-      <p:sp>
-        <p:nvSpPr>
-          <p:cNvPr id="8" name="TextBox 7"/>
-          <p:cNvSpPr txBox="1"/>
-          <p:nvPr/>
-        </p:nvSpPr>
-        <p:spPr>
-          <a:xfrm>
-            <a:off x="1150000" y="4590000"/>
-            <a:ext cx="4250000" cy="640000"/>
-          </a:xfrm>
-          <a:prstGeom prst="rect">
-            <a:avLst/>
-          </a:prstGeom>
-          <a:noFill/>
-        </p:spPr>
-        <p:txBody>
-          <a:bodyPr wrap="square" anchor="ctr" lIns="90000" rIns="90000" tIns="45000" bIns="45000">
-            <a:spAutoFit/>
-          </a:bodyPr>
-          <a:lstStyle/>
-          <a:p>
-            <a:pPr algn="ctr">
-              <a:lnSpc>
-                <a:spcPct val="118000"/>
-              </a:lnSpc>
-            </a:pPr>
-            <a:r>
-              <a:rPr sz="1900" b="1" lang="ja-JP" altLang="en-US">
-                <a:solidFill>
-                  <a:srgbClr val="3A2E2A"/>
-                </a:solidFill>
-                <a:latin typeface="Meiryo"/>
-              </a:rPr>
-              <a:t>画面に向かって 左 へ移動</a:t>
-            </a:r>
           </a:p>
         </p:txBody>
       </p:sp>
